--- a/slides/sources/J4-objets-pandas.pptx
+++ b/slides/sources/J4-objets-pandas.pptx
@@ -1658,7 +1658,7 @@
     <p:bg>
       <p:bgPr>
         <a:solidFill>
-          <a:srgbClr val="0D3325"/>
+          <a:srgbClr val="0A2E1A"/>
         </a:solidFill>
       </p:bgPr>
     </p:bg>
@@ -1691,7 +1691,7 @@
             <a:avLst/>
           </a:prstGeom>
           <a:solidFill>
-            <a:srgbClr val="14563C"/>
+            <a:srgbClr val="0E7A3D"/>
           </a:solidFill>
           <a:ln/>
         </p:spPr>
@@ -1711,8 +1711,8 @@
             <a:avLst/>
           </a:prstGeom>
           <a:solidFill>
-            <a:srgbClr val="C9A227">
-              <a:alpha val="45000"/>
+            <a:srgbClr val="FCD116">
+              <a:alpha val="55000"/>
             </a:srgbClr>
           </a:solidFill>
           <a:ln/>
@@ -1733,8 +1733,8 @@
             <a:avLst/>
           </a:prstGeom>
           <a:solidFill>
-            <a:srgbClr val="1E7A50">
-              <a:alpha val="60000"/>
+            <a:srgbClr val="CE1126">
+              <a:alpha val="65000"/>
             </a:srgbClr>
           </a:solidFill>
           <a:ln/>
@@ -1742,7 +1742,53 @@
       </p:sp>
       <p:sp>
         <p:nvSpPr>
-          <p:cNvPr id="5" name="Text 3"/>
+          <p:cNvPr id="5" name="Shape 3"/>
+          <p:cNvSpPr/>
+          <p:nvPr/>
+        </p:nvSpPr>
+        <p:spPr>
+          <a:xfrm>
+            <a:off x="9464040" y="502920"/>
+            <a:ext cx="2148840" cy="1828800"/>
+          </a:xfrm>
+          <a:prstGeom prst="roundRect">
+            <a:avLst>
+              <a:gd name="adj" fmla="val 6000"/>
+            </a:avLst>
+          </a:prstGeom>
+          <a:solidFill>
+            <a:srgbClr val="FFFFFF"/>
+          </a:solidFill>
+          <a:ln/>
+        </p:spPr>
+      </p:sp>
+      <p:pic>
+        <p:nvPicPr>
+          <p:cNvPr id="6" name="Image 0" descr="logo-dgi.png">    </p:cNvPr>
+          <p:cNvPicPr>
+            <a:picLocks noChangeAspect="1"/>
+          </p:cNvPicPr>
+          <p:nvPr/>
+        </p:nvPicPr>
+        <p:blipFill>
+          <a:blip r:embed="rId1"/>
+          <a:stretch>
+            <a:fillRect/>
+          </a:stretch>
+        </p:blipFill>
+        <p:spPr>
+          <a:xfrm>
+            <a:off x="9646920" y="740664"/>
+            <a:ext cx="1783080" cy="1353312"/>
+          </a:xfrm>
+          <a:prstGeom prst="rect">
+            <a:avLst/>
+          </a:prstGeom>
+        </p:spPr>
+      </p:pic>
+      <p:sp>
+        <p:nvSpPr>
+          <p:cNvPr id="7" name="Text 4"/>
           <p:cNvSpPr/>
           <p:nvPr/>
         </p:nvSpPr>
@@ -1767,7 +1813,7 @@
             <a:r>
               <a:rPr lang="en-US" sz="1500" b="1" spc="300" kern="0" dirty="0">
                 <a:solidFill>
-                  <a:srgbClr val="C9A227"/>
+                  <a:srgbClr val="FCD116"/>
                 </a:solidFill>
                 <a:latin typeface="Calibri" pitchFamily="34" charset="0"/>
                 <a:ea typeface="Calibri" pitchFamily="34" charset="-122"/>
@@ -1781,7 +1827,7 @@
       </p:sp>
       <p:sp>
         <p:nvSpPr>
-          <p:cNvPr id="6" name="Text 4"/>
+          <p:cNvPr id="8" name="Text 5"/>
           <p:cNvSpPr/>
           <p:nvPr/>
         </p:nvSpPr>
@@ -1820,7 +1866,7 @@
       </p:sp>
       <p:sp>
         <p:nvSpPr>
-          <p:cNvPr id="7" name="Text 5"/>
+          <p:cNvPr id="9" name="Text 6"/>
           <p:cNvSpPr/>
           <p:nvPr/>
         </p:nvSpPr>
@@ -1845,7 +1891,7 @@
             <a:r>
               <a:rPr lang="en-US" sz="3500" b="1" dirty="0">
                 <a:solidFill>
-                  <a:srgbClr val="E8D48A"/>
+                  <a:srgbClr val="FCD116"/>
                 </a:solidFill>
                 <a:latin typeface="Cambria" pitchFamily="34" charset="0"/>
                 <a:ea typeface="Cambria" pitchFamily="34" charset="-122"/>
@@ -1859,7 +1905,7 @@
       </p:sp>
       <p:sp>
         <p:nvSpPr>
-          <p:cNvPr id="8" name="Text 6"/>
+          <p:cNvPr id="10" name="Text 7"/>
           <p:cNvSpPr/>
           <p:nvPr/>
         </p:nvSpPr>
@@ -1921,7 +1967,7 @@
       </p:sp>
       <p:sp>
         <p:nvSpPr>
-          <p:cNvPr id="9" name="Shape 7"/>
+          <p:cNvPr id="11" name="Shape 8"/>
           <p:cNvSpPr/>
           <p:nvPr/>
         </p:nvSpPr>
@@ -1936,14 +1982,14 @@
             </a:avLst>
           </a:prstGeom>
           <a:solidFill>
-            <a:srgbClr val="14563C"/>
+            <a:srgbClr val="0E7A3D"/>
           </a:solidFill>
           <a:ln/>
         </p:spPr>
       </p:sp>
       <p:sp>
         <p:nvSpPr>
-          <p:cNvPr id="10" name="Text 8"/>
+          <p:cNvPr id="12" name="Text 9"/>
           <p:cNvSpPr/>
           <p:nvPr/>
         </p:nvSpPr>
@@ -1982,7 +2028,7 @@
       </p:sp>
       <p:sp>
         <p:nvSpPr>
-          <p:cNvPr id="11" name="Shape 9"/>
+          <p:cNvPr id="13" name="Shape 10"/>
           <p:cNvSpPr/>
           <p:nvPr/>
         </p:nvSpPr>
@@ -1997,14 +2043,14 @@
             </a:avLst>
           </a:prstGeom>
           <a:solidFill>
-            <a:srgbClr val="14563C"/>
+            <a:srgbClr val="0E7A3D"/>
           </a:solidFill>
           <a:ln/>
         </p:spPr>
       </p:sp>
       <p:sp>
         <p:nvSpPr>
-          <p:cNvPr id="12" name="Text 10"/>
+          <p:cNvPr id="14" name="Text 11"/>
           <p:cNvSpPr/>
           <p:nvPr/>
         </p:nvSpPr>
@@ -2043,7 +2089,7 @@
       </p:sp>
       <p:sp>
         <p:nvSpPr>
-          <p:cNvPr id="13" name="Shape 11"/>
+          <p:cNvPr id="15" name="Shape 12"/>
           <p:cNvSpPr/>
           <p:nvPr/>
         </p:nvSpPr>
@@ -2058,14 +2104,14 @@
             </a:avLst>
           </a:prstGeom>
           <a:solidFill>
-            <a:srgbClr val="14563C"/>
+            <a:srgbClr val="0E7A3D"/>
           </a:solidFill>
           <a:ln/>
         </p:spPr>
       </p:sp>
       <p:sp>
         <p:nvSpPr>
-          <p:cNvPr id="14" name="Text 12"/>
+          <p:cNvPr id="16" name="Text 13"/>
           <p:cNvSpPr/>
           <p:nvPr/>
         </p:nvSpPr>
@@ -2104,7 +2150,7 @@
       </p:sp>
       <p:sp>
         <p:nvSpPr>
-          <p:cNvPr id="15" name="Text 13"/>
+          <p:cNvPr id="17" name="Text 14"/>
           <p:cNvSpPr/>
           <p:nvPr/>
         </p:nvSpPr>
@@ -2135,7 +2181,7 @@
                 <a:ea typeface="Calibri" pitchFamily="34" charset="-122"/>
                 <a:cs typeface="Calibri" pitchFamily="34" charset="-120"/>
               </a:rPr>
-              <a:t>Python, Fondamentaux et Analyse de Données  ·  contexte administration fiscale</a:t>
+              <a:t>DGI — Direction Générale des Impôts · Guinée-Bissau · données pédagogiques fictives</a:t>
             </a:r>
             <a:endParaRPr lang="en-US" sz="1200" dirty="0"/>
           </a:p>
@@ -2155,7 +2201,7 @@
     <p:bg>
       <p:bgPr>
         <a:solidFill>
-          <a:srgbClr val="0D3325"/>
+          <a:srgbClr val="0A2E1A"/>
         </a:solidFill>
       </p:bgPr>
     </p:bg>
@@ -2188,14 +2234,36 @@
             <a:avLst/>
           </a:prstGeom>
           <a:solidFill>
-            <a:srgbClr val="14563C"/>
+            <a:srgbClr val="0E7A3D"/>
           </a:solidFill>
           <a:ln/>
         </p:spPr>
       </p:sp>
       <p:sp>
         <p:nvSpPr>
-          <p:cNvPr id="3" name="Text 1"/>
+          <p:cNvPr id="3" name="Shape 1"/>
+          <p:cNvSpPr/>
+          <p:nvPr/>
+        </p:nvSpPr>
+        <p:spPr>
+          <a:xfrm>
+            <a:off x="11430000" y="5394960"/>
+            <a:ext cx="2011680" cy="2011680"/>
+          </a:xfrm>
+          <a:prstGeom prst="ellipse">
+            <a:avLst/>
+          </a:prstGeom>
+          <a:solidFill>
+            <a:srgbClr val="CE1126">
+              <a:alpha val="60000"/>
+            </a:srgbClr>
+          </a:solidFill>
+          <a:ln/>
+        </p:spPr>
+      </p:sp>
+      <p:sp>
+        <p:nvSpPr>
+          <p:cNvPr id="4" name="Text 2"/>
           <p:cNvSpPr/>
           <p:nvPr/>
         </p:nvSpPr>
@@ -2220,7 +2288,7 @@
             <a:r>
               <a:rPr lang="en-US" sz="1300" b="1" spc="200" kern="0" dirty="0">
                 <a:solidFill>
-                  <a:srgbClr val="C9A227"/>
+                  <a:srgbClr val="C79100"/>
                 </a:solidFill>
                 <a:latin typeface="Calibri" pitchFamily="34" charset="0"/>
                 <a:ea typeface="Calibri" pitchFamily="34" charset="-122"/>
@@ -2234,7 +2302,7 @@
       </p:sp>
       <p:sp>
         <p:nvSpPr>
-          <p:cNvPr id="4" name="Text 2"/>
+          <p:cNvPr id="5" name="Text 3"/>
           <p:cNvSpPr/>
           <p:nvPr/>
         </p:nvSpPr>
@@ -2273,7 +2341,7 @@
       </p:sp>
       <p:sp>
         <p:nvSpPr>
-          <p:cNvPr id="5" name="Shape 3"/>
+          <p:cNvPr id="6" name="Shape 4"/>
           <p:cNvSpPr/>
           <p:nvPr/>
         </p:nvSpPr>
@@ -2286,14 +2354,14 @@
             <a:avLst/>
           </a:prstGeom>
           <a:solidFill>
-            <a:srgbClr val="1E7A50"/>
+            <a:srgbClr val="2E9E4F"/>
           </a:solidFill>
           <a:ln/>
         </p:spPr>
       </p:sp>
       <p:pic>
         <p:nvPicPr>
-          <p:cNvPr id="6" name="Image 0" descr="icons/check.png">    </p:cNvPr>
+          <p:cNvPr id="7" name="Image 0" descr="icons/check.png">    </p:cNvPr>
           <p:cNvPicPr>
             <a:picLocks noChangeAspect="1"/>
           </p:cNvPicPr>
@@ -2317,7 +2385,7 @@
       </p:pic>
       <p:sp>
         <p:nvSpPr>
-          <p:cNvPr id="7" name="Text 4"/>
+          <p:cNvPr id="8" name="Text 5"/>
           <p:cNvSpPr/>
           <p:nvPr/>
         </p:nvSpPr>
@@ -2370,7 +2438,7 @@
       </p:sp>
       <p:sp>
         <p:nvSpPr>
-          <p:cNvPr id="8" name="Shape 5"/>
+          <p:cNvPr id="9" name="Shape 6"/>
           <p:cNvSpPr/>
           <p:nvPr/>
         </p:nvSpPr>
@@ -2383,14 +2451,14 @@
             <a:avLst/>
           </a:prstGeom>
           <a:solidFill>
-            <a:srgbClr val="1E7A50"/>
+            <a:srgbClr val="2E9E4F"/>
           </a:solidFill>
           <a:ln/>
         </p:spPr>
       </p:sp>
       <p:pic>
         <p:nvPicPr>
-          <p:cNvPr id="9" name="Image 1" descr="icons/check.png">    </p:cNvPr>
+          <p:cNvPr id="10" name="Image 1" descr="icons/check.png">    </p:cNvPr>
           <p:cNvPicPr>
             <a:picLocks noChangeAspect="1"/>
           </p:cNvPicPr>
@@ -2414,7 +2482,7 @@
       </p:pic>
       <p:sp>
         <p:nvSpPr>
-          <p:cNvPr id="10" name="Text 6"/>
+          <p:cNvPr id="11" name="Text 7"/>
           <p:cNvSpPr/>
           <p:nvPr/>
         </p:nvSpPr>
@@ -2467,7 +2535,7 @@
       </p:sp>
       <p:sp>
         <p:nvSpPr>
-          <p:cNvPr id="11" name="Shape 7"/>
+          <p:cNvPr id="12" name="Shape 8"/>
           <p:cNvSpPr/>
           <p:nvPr/>
         </p:nvSpPr>
@@ -2480,14 +2548,14 @@
             <a:avLst/>
           </a:prstGeom>
           <a:solidFill>
-            <a:srgbClr val="1E7A50"/>
+            <a:srgbClr val="2E9E4F"/>
           </a:solidFill>
           <a:ln/>
         </p:spPr>
       </p:sp>
       <p:pic>
         <p:nvPicPr>
-          <p:cNvPr id="12" name="Image 2" descr="icons/check.png">    </p:cNvPr>
+          <p:cNvPr id="13" name="Image 2" descr="icons/check.png">    </p:cNvPr>
           <p:cNvPicPr>
             <a:picLocks noChangeAspect="1"/>
           </p:cNvPicPr>
@@ -2511,7 +2579,7 @@
       </p:pic>
       <p:sp>
         <p:nvSpPr>
-          <p:cNvPr id="13" name="Text 8"/>
+          <p:cNvPr id="14" name="Text 9"/>
           <p:cNvSpPr/>
           <p:nvPr/>
         </p:nvSpPr>
@@ -2564,7 +2632,7 @@
       </p:sp>
       <p:sp>
         <p:nvSpPr>
-          <p:cNvPr id="14" name="Shape 9"/>
+          <p:cNvPr id="15" name="Shape 10"/>
           <p:cNvSpPr/>
           <p:nvPr/>
         </p:nvSpPr>
@@ -2577,14 +2645,14 @@
             <a:avLst/>
           </a:prstGeom>
           <a:solidFill>
-            <a:srgbClr val="1E7A50"/>
+            <a:srgbClr val="2E9E4F"/>
           </a:solidFill>
           <a:ln/>
         </p:spPr>
       </p:sp>
       <p:pic>
         <p:nvPicPr>
-          <p:cNvPr id="15" name="Image 3" descr="icons/check.png">    </p:cNvPr>
+          <p:cNvPr id="16" name="Image 3" descr="icons/check.png">    </p:cNvPr>
           <p:cNvPicPr>
             <a:picLocks noChangeAspect="1"/>
           </p:cNvPicPr>
@@ -2608,7 +2676,7 @@
       </p:pic>
       <p:sp>
         <p:nvSpPr>
-          <p:cNvPr id="16" name="Text 10"/>
+          <p:cNvPr id="17" name="Text 11"/>
           <p:cNvSpPr/>
           <p:nvPr/>
         </p:nvSpPr>
@@ -2661,7 +2729,7 @@
       </p:sp>
       <p:sp>
         <p:nvSpPr>
-          <p:cNvPr id="17" name="Shape 11"/>
+          <p:cNvPr id="18" name="Shape 12"/>
           <p:cNvSpPr/>
           <p:nvPr/>
         </p:nvSpPr>
@@ -2674,14 +2742,14 @@
             <a:avLst/>
           </a:prstGeom>
           <a:solidFill>
-            <a:srgbClr val="1E7A50"/>
+            <a:srgbClr val="2E9E4F"/>
           </a:solidFill>
           <a:ln/>
         </p:spPr>
       </p:sp>
       <p:pic>
         <p:nvPicPr>
-          <p:cNvPr id="18" name="Image 4" descr="icons/check.png">    </p:cNvPr>
+          <p:cNvPr id="19" name="Image 4" descr="icons/check.png">    </p:cNvPr>
           <p:cNvPicPr>
             <a:picLocks noChangeAspect="1"/>
           </p:cNvPicPr>
@@ -2705,7 +2773,7 @@
       </p:pic>
       <p:sp>
         <p:nvSpPr>
-          <p:cNvPr id="19" name="Text 12"/>
+          <p:cNvPr id="20" name="Text 13"/>
           <p:cNvSpPr/>
           <p:nvPr/>
         </p:nvSpPr>
@@ -2758,7 +2826,7 @@
       </p:sp>
       <p:sp>
         <p:nvSpPr>
-          <p:cNvPr id="20" name="Shape 13"/>
+          <p:cNvPr id="21" name="Shape 14"/>
           <p:cNvSpPr/>
           <p:nvPr/>
         </p:nvSpPr>
@@ -2773,14 +2841,14 @@
             </a:avLst>
           </a:prstGeom>
           <a:solidFill>
-            <a:srgbClr val="14563C"/>
+            <a:srgbClr val="0E7A3D"/>
           </a:solidFill>
           <a:ln/>
         </p:spPr>
       </p:sp>
       <p:sp>
         <p:nvSpPr>
-          <p:cNvPr id="21" name="Shape 14"/>
+          <p:cNvPr id="22" name="Shape 15"/>
           <p:cNvSpPr/>
           <p:nvPr/>
         </p:nvSpPr>
@@ -2793,14 +2861,14 @@
             <a:avLst/>
           </a:prstGeom>
           <a:solidFill>
-            <a:srgbClr val="C9A227"/>
+            <a:srgbClr val="C79100"/>
           </a:solidFill>
           <a:ln/>
         </p:spPr>
       </p:sp>
       <p:pic>
         <p:nvPicPr>
-          <p:cNvPr id="22" name="Image 5" descr="icons/rocket.png">    </p:cNvPr>
+          <p:cNvPr id="23" name="Image 5" descr="icons/rocket.png">    </p:cNvPr>
           <p:cNvPicPr>
             <a:picLocks noChangeAspect="1"/>
           </p:cNvPicPr>
@@ -2824,7 +2892,7 @@
       </p:pic>
       <p:sp>
         <p:nvSpPr>
-          <p:cNvPr id="23" name="Text 15"/>
+          <p:cNvPr id="24" name="Text 16"/>
           <p:cNvSpPr/>
           <p:nvPr/>
         </p:nvSpPr>
@@ -2863,7 +2931,7 @@
       </p:sp>
       <p:sp>
         <p:nvSpPr>
-          <p:cNvPr id="24" name="Text 16"/>
+          <p:cNvPr id="25" name="Text 17"/>
           <p:cNvSpPr/>
           <p:nvPr/>
         </p:nvSpPr>
@@ -2941,7 +3009,7 @@
         <p:spPr>
           <a:xfrm>
             <a:off x="548640" y="384048"/>
-            <a:ext cx="10972800" cy="320040"/>
+            <a:ext cx="9601200" cy="320040"/>
           </a:xfrm>
           <a:prstGeom prst="rect">
             <a:avLst/>
@@ -2959,7 +3027,7 @@
             <a:r>
               <a:rPr lang="en-US" sz="1300" b="1" spc="200" kern="0" dirty="0">
                 <a:solidFill>
-                  <a:srgbClr val="C9A227"/>
+                  <a:srgbClr val="C79100"/>
                 </a:solidFill>
                 <a:latin typeface="Calibri" pitchFamily="34" charset="0"/>
                 <a:ea typeface="Calibri" pitchFamily="34" charset="-122"/>
@@ -2980,7 +3048,7 @@
         <p:spPr>
           <a:xfrm>
             <a:off x="548640" y="658368"/>
-            <a:ext cx="11064240" cy="731520"/>
+            <a:ext cx="9966960" cy="731520"/>
           </a:xfrm>
           <a:prstGeom prst="rect">
             <a:avLst/>
@@ -2998,7 +3066,7 @@
             <a:r>
               <a:rPr lang="en-US" sz="3400" b="1" dirty="0">
                 <a:solidFill>
-                  <a:srgbClr val="14563C"/>
+                  <a:srgbClr val="0E7A3D"/>
                 </a:solidFill>
                 <a:latin typeface="Cambria" pitchFamily="34" charset="0"/>
                 <a:ea typeface="Cambria" pitchFamily="34" charset="-122"/>
@@ -3010,29 +3078,9 @@
           </a:p>
         </p:txBody>
       </p:sp>
-      <p:sp>
-        <p:nvSpPr>
-          <p:cNvPr id="4" name="Shape 2"/>
-          <p:cNvSpPr/>
-          <p:nvPr/>
-        </p:nvSpPr>
-        <p:spPr>
-          <a:xfrm>
-            <a:off x="640080" y="1783080"/>
-            <a:ext cx="566928" cy="566928"/>
-          </a:xfrm>
-          <a:prstGeom prst="ellipse">
-            <a:avLst/>
-          </a:prstGeom>
-          <a:solidFill>
-            <a:srgbClr val="14563C"/>
-          </a:solidFill>
-          <a:ln/>
-        </p:spPr>
-      </p:sp>
       <p:pic>
         <p:nvPicPr>
-          <p:cNvPr id="5" name="Image 0" descr="icons/layers.png">    </p:cNvPr>
+          <p:cNvPr id="4" name="Image 0" descr="logo-dgi.png">    </p:cNvPr>
           <p:cNvPicPr>
             <a:picLocks noChangeAspect="1"/>
           </p:cNvPicPr>
@@ -3046,8 +3094,8 @@
         </p:blipFill>
         <p:spPr>
           <a:xfrm>
-            <a:off x="787481" y="1930481"/>
-            <a:ext cx="272125" cy="272125"/>
+            <a:off x="10744200" y="384048"/>
+            <a:ext cx="1051560" cy="795528"/>
           </a:xfrm>
           <a:prstGeom prst="rect">
             <a:avLst/>
@@ -3056,105 +3104,27 @@
       </p:pic>
       <p:sp>
         <p:nvSpPr>
-          <p:cNvPr id="6" name="Text 3"/>
-          <p:cNvSpPr/>
-          <p:nvPr/>
-        </p:nvSpPr>
-        <p:spPr>
-          <a:xfrm>
-            <a:off x="1417320" y="1728216"/>
-            <a:ext cx="5852160" cy="365760"/>
-          </a:xfrm>
-          <a:prstGeom prst="rect">
-            <a:avLst/>
-          </a:prstGeom>
-          <a:noFill/>
-          <a:ln/>
-        </p:spPr>
-        <p:txBody>
-          <a:bodyPr wrap="square" lIns="0" tIns="0" rIns="0" bIns="0" rtlCol="0" anchor="ctr"/>
-          <a:lstStyle/>
-          <a:p>
-            <a:pPr indent="0" marL="0">
-              <a:buNone/>
-            </a:pPr>
-            <a:r>
-              <a:rPr lang="en-US" sz="1650" b="1" dirty="0">
-                <a:solidFill>
-                  <a:srgbClr val="1C2A24"/>
-                </a:solidFill>
-                <a:latin typeface="Calibri" pitchFamily="34" charset="0"/>
-                <a:ea typeface="Calibri" pitchFamily="34" charset="-122"/>
-                <a:cs typeface="Calibri" pitchFamily="34" charset="-120"/>
-              </a:rPr>
-              <a:t>Modéliser avec des classes</a:t>
-            </a:r>
-            <a:endParaRPr lang="en-US" sz="1650" dirty="0"/>
-          </a:p>
-        </p:txBody>
-      </p:sp>
-      <p:sp>
-        <p:nvSpPr>
-          <p:cNvPr id="7" name="Text 4"/>
-          <p:cNvSpPr/>
-          <p:nvPr/>
-        </p:nvSpPr>
-        <p:spPr>
-          <a:xfrm>
-            <a:off x="1417320" y="2057400"/>
-            <a:ext cx="5852160" cy="502920"/>
-          </a:xfrm>
-          <a:prstGeom prst="rect">
-            <a:avLst/>
-          </a:prstGeom>
-          <a:noFill/>
-          <a:ln/>
-        </p:spPr>
-        <p:txBody>
-          <a:bodyPr wrap="square" lIns="0" tIns="0" rIns="0" bIns="0" rtlCol="0" anchor="ctr"/>
-          <a:lstStyle/>
-          <a:p>
-            <a:pPr indent="0" marL="0">
-              <a:buNone/>
-            </a:pPr>
-            <a:r>
-              <a:rPr lang="en-US" sz="1300" dirty="0">
-                <a:solidFill>
-                  <a:srgbClr val="5C6B63"/>
-                </a:solidFill>
-                <a:latin typeface="Calibri" pitchFamily="34" charset="0"/>
-                <a:ea typeface="Calibri" pitchFamily="34" charset="-122"/>
-                <a:cs typeface="Calibri" pitchFamily="34" charset="-120"/>
-              </a:rPr>
-              <a:t>Contribuable, Declaration : données + comportements ensemble.</a:t>
-            </a:r>
-            <a:endParaRPr lang="en-US" sz="1300" dirty="0"/>
-          </a:p>
-        </p:txBody>
-      </p:sp>
-      <p:sp>
-        <p:nvSpPr>
-          <p:cNvPr id="8" name="Shape 5"/>
-          <p:cNvSpPr/>
-          <p:nvPr/>
-        </p:nvSpPr>
-        <p:spPr>
-          <a:xfrm>
-            <a:off x="640080" y="2807208"/>
+          <p:cNvPr id="5" name="Shape 2"/>
+          <p:cNvSpPr/>
+          <p:nvPr/>
+        </p:nvSpPr>
+        <p:spPr>
+          <a:xfrm>
+            <a:off x="640080" y="1783080"/>
             <a:ext cx="566928" cy="566928"/>
           </a:xfrm>
           <a:prstGeom prst="ellipse">
             <a:avLst/>
           </a:prstGeom>
           <a:solidFill>
-            <a:srgbClr val="1E7A50"/>
+            <a:srgbClr val="0E7A3D"/>
           </a:solidFill>
           <a:ln/>
         </p:spPr>
       </p:sp>
       <p:pic>
         <p:nvPicPr>
-          <p:cNvPr id="9" name="Image 1" descr="icons/broom.png">    </p:cNvPr>
+          <p:cNvPr id="6" name="Image 1" descr="icons/layers.png">    </p:cNvPr>
           <p:cNvPicPr>
             <a:picLocks noChangeAspect="1"/>
           </p:cNvPicPr>
@@ -3168,7 +3138,7 @@
         </p:blipFill>
         <p:spPr>
           <a:xfrm>
-            <a:off x="787481" y="2954609"/>
+            <a:off x="787481" y="1930481"/>
             <a:ext cx="272125" cy="272125"/>
           </a:xfrm>
           <a:prstGeom prst="rect">
@@ -3178,13 +3148,13 @@
       </p:pic>
       <p:sp>
         <p:nvSpPr>
-          <p:cNvPr id="10" name="Text 6"/>
-          <p:cNvSpPr/>
-          <p:nvPr/>
-        </p:nvSpPr>
-        <p:spPr>
-          <a:xfrm>
-            <a:off x="1417320" y="2752344"/>
+          <p:cNvPr id="7" name="Text 3"/>
+          <p:cNvSpPr/>
+          <p:nvPr/>
+        </p:nvSpPr>
+        <p:spPr>
+          <a:xfrm>
+            <a:off x="1417320" y="1728216"/>
             <a:ext cx="5852160" cy="365760"/>
           </a:xfrm>
           <a:prstGeom prst="rect">
@@ -3209,7 +3179,7 @@
                 <a:ea typeface="Calibri" pitchFamily="34" charset="-122"/>
                 <a:cs typeface="Calibri" pitchFamily="34" charset="-120"/>
               </a:rPr>
-              <a:t>Nettoyer avec pandas</a:t>
+              <a:t>Modéliser avec des classes</a:t>
             </a:r>
             <a:endParaRPr lang="en-US" sz="1650" dirty="0"/>
           </a:p>
@@ -3217,13 +3187,13 @@
       </p:sp>
       <p:sp>
         <p:nvSpPr>
-          <p:cNvPr id="11" name="Text 7"/>
-          <p:cNvSpPr/>
-          <p:nvPr/>
-        </p:nvSpPr>
-        <p:spPr>
-          <a:xfrm>
-            <a:off x="1417320" y="3081528"/>
+          <p:cNvPr id="8" name="Text 4"/>
+          <p:cNvSpPr/>
+          <p:nvPr/>
+        </p:nvSpPr>
+        <p:spPr>
+          <a:xfrm>
+            <a:off x="1417320" y="2057400"/>
             <a:ext cx="5852160" cy="502920"/>
           </a:xfrm>
           <a:prstGeom prst="rect">
@@ -3248,7 +3218,7 @@
                 <a:ea typeface="Calibri" pitchFamily="34" charset="-122"/>
                 <a:cs typeface="Calibri" pitchFamily="34" charset="-120"/>
               </a:rPr>
-              <a:t>Doublons, valeurs manquantes, libellés incohérents — en 3 lignes.</a:t>
+              <a:t>Contribuable, Declaration : données + comportements ensemble.</a:t>
             </a:r>
             <a:endParaRPr lang="en-US" sz="1300" dirty="0"/>
           </a:p>
@@ -3256,27 +3226,27 @@
       </p:sp>
       <p:sp>
         <p:nvSpPr>
-          <p:cNvPr id="12" name="Shape 8"/>
-          <p:cNvSpPr/>
-          <p:nvPr/>
-        </p:nvSpPr>
-        <p:spPr>
-          <a:xfrm>
-            <a:off x="640080" y="3831336"/>
+          <p:cNvPr id="9" name="Shape 5"/>
+          <p:cNvSpPr/>
+          <p:nvPr/>
+        </p:nvSpPr>
+        <p:spPr>
+          <a:xfrm>
+            <a:off x="640080" y="2807208"/>
             <a:ext cx="566928" cy="566928"/>
           </a:xfrm>
           <a:prstGeom prst="ellipse">
             <a:avLst/>
           </a:prstGeom>
           <a:solidFill>
-            <a:srgbClr val="C9A227"/>
+            <a:srgbClr val="2E9E4F"/>
           </a:solidFill>
           <a:ln/>
         </p:spPr>
       </p:sp>
       <p:pic>
         <p:nvPicPr>
-          <p:cNvPr id="13" name="Image 2" descr="icons/link.png">    </p:cNvPr>
+          <p:cNvPr id="10" name="Image 2" descr="icons/broom.png">    </p:cNvPr>
           <p:cNvPicPr>
             <a:picLocks noChangeAspect="1"/>
           </p:cNvPicPr>
@@ -3290,7 +3260,7 @@
         </p:blipFill>
         <p:spPr>
           <a:xfrm>
-            <a:off x="787481" y="3978737"/>
+            <a:off x="787481" y="2954609"/>
             <a:ext cx="272125" cy="272125"/>
           </a:xfrm>
           <a:prstGeom prst="rect">
@@ -3300,13 +3270,13 @@
       </p:pic>
       <p:sp>
         <p:nvSpPr>
-          <p:cNvPr id="14" name="Text 9"/>
-          <p:cNvSpPr/>
-          <p:nvPr/>
-        </p:nvSpPr>
-        <p:spPr>
-          <a:xfrm>
-            <a:off x="1417320" y="3776472"/>
+          <p:cNvPr id="11" name="Text 6"/>
+          <p:cNvSpPr/>
+          <p:nvPr/>
+        </p:nvSpPr>
+        <p:spPr>
+          <a:xfrm>
+            <a:off x="1417320" y="2752344"/>
             <a:ext cx="5852160" cy="365760"/>
           </a:xfrm>
           <a:prstGeom prst="rect">
@@ -3331,7 +3301,7 @@
                 <a:ea typeface="Calibri" pitchFamily="34" charset="-122"/>
                 <a:cs typeface="Calibri" pitchFamily="34" charset="-120"/>
               </a:rPr>
-              <a:t>Joindre les fichiers</a:t>
+              <a:t>Nettoyer avec pandas</a:t>
             </a:r>
             <a:endParaRPr lang="en-US" sz="1650" dirty="0"/>
           </a:p>
@@ -3339,13 +3309,13 @@
       </p:sp>
       <p:sp>
         <p:nvSpPr>
-          <p:cNvPr id="15" name="Text 10"/>
-          <p:cNvSpPr/>
-          <p:nvPr/>
-        </p:nvSpPr>
-        <p:spPr>
-          <a:xfrm>
-            <a:off x="1417320" y="4105656"/>
+          <p:cNvPr id="12" name="Text 7"/>
+          <p:cNvSpPr/>
+          <p:nvPr/>
+        </p:nvSpPr>
+        <p:spPr>
+          <a:xfrm>
+            <a:off x="1417320" y="3081528"/>
             <a:ext cx="5852160" cy="502920"/>
           </a:xfrm>
           <a:prstGeom prst="rect">
@@ -3370,7 +3340,7 @@
                 <a:ea typeface="Calibri" pitchFamily="34" charset="-122"/>
                 <a:cs typeface="Calibri" pitchFamily="34" charset="-120"/>
               </a:rPr>
-              <a:t>déclarations × contribuables × régions : le merge.</a:t>
+              <a:t>Doublons, valeurs manquantes, libellés incohérents — en 3 lignes.</a:t>
             </a:r>
             <a:endParaRPr lang="en-US" sz="1300" dirty="0"/>
           </a:p>
@@ -3378,27 +3348,27 @@
       </p:sp>
       <p:sp>
         <p:nvSpPr>
-          <p:cNvPr id="16" name="Shape 11"/>
-          <p:cNvSpPr/>
-          <p:nvPr/>
-        </p:nvSpPr>
-        <p:spPr>
-          <a:xfrm>
-            <a:off x="640080" y="4855464"/>
+          <p:cNvPr id="13" name="Shape 8"/>
+          <p:cNvSpPr/>
+          <p:nvPr/>
+        </p:nvSpPr>
+        <p:spPr>
+          <a:xfrm>
+            <a:off x="640080" y="3831336"/>
             <a:ext cx="566928" cy="566928"/>
           </a:xfrm>
           <a:prstGeom prst="ellipse">
             <a:avLst/>
           </a:prstGeom>
           <a:solidFill>
-            <a:srgbClr val="14563C"/>
+            <a:srgbClr val="C79100"/>
           </a:solidFill>
           <a:ln/>
         </p:spPr>
       </p:sp>
       <p:pic>
         <p:nvPicPr>
-          <p:cNvPr id="17" name="Image 3" descr="icons/flag.png">    </p:cNvPr>
+          <p:cNvPr id="14" name="Image 3" descr="icons/link.png">    </p:cNvPr>
           <p:cNvPicPr>
             <a:picLocks noChangeAspect="1"/>
           </p:cNvPicPr>
@@ -3412,7 +3382,7 @@
         </p:blipFill>
         <p:spPr>
           <a:xfrm>
-            <a:off x="787481" y="5002865"/>
+            <a:off x="787481" y="3978737"/>
             <a:ext cx="272125" cy="272125"/>
           </a:xfrm>
           <a:prstGeom prst="rect">
@@ -3422,13 +3392,13 @@
       </p:pic>
       <p:sp>
         <p:nvSpPr>
-          <p:cNvPr id="18" name="Text 12"/>
-          <p:cNvSpPr/>
-          <p:nvPr/>
-        </p:nvSpPr>
-        <p:spPr>
-          <a:xfrm>
-            <a:off x="1417320" y="4800600"/>
+          <p:cNvPr id="15" name="Text 9"/>
+          <p:cNvSpPr/>
+          <p:nvPr/>
+        </p:nvSpPr>
+        <p:spPr>
+          <a:xfrm>
+            <a:off x="1417320" y="3776472"/>
             <a:ext cx="5852160" cy="365760"/>
           </a:xfrm>
           <a:prstGeom prst="rect">
@@ -3453,7 +3423,7 @@
                 <a:ea typeface="Calibri" pitchFamily="34" charset="-122"/>
                 <a:cs typeface="Calibri" pitchFamily="34" charset="-120"/>
               </a:rPr>
-              <a:t>Lancer le projet</a:t>
+              <a:t>Joindre les fichiers</a:t>
             </a:r>
             <a:endParaRPr lang="en-US" sz="1650" dirty="0"/>
           </a:p>
@@ -3461,13 +3431,13 @@
       </p:sp>
       <p:sp>
         <p:nvSpPr>
-          <p:cNvPr id="19" name="Text 13"/>
-          <p:cNvSpPr/>
-          <p:nvPr/>
-        </p:nvSpPr>
-        <p:spPr>
-          <a:xfrm>
-            <a:off x="1417320" y="5129784"/>
+          <p:cNvPr id="16" name="Text 10"/>
+          <p:cNvSpPr/>
+          <p:nvPr/>
+        </p:nvSpPr>
+        <p:spPr>
+          <a:xfrm>
+            <a:off x="1417320" y="4105656"/>
             <a:ext cx="5852160" cy="502920"/>
           </a:xfrm>
           <a:prstGeom prst="rect">
@@ -3492,6 +3462,128 @@
                 <a:ea typeface="Calibri" pitchFamily="34" charset="-122"/>
                 <a:cs typeface="Calibri" pitchFamily="34" charset="-120"/>
               </a:rPr>
+              <a:t>déclarations × contribuables × régions : le merge.</a:t>
+            </a:r>
+            <a:endParaRPr lang="en-US" sz="1300" dirty="0"/>
+          </a:p>
+        </p:txBody>
+      </p:sp>
+      <p:sp>
+        <p:nvSpPr>
+          <p:cNvPr id="17" name="Shape 11"/>
+          <p:cNvSpPr/>
+          <p:nvPr/>
+        </p:nvSpPr>
+        <p:spPr>
+          <a:xfrm>
+            <a:off x="640080" y="4855464"/>
+            <a:ext cx="566928" cy="566928"/>
+          </a:xfrm>
+          <a:prstGeom prst="ellipse">
+            <a:avLst/>
+          </a:prstGeom>
+          <a:solidFill>
+            <a:srgbClr val="0E7A3D"/>
+          </a:solidFill>
+          <a:ln/>
+        </p:spPr>
+      </p:sp>
+      <p:pic>
+        <p:nvPicPr>
+          <p:cNvPr id="18" name="Image 4" descr="icons/flag.png">    </p:cNvPr>
+          <p:cNvPicPr>
+            <a:picLocks noChangeAspect="1"/>
+          </p:cNvPicPr>
+          <p:nvPr/>
+        </p:nvPicPr>
+        <p:blipFill>
+          <a:blip r:embed="rId5"/>
+          <a:stretch>
+            <a:fillRect/>
+          </a:stretch>
+        </p:blipFill>
+        <p:spPr>
+          <a:xfrm>
+            <a:off x="787481" y="5002865"/>
+            <a:ext cx="272125" cy="272125"/>
+          </a:xfrm>
+          <a:prstGeom prst="rect">
+            <a:avLst/>
+          </a:prstGeom>
+        </p:spPr>
+      </p:pic>
+      <p:sp>
+        <p:nvSpPr>
+          <p:cNvPr id="19" name="Text 12"/>
+          <p:cNvSpPr/>
+          <p:nvPr/>
+        </p:nvSpPr>
+        <p:spPr>
+          <a:xfrm>
+            <a:off x="1417320" y="4800600"/>
+            <a:ext cx="5852160" cy="365760"/>
+          </a:xfrm>
+          <a:prstGeom prst="rect">
+            <a:avLst/>
+          </a:prstGeom>
+          <a:noFill/>
+          <a:ln/>
+        </p:spPr>
+        <p:txBody>
+          <a:bodyPr wrap="square" lIns="0" tIns="0" rIns="0" bIns="0" rtlCol="0" anchor="ctr"/>
+          <a:lstStyle/>
+          <a:p>
+            <a:pPr indent="0" marL="0">
+              <a:buNone/>
+            </a:pPr>
+            <a:r>
+              <a:rPr lang="en-US" sz="1650" b="1" dirty="0">
+                <a:solidFill>
+                  <a:srgbClr val="1C2A24"/>
+                </a:solidFill>
+                <a:latin typeface="Calibri" pitchFamily="34" charset="0"/>
+                <a:ea typeface="Calibri" pitchFamily="34" charset="-122"/>
+                <a:cs typeface="Calibri" pitchFamily="34" charset="-120"/>
+              </a:rPr>
+              <a:t>Lancer le projet</a:t>
+            </a:r>
+            <a:endParaRPr lang="en-US" sz="1650" dirty="0"/>
+          </a:p>
+        </p:txBody>
+      </p:sp>
+      <p:sp>
+        <p:nvSpPr>
+          <p:cNvPr id="20" name="Text 13"/>
+          <p:cNvSpPr/>
+          <p:nvPr/>
+        </p:nvSpPr>
+        <p:spPr>
+          <a:xfrm>
+            <a:off x="1417320" y="5129784"/>
+            <a:ext cx="5852160" cy="502920"/>
+          </a:xfrm>
+          <a:prstGeom prst="rect">
+            <a:avLst/>
+          </a:prstGeom>
+          <a:noFill/>
+          <a:ln/>
+        </p:spPr>
+        <p:txBody>
+          <a:bodyPr wrap="square" lIns="0" tIns="0" rIns="0" bIns="0" rtlCol="0" anchor="ctr"/>
+          <a:lstStyle/>
+          <a:p>
+            <a:pPr indent="0" marL="0">
+              <a:buNone/>
+            </a:pPr>
+            <a:r>
+              <a:rPr lang="en-US" sz="1300" dirty="0">
+                <a:solidFill>
+                  <a:srgbClr val="5C6B63"/>
+                </a:solidFill>
+                <a:latin typeface="Calibri" pitchFamily="34" charset="0"/>
+                <a:ea typeface="Calibri" pitchFamily="34" charset="-122"/>
+                <a:cs typeface="Calibri" pitchFamily="34" charset="-120"/>
+              </a:rPr>
               <a:t>Tirage des sujets en fin de matinée — 5 sujets, 2-3 par groupe.</a:t>
             </a:r>
             <a:endParaRPr lang="en-US" sz="1300" dirty="0"/>
@@ -3500,7 +3592,7 @@
       </p:sp>
       <p:sp>
         <p:nvSpPr>
-          <p:cNvPr id="20" name="Shape 14"/>
+          <p:cNvPr id="21" name="Shape 14"/>
           <p:cNvSpPr/>
           <p:nvPr/>
         </p:nvSpPr>
@@ -3515,14 +3607,14 @@
             </a:avLst>
           </a:prstGeom>
           <a:solidFill>
-            <a:srgbClr val="0D3325"/>
+            <a:srgbClr val="0A2E1A"/>
           </a:solidFill>
           <a:ln/>
         </p:spPr>
       </p:sp>
       <p:sp>
         <p:nvSpPr>
-          <p:cNvPr id="21" name="Text 15"/>
+          <p:cNvPr id="22" name="Text 15"/>
           <p:cNvSpPr/>
           <p:nvPr/>
         </p:nvSpPr>
@@ -3547,7 +3639,7 @@
             <a:r>
               <a:rPr lang="en-US" sz="1150" b="1" spc="200" kern="0" dirty="0">
                 <a:solidFill>
-                  <a:srgbClr val="C9A227"/>
+                  <a:srgbClr val="C79100"/>
                 </a:solidFill>
                 <a:latin typeface="Calibri" pitchFamily="34" charset="0"/>
                 <a:ea typeface="Calibri" pitchFamily="34" charset="-122"/>
@@ -3561,7 +3653,7 @@
       </p:sp>
       <p:sp>
         <p:nvSpPr>
-          <p:cNvPr id="22" name="Shape 16"/>
+          <p:cNvPr id="23" name="Shape 16"/>
           <p:cNvSpPr/>
           <p:nvPr/>
         </p:nvSpPr>
@@ -3574,14 +3666,14 @@
             <a:avLst/>
           </a:prstGeom>
           <a:solidFill>
-            <a:srgbClr val="14563C"/>
+            <a:srgbClr val="0E7A3D"/>
           </a:solidFill>
           <a:ln/>
         </p:spPr>
       </p:sp>
       <p:sp>
         <p:nvSpPr>
-          <p:cNvPr id="23" name="Text 17"/>
+          <p:cNvPr id="24" name="Text 17"/>
           <p:cNvSpPr/>
           <p:nvPr/>
         </p:nvSpPr>
@@ -3620,7 +3712,7 @@
       </p:sp>
       <p:sp>
         <p:nvSpPr>
-          <p:cNvPr id="24" name="Text 18"/>
+          <p:cNvPr id="25" name="Text 18"/>
           <p:cNvSpPr/>
           <p:nvPr/>
         </p:nvSpPr>
@@ -3659,7 +3751,7 @@
       </p:sp>
       <p:sp>
         <p:nvSpPr>
-          <p:cNvPr id="25" name="Shape 19"/>
+          <p:cNvPr id="26" name="Shape 19"/>
           <p:cNvSpPr/>
           <p:nvPr/>
         </p:nvSpPr>
@@ -3672,14 +3764,14 @@
             <a:avLst/>
           </a:prstGeom>
           <a:solidFill>
-            <a:srgbClr val="14563C"/>
+            <a:srgbClr val="0E7A3D"/>
           </a:solidFill>
           <a:ln/>
         </p:spPr>
       </p:sp>
       <p:sp>
         <p:nvSpPr>
-          <p:cNvPr id="26" name="Text 20"/>
+          <p:cNvPr id="27" name="Text 20"/>
           <p:cNvSpPr/>
           <p:nvPr/>
         </p:nvSpPr>
@@ -3718,7 +3810,7 @@
       </p:sp>
       <p:sp>
         <p:nvSpPr>
-          <p:cNvPr id="27" name="Text 21"/>
+          <p:cNvPr id="28" name="Text 21"/>
           <p:cNvSpPr/>
           <p:nvPr/>
         </p:nvSpPr>
@@ -3757,7 +3849,7 @@
       </p:sp>
       <p:sp>
         <p:nvSpPr>
-          <p:cNvPr id="28" name="Shape 22"/>
+          <p:cNvPr id="29" name="Shape 22"/>
           <p:cNvSpPr/>
           <p:nvPr/>
         </p:nvSpPr>
@@ -3770,14 +3862,14 @@
             <a:avLst/>
           </a:prstGeom>
           <a:solidFill>
-            <a:srgbClr val="14563C"/>
+            <a:srgbClr val="0E7A3D"/>
           </a:solidFill>
           <a:ln/>
         </p:spPr>
       </p:sp>
       <p:sp>
         <p:nvSpPr>
-          <p:cNvPr id="29" name="Text 23"/>
+          <p:cNvPr id="30" name="Text 23"/>
           <p:cNvSpPr/>
           <p:nvPr/>
         </p:nvSpPr>
@@ -3816,7 +3908,7 @@
       </p:sp>
       <p:sp>
         <p:nvSpPr>
-          <p:cNvPr id="30" name="Text 24"/>
+          <p:cNvPr id="31" name="Text 24"/>
           <p:cNvSpPr/>
           <p:nvPr/>
         </p:nvSpPr>
@@ -3855,7 +3947,7 @@
       </p:sp>
       <p:sp>
         <p:nvSpPr>
-          <p:cNvPr id="31" name="Shape 25"/>
+          <p:cNvPr id="32" name="Shape 25"/>
           <p:cNvSpPr/>
           <p:nvPr/>
         </p:nvSpPr>
@@ -3868,14 +3960,14 @@
             <a:avLst/>
           </a:prstGeom>
           <a:solidFill>
-            <a:srgbClr val="C9A227"/>
+            <a:srgbClr val="C79100"/>
           </a:solidFill>
           <a:ln/>
         </p:spPr>
       </p:sp>
       <p:sp>
         <p:nvSpPr>
-          <p:cNvPr id="32" name="Text 26"/>
+          <p:cNvPr id="33" name="Text 26"/>
           <p:cNvSpPr/>
           <p:nvPr/>
         </p:nvSpPr>
@@ -3900,7 +3992,7 @@
             <a:r>
               <a:rPr lang="en-US" sz="1250" b="1" dirty="0">
                 <a:solidFill>
-                  <a:srgbClr val="0D3325"/>
+                  <a:srgbClr val="0A2E1A"/>
                 </a:solidFill>
                 <a:latin typeface="Calibri" pitchFamily="34" charset="0"/>
                 <a:ea typeface="Calibri" pitchFamily="34" charset="-122"/>
@@ -3914,7 +4006,7 @@
       </p:sp>
       <p:sp>
         <p:nvSpPr>
-          <p:cNvPr id="33" name="Text 27"/>
+          <p:cNvPr id="34" name="Text 27"/>
           <p:cNvSpPr/>
           <p:nvPr/>
         </p:nvSpPr>
@@ -3953,7 +4045,7 @@
       </p:sp>
       <p:sp>
         <p:nvSpPr>
-          <p:cNvPr id="34" name="Shape 28"/>
+          <p:cNvPr id="35" name="Shape 28"/>
           <p:cNvSpPr/>
           <p:nvPr/>
         </p:nvSpPr>
@@ -3966,14 +4058,14 @@
             <a:avLst/>
           </a:prstGeom>
           <a:solidFill>
-            <a:srgbClr val="14563C"/>
+            <a:srgbClr val="0E7A3D"/>
           </a:solidFill>
           <a:ln/>
         </p:spPr>
       </p:sp>
       <p:sp>
         <p:nvSpPr>
-          <p:cNvPr id="35" name="Text 29"/>
+          <p:cNvPr id="36" name="Text 29"/>
           <p:cNvSpPr/>
           <p:nvPr/>
         </p:nvSpPr>
@@ -4012,7 +4104,7 @@
       </p:sp>
       <p:sp>
         <p:nvSpPr>
-          <p:cNvPr id="36" name="Text 30"/>
+          <p:cNvPr id="37" name="Text 30"/>
           <p:cNvSpPr/>
           <p:nvPr/>
         </p:nvSpPr>
@@ -4051,7 +4143,7 @@
       </p:sp>
       <p:sp>
         <p:nvSpPr>
-          <p:cNvPr id="37" name="Text 31"/>
+          <p:cNvPr id="38" name="Text 31"/>
           <p:cNvSpPr/>
           <p:nvPr/>
         </p:nvSpPr>
@@ -4076,7 +4168,7 @@
             <a:r>
               <a:rPr lang="en-US" sz="1050" i="1" dirty="0">
                 <a:solidFill>
-                  <a:srgbClr val="E8D48A"/>
+                  <a:srgbClr val="FCD116"/>
                 </a:solidFill>
                 <a:latin typeface="Calibri" pitchFamily="34" charset="0"/>
                 <a:ea typeface="Calibri" pitchFamily="34" charset="-122"/>
@@ -4129,7 +4221,7 @@
         <p:spPr>
           <a:xfrm>
             <a:off x="548640" y="384048"/>
-            <a:ext cx="10972800" cy="320040"/>
+            <a:ext cx="9601200" cy="320040"/>
           </a:xfrm>
           <a:prstGeom prst="rect">
             <a:avLst/>
@@ -4147,7 +4239,7 @@
             <a:r>
               <a:rPr lang="en-US" sz="1300" b="1" spc="200" kern="0" dirty="0">
                 <a:solidFill>
-                  <a:srgbClr val="C9A227"/>
+                  <a:srgbClr val="C79100"/>
                 </a:solidFill>
                 <a:latin typeface="Calibri" pitchFamily="34" charset="0"/>
                 <a:ea typeface="Calibri" pitchFamily="34" charset="-122"/>
@@ -4168,7 +4260,7 @@
         <p:spPr>
           <a:xfrm>
             <a:off x="548640" y="658368"/>
-            <a:ext cx="11064240" cy="731520"/>
+            <a:ext cx="9966960" cy="731520"/>
           </a:xfrm>
           <a:prstGeom prst="rect">
             <a:avLst/>
@@ -4186,7 +4278,7 @@
             <a:r>
               <a:rPr lang="en-US" sz="3400" b="1" dirty="0">
                 <a:solidFill>
-                  <a:srgbClr val="14563C"/>
+                  <a:srgbClr val="0E7A3D"/>
                 </a:solidFill>
                 <a:latin typeface="Cambria" pitchFamily="34" charset="0"/>
                 <a:ea typeface="Cambria" pitchFamily="34" charset="-122"/>
@@ -4198,29 +4290,9 @@
           </a:p>
         </p:txBody>
       </p:sp>
-      <p:sp>
-        <p:nvSpPr>
-          <p:cNvPr id="4" name="Shape 2"/>
-          <p:cNvSpPr/>
-          <p:nvPr/>
-        </p:nvSpPr>
-        <p:spPr>
-          <a:xfrm>
-            <a:off x="640080" y="1874520"/>
-            <a:ext cx="411480" cy="411480"/>
-          </a:xfrm>
-          <a:prstGeom prst="ellipse">
-            <a:avLst/>
-          </a:prstGeom>
-          <a:solidFill>
-            <a:srgbClr val="1E7A50"/>
-          </a:solidFill>
-          <a:ln/>
-        </p:spPr>
-      </p:sp>
       <p:pic>
         <p:nvPicPr>
-          <p:cNvPr id="5" name="Image 0" descr="icons/check.png">    </p:cNvPr>
+          <p:cNvPr id="4" name="Image 0" descr="logo-dgi.png">    </p:cNvPr>
           <p:cNvPicPr>
             <a:picLocks noChangeAspect="1"/>
           </p:cNvPicPr>
@@ -4234,8 +4306,8 @@
         </p:blipFill>
         <p:spPr>
           <a:xfrm>
-            <a:off x="747065" y="1981505"/>
-            <a:ext cx="197510" cy="197510"/>
+            <a:off x="10744200" y="384048"/>
+            <a:ext cx="1051560" cy="795528"/>
           </a:xfrm>
           <a:prstGeom prst="rect">
             <a:avLst/>
@@ -4244,89 +4316,27 @@
       </p:pic>
       <p:sp>
         <p:nvSpPr>
-          <p:cNvPr id="6" name="Text 3"/>
-          <p:cNvSpPr/>
-          <p:nvPr/>
-        </p:nvSpPr>
-        <p:spPr>
-          <a:xfrm>
-            <a:off x="1234440" y="1801368"/>
-            <a:ext cx="4800600" cy="960120"/>
-          </a:xfrm>
-          <a:prstGeom prst="rect">
-            <a:avLst/>
-          </a:prstGeom>
-          <a:noFill/>
-          <a:ln/>
-        </p:spPr>
-        <p:txBody>
-          <a:bodyPr wrap="square" lIns="0" tIns="0" rIns="0" bIns="0" rtlCol="0" anchor="ctr"/>
-          <a:lstStyle/>
-          <a:p>
-            <a:pPr indent="0" marL="0">
-              <a:lnSpc>
-                <a:spcPct val="105000"/>
-              </a:lnSpc>
-              <a:buNone/>
-            </a:pPr>
-            <a:r>
-              <a:rPr lang="en-US" sz="1450" b="1" dirty="0">
-                <a:solidFill>
-                  <a:srgbClr val="1C2A24"/>
-                </a:solidFill>
-                <a:latin typeface="Calibri" pitchFamily="34" charset="0"/>
-                <a:ea typeface="Calibri" pitchFamily="34" charset="-122"/>
-                <a:cs typeface="Calibri" pitchFamily="34" charset="-120"/>
-              </a:rPr>
-              <a:t>__init__ écrit pour vous</a:t>
-            </a:r>
-            <a:endParaRPr lang="en-US" sz="1450" dirty="0"/>
-          </a:p>
-          <a:p>
-            <a:pPr indent="0" marL="0">
-              <a:lnSpc>
-                <a:spcPct val="105000"/>
-              </a:lnSpc>
-              <a:buNone/>
-            </a:pPr>
-            <a:r>
-              <a:rPr lang="en-US" sz="1250" dirty="0">
-                <a:solidFill>
-                  <a:srgbClr val="5C6B63"/>
-                </a:solidFill>
-                <a:latin typeface="Calibri" pitchFamily="34" charset="0"/>
-                <a:ea typeface="Calibri" pitchFamily="34" charset="-122"/>
-                <a:cs typeface="Calibri" pitchFamily="34" charset="-120"/>
-              </a:rPr>
-              <a:t>Les champs annotés suffisent : Declaration("2025-01", …).</a:t>
-            </a:r>
-            <a:endParaRPr lang="en-US" sz="1450" dirty="0"/>
-          </a:p>
-        </p:txBody>
-      </p:sp>
-      <p:sp>
-        <p:nvSpPr>
-          <p:cNvPr id="7" name="Shape 4"/>
-          <p:cNvSpPr/>
-          <p:nvPr/>
-        </p:nvSpPr>
-        <p:spPr>
-          <a:xfrm>
-            <a:off x="640080" y="2926080"/>
+          <p:cNvPr id="5" name="Shape 2"/>
+          <p:cNvSpPr/>
+          <p:nvPr/>
+        </p:nvSpPr>
+        <p:spPr>
+          <a:xfrm>
+            <a:off x="640080" y="1874520"/>
             <a:ext cx="411480" cy="411480"/>
           </a:xfrm>
           <a:prstGeom prst="ellipse">
             <a:avLst/>
           </a:prstGeom>
           <a:solidFill>
-            <a:srgbClr val="1E7A50"/>
+            <a:srgbClr val="2E9E4F"/>
           </a:solidFill>
           <a:ln/>
         </p:spPr>
       </p:sp>
       <p:pic>
         <p:nvPicPr>
-          <p:cNvPr id="8" name="Image 1" descr="icons/check.png">    </p:cNvPr>
+          <p:cNvPr id="6" name="Image 1" descr="icons/check.png">    </p:cNvPr>
           <p:cNvPicPr>
             <a:picLocks noChangeAspect="1"/>
           </p:cNvPicPr>
@@ -4340,7 +4350,7 @@
         </p:blipFill>
         <p:spPr>
           <a:xfrm>
-            <a:off x="747065" y="3033065"/>
+            <a:off x="747065" y="1981505"/>
             <a:ext cx="197510" cy="197510"/>
           </a:xfrm>
           <a:prstGeom prst="rect">
@@ -4350,13 +4360,13 @@
       </p:pic>
       <p:sp>
         <p:nvSpPr>
-          <p:cNvPr id="9" name="Text 5"/>
-          <p:cNvSpPr/>
-          <p:nvPr/>
-        </p:nvSpPr>
-        <p:spPr>
-          <a:xfrm>
-            <a:off x="1234440" y="2852928"/>
+          <p:cNvPr id="7" name="Text 3"/>
+          <p:cNvSpPr/>
+          <p:nvPr/>
+        </p:nvSpPr>
+        <p:spPr>
+          <a:xfrm>
+            <a:off x="1234440" y="1801368"/>
             <a:ext cx="4800600" cy="960120"/>
           </a:xfrm>
           <a:prstGeom prst="rect">
@@ -4384,7 +4394,7 @@
                 <a:ea typeface="Calibri" pitchFamily="34" charset="-122"/>
                 <a:cs typeface="Calibri" pitchFamily="34" charset="-120"/>
               </a:rPr>
-              <a:t>@property : valeur calculée</a:t>
+              <a:t>__init__ écrit pour vous</a:t>
             </a:r>
             <a:endParaRPr lang="en-US" sz="1450" dirty="0"/>
           </a:p>
@@ -4404,7 +4414,7 @@
                 <a:ea typeface="Calibri" pitchFamily="34" charset="-122"/>
                 <a:cs typeface="Calibri" pitchFamily="34" charset="-120"/>
               </a:rPr>
-              <a:t>d.tva_nette se LIT comme un champ, se CALCULE comme une méthode.</a:t>
+              <a:t>Les champs annotés suffisent : Declaration("2025-01", …).</a:t>
             </a:r>
             <a:endParaRPr lang="en-US" sz="1450" dirty="0"/>
           </a:p>
@@ -4412,27 +4422,27 @@
       </p:sp>
       <p:sp>
         <p:nvSpPr>
-          <p:cNvPr id="10" name="Shape 6"/>
-          <p:cNvSpPr/>
-          <p:nvPr/>
-        </p:nvSpPr>
-        <p:spPr>
-          <a:xfrm>
-            <a:off x="640080" y="3977640"/>
+          <p:cNvPr id="8" name="Shape 4"/>
+          <p:cNvSpPr/>
+          <p:nvPr/>
+        </p:nvSpPr>
+        <p:spPr>
+          <a:xfrm>
+            <a:off x="640080" y="2926080"/>
             <a:ext cx="411480" cy="411480"/>
           </a:xfrm>
           <a:prstGeom prst="ellipse">
             <a:avLst/>
           </a:prstGeom>
           <a:solidFill>
-            <a:srgbClr val="1E7A50"/>
+            <a:srgbClr val="2E9E4F"/>
           </a:solidFill>
           <a:ln/>
         </p:spPr>
       </p:sp>
       <p:pic>
         <p:nvPicPr>
-          <p:cNvPr id="11" name="Image 2" descr="icons/check.png">    </p:cNvPr>
+          <p:cNvPr id="9" name="Image 2" descr="icons/check.png">    </p:cNvPr>
           <p:cNvPicPr>
             <a:picLocks noChangeAspect="1"/>
           </p:cNvPicPr>
@@ -4446,7 +4456,7 @@
         </p:blipFill>
         <p:spPr>
           <a:xfrm>
-            <a:off x="747065" y="4084625"/>
+            <a:off x="747065" y="3033065"/>
             <a:ext cx="197510" cy="197510"/>
           </a:xfrm>
           <a:prstGeom prst="rect">
@@ -4456,13 +4466,13 @@
       </p:pic>
       <p:sp>
         <p:nvSpPr>
-          <p:cNvPr id="12" name="Text 7"/>
-          <p:cNvSpPr/>
-          <p:nvPr/>
-        </p:nvSpPr>
-        <p:spPr>
-          <a:xfrm>
-            <a:off x="1234440" y="3904488"/>
+          <p:cNvPr id="10" name="Text 5"/>
+          <p:cNvSpPr/>
+          <p:nvPr/>
+        </p:nvSpPr>
+        <p:spPr>
+          <a:xfrm>
+            <a:off x="1234440" y="2852928"/>
             <a:ext cx="4800600" cy="960120"/>
           </a:xfrm>
           <a:prstGeom prst="rect">
@@ -4490,7 +4500,7 @@
                 <a:ea typeface="Calibri" pitchFamily="34" charset="-122"/>
                 <a:cs typeface="Calibri" pitchFamily="34" charset="-120"/>
               </a:rPr>
-              <a:t>Jamais de liste en défaut</a:t>
+              <a:t>@property : valeur calculée</a:t>
             </a:r>
             <a:endParaRPr lang="en-US" sz="1450" dirty="0"/>
           </a:p>
@@ -4510,7 +4520,7 @@
                 <a:ea typeface="Calibri" pitchFamily="34" charset="-122"/>
                 <a:cs typeface="Calibri" pitchFamily="34" charset="-120"/>
               </a:rPr>
-              <a:t>field(default_factory=list) — le piège classique de Python.</a:t>
+              <a:t>d.tva_nette se LIT comme un champ, se CALCULE comme une méthode.</a:t>
             </a:r>
             <a:endParaRPr lang="en-US" sz="1450" dirty="0"/>
           </a:p>
@@ -4518,27 +4528,27 @@
       </p:sp>
       <p:sp>
         <p:nvSpPr>
-          <p:cNvPr id="13" name="Shape 8"/>
-          <p:cNvSpPr/>
-          <p:nvPr/>
-        </p:nvSpPr>
-        <p:spPr>
-          <a:xfrm>
-            <a:off x="640080" y="5029200"/>
+          <p:cNvPr id="11" name="Shape 6"/>
+          <p:cNvSpPr/>
+          <p:nvPr/>
+        </p:nvSpPr>
+        <p:spPr>
+          <a:xfrm>
+            <a:off x="640080" y="3977640"/>
             <a:ext cx="411480" cy="411480"/>
           </a:xfrm>
           <a:prstGeom prst="ellipse">
             <a:avLst/>
           </a:prstGeom>
           <a:solidFill>
-            <a:srgbClr val="1E7A50"/>
+            <a:srgbClr val="2E9E4F"/>
           </a:solidFill>
           <a:ln/>
         </p:spPr>
       </p:sp>
       <p:pic>
         <p:nvPicPr>
-          <p:cNvPr id="14" name="Image 3" descr="icons/check.png">    </p:cNvPr>
+          <p:cNvPr id="12" name="Image 3" descr="icons/check.png">    </p:cNvPr>
           <p:cNvPicPr>
             <a:picLocks noChangeAspect="1"/>
           </p:cNvPicPr>
@@ -4552,7 +4562,7 @@
         </p:blipFill>
         <p:spPr>
           <a:xfrm>
-            <a:off x="747065" y="5136185"/>
+            <a:off x="747065" y="4084625"/>
             <a:ext cx="197510" cy="197510"/>
           </a:xfrm>
           <a:prstGeom prst="rect">
@@ -4562,13 +4572,13 @@
       </p:pic>
       <p:sp>
         <p:nvSpPr>
-          <p:cNvPr id="15" name="Text 9"/>
-          <p:cNvSpPr/>
-          <p:nvPr/>
-        </p:nvSpPr>
-        <p:spPr>
-          <a:xfrm>
-            <a:off x="1234440" y="4956048"/>
+          <p:cNvPr id="13" name="Text 7"/>
+          <p:cNvSpPr/>
+          <p:nvPr/>
+        </p:nvSpPr>
+        <p:spPr>
+          <a:xfrm>
+            <a:off x="1234440" y="3904488"/>
             <a:ext cx="4800600" cy="960120"/>
           </a:xfrm>
           <a:prstGeom prst="rect">
@@ -4596,7 +4606,7 @@
                 <a:ea typeface="Calibri" pitchFamily="34" charset="-122"/>
                 <a:cs typeface="Calibri" pitchFamily="34" charset="-120"/>
               </a:rPr>
-              <a:t>Quand ne PAS faire de classe</a:t>
+              <a:t>Jamais de liste en défaut</a:t>
             </a:r>
             <a:endParaRPr lang="en-US" sz="1450" dirty="0"/>
           </a:p>
@@ -4616,6 +4626,112 @@
                 <a:ea typeface="Calibri" pitchFamily="34" charset="-122"/>
                 <a:cs typeface="Calibri" pitchFamily="34" charset="-120"/>
               </a:rPr>
+              <a:t>field(default_factory=list) — le piège classique de Python.</a:t>
+            </a:r>
+            <a:endParaRPr lang="en-US" sz="1450" dirty="0"/>
+          </a:p>
+        </p:txBody>
+      </p:sp>
+      <p:sp>
+        <p:nvSpPr>
+          <p:cNvPr id="14" name="Shape 8"/>
+          <p:cNvSpPr/>
+          <p:nvPr/>
+        </p:nvSpPr>
+        <p:spPr>
+          <a:xfrm>
+            <a:off x="640080" y="5029200"/>
+            <a:ext cx="411480" cy="411480"/>
+          </a:xfrm>
+          <a:prstGeom prst="ellipse">
+            <a:avLst/>
+          </a:prstGeom>
+          <a:solidFill>
+            <a:srgbClr val="2E9E4F"/>
+          </a:solidFill>
+          <a:ln/>
+        </p:spPr>
+      </p:sp>
+      <p:pic>
+        <p:nvPicPr>
+          <p:cNvPr id="15" name="Image 4" descr="icons/check.png">    </p:cNvPr>
+          <p:cNvPicPr>
+            <a:picLocks noChangeAspect="1"/>
+          </p:cNvPicPr>
+          <p:nvPr/>
+        </p:nvPicPr>
+        <p:blipFill>
+          <a:blip r:embed="rId5"/>
+          <a:stretch>
+            <a:fillRect/>
+          </a:stretch>
+        </p:blipFill>
+        <p:spPr>
+          <a:xfrm>
+            <a:off x="747065" y="5136185"/>
+            <a:ext cx="197510" cy="197510"/>
+          </a:xfrm>
+          <a:prstGeom prst="rect">
+            <a:avLst/>
+          </a:prstGeom>
+        </p:spPr>
+      </p:pic>
+      <p:sp>
+        <p:nvSpPr>
+          <p:cNvPr id="16" name="Text 9"/>
+          <p:cNvSpPr/>
+          <p:nvPr/>
+        </p:nvSpPr>
+        <p:spPr>
+          <a:xfrm>
+            <a:off x="1234440" y="4956048"/>
+            <a:ext cx="4800600" cy="960120"/>
+          </a:xfrm>
+          <a:prstGeom prst="rect">
+            <a:avLst/>
+          </a:prstGeom>
+          <a:noFill/>
+          <a:ln/>
+        </p:spPr>
+        <p:txBody>
+          <a:bodyPr wrap="square" lIns="0" tIns="0" rIns="0" bIns="0" rtlCol="0" anchor="ctr"/>
+          <a:lstStyle/>
+          <a:p>
+            <a:pPr indent="0" marL="0">
+              <a:lnSpc>
+                <a:spcPct val="105000"/>
+              </a:lnSpc>
+              <a:buNone/>
+            </a:pPr>
+            <a:r>
+              <a:rPr lang="en-US" sz="1450" b="1" dirty="0">
+                <a:solidFill>
+                  <a:srgbClr val="1C2A24"/>
+                </a:solidFill>
+                <a:latin typeface="Calibri" pitchFamily="34" charset="0"/>
+                <a:ea typeface="Calibri" pitchFamily="34" charset="-122"/>
+                <a:cs typeface="Calibri" pitchFamily="34" charset="-120"/>
+              </a:rPr>
+              <a:t>Quand ne PAS faire de classe</a:t>
+            </a:r>
+            <a:endParaRPr lang="en-US" sz="1450" dirty="0"/>
+          </a:p>
+          <a:p>
+            <a:pPr indent="0" marL="0">
+              <a:lnSpc>
+                <a:spcPct val="105000"/>
+              </a:lnSpc>
+              <a:buNone/>
+            </a:pPr>
+            <a:r>
+              <a:rPr lang="en-US" sz="1250" dirty="0">
+                <a:solidFill>
+                  <a:srgbClr val="5C6B63"/>
+                </a:solidFill>
+                <a:latin typeface="Calibri" pitchFamily="34" charset="0"/>
+                <a:ea typeface="Calibri" pitchFamily="34" charset="-122"/>
+                <a:cs typeface="Calibri" pitchFamily="34" charset="-120"/>
+              </a:rPr>
               <a:t>Un dict suffit si aucune règle ne protège les données.</a:t>
             </a:r>
             <a:endParaRPr lang="en-US" sz="1450" dirty="0"/>
@@ -4624,7 +4740,7 @@
       </p:sp>
       <p:sp>
         <p:nvSpPr>
-          <p:cNvPr id="16" name="Shape 10"/>
+          <p:cNvPr id="17" name="Shape 10"/>
           <p:cNvSpPr/>
           <p:nvPr/>
         </p:nvSpPr>
@@ -4639,14 +4755,14 @@
             </a:avLst>
           </a:prstGeom>
           <a:solidFill>
-            <a:srgbClr val="10241B"/>
+            <a:srgbClr val="0F2418"/>
           </a:solidFill>
           <a:ln/>
         </p:spPr>
       </p:sp>
       <p:sp>
         <p:nvSpPr>
-          <p:cNvPr id="17" name="Shape 11"/>
+          <p:cNvPr id="18" name="Shape 11"/>
           <p:cNvSpPr/>
           <p:nvPr/>
         </p:nvSpPr>
@@ -4666,7 +4782,7 @@
       </p:sp>
       <p:sp>
         <p:nvSpPr>
-          <p:cNvPr id="18" name="Shape 12"/>
+          <p:cNvPr id="19" name="Shape 12"/>
           <p:cNvSpPr/>
           <p:nvPr/>
         </p:nvSpPr>
@@ -4679,14 +4795,14 @@
             <a:avLst/>
           </a:prstGeom>
           <a:solidFill>
-            <a:srgbClr val="C9A227"/>
+            <a:srgbClr val="C79100"/>
           </a:solidFill>
           <a:ln/>
         </p:spPr>
       </p:sp>
       <p:sp>
         <p:nvSpPr>
-          <p:cNvPr id="19" name="Shape 13"/>
+          <p:cNvPr id="20" name="Shape 13"/>
           <p:cNvSpPr/>
           <p:nvPr/>
         </p:nvSpPr>
@@ -4706,7 +4822,7 @@
       </p:sp>
       <p:sp>
         <p:nvSpPr>
-          <p:cNvPr id="20" name="Text 14"/>
+          <p:cNvPr id="21" name="Text 14"/>
           <p:cNvSpPr/>
           <p:nvPr/>
         </p:nvSpPr>
@@ -4745,7 +4861,7 @@
       </p:sp>
       <p:sp>
         <p:nvSpPr>
-          <p:cNvPr id="21" name="Text 15"/>
+          <p:cNvPr id="22" name="Text 15"/>
           <p:cNvSpPr/>
           <p:nvPr/>
         </p:nvSpPr>
@@ -5281,7 +5397,7 @@
         <p:spPr>
           <a:xfrm>
             <a:off x="548640" y="384048"/>
-            <a:ext cx="10972800" cy="320040"/>
+            <a:ext cx="9601200" cy="320040"/>
           </a:xfrm>
           <a:prstGeom prst="rect">
             <a:avLst/>
@@ -5299,7 +5415,7 @@
             <a:r>
               <a:rPr lang="en-US" sz="1300" b="1" spc="200" kern="0" dirty="0">
                 <a:solidFill>
-                  <a:srgbClr val="C9A227"/>
+                  <a:srgbClr val="C79100"/>
                 </a:solidFill>
                 <a:latin typeface="Calibri" pitchFamily="34" charset="0"/>
                 <a:ea typeface="Calibri" pitchFamily="34" charset="-122"/>
@@ -5320,7 +5436,7 @@
         <p:spPr>
           <a:xfrm>
             <a:off x="548640" y="658368"/>
-            <a:ext cx="11064240" cy="731520"/>
+            <a:ext cx="9966960" cy="731520"/>
           </a:xfrm>
           <a:prstGeom prst="rect">
             <a:avLst/>
@@ -5338,7 +5454,7 @@
             <a:r>
               <a:rPr lang="en-US" sz="3400" b="1" dirty="0">
                 <a:solidFill>
-                  <a:srgbClr val="14563C"/>
+                  <a:srgbClr val="0E7A3D"/>
                 </a:solidFill>
                 <a:latin typeface="Cambria" pitchFamily="34" charset="0"/>
                 <a:ea typeface="Cambria" pitchFamily="34" charset="-122"/>
@@ -5350,29 +5466,9 @@
           </a:p>
         </p:txBody>
       </p:sp>
-      <p:sp>
-        <p:nvSpPr>
-          <p:cNvPr id="4" name="Shape 2"/>
-          <p:cNvSpPr/>
-          <p:nvPr/>
-        </p:nvSpPr>
-        <p:spPr>
-          <a:xfrm>
-            <a:off x="640080" y="1874520"/>
-            <a:ext cx="411480" cy="411480"/>
-          </a:xfrm>
-          <a:prstGeom prst="ellipse">
-            <a:avLst/>
-          </a:prstGeom>
-          <a:solidFill>
-            <a:srgbClr val="1E7A50"/>
-          </a:solidFill>
-          <a:ln/>
-        </p:spPr>
-      </p:sp>
       <p:pic>
         <p:nvPicPr>
-          <p:cNvPr id="5" name="Image 0" descr="icons/check.png">    </p:cNvPr>
+          <p:cNvPr id="4" name="Image 0" descr="logo-dgi.png">    </p:cNvPr>
           <p:cNvPicPr>
             <a:picLocks noChangeAspect="1"/>
           </p:cNvPicPr>
@@ -5386,8 +5482,8 @@
         </p:blipFill>
         <p:spPr>
           <a:xfrm>
-            <a:off x="747065" y="1981505"/>
-            <a:ext cx="197510" cy="197510"/>
+            <a:off x="10744200" y="384048"/>
+            <a:ext cx="1051560" cy="795528"/>
           </a:xfrm>
           <a:prstGeom prst="rect">
             <a:avLst/>
@@ -5396,89 +5492,27 @@
       </p:pic>
       <p:sp>
         <p:nvSpPr>
-          <p:cNvPr id="6" name="Text 3"/>
-          <p:cNvSpPr/>
-          <p:nvPr/>
-        </p:nvSpPr>
-        <p:spPr>
-          <a:xfrm>
-            <a:off x="1234440" y="1801368"/>
-            <a:ext cx="4800600" cy="960120"/>
-          </a:xfrm>
-          <a:prstGeom prst="rect">
-            <a:avLst/>
-          </a:prstGeom>
-          <a:noFill/>
-          <a:ln/>
-        </p:spPr>
-        <p:txBody>
-          <a:bodyPr wrap="square" lIns="0" tIns="0" rIns="0" bIns="0" rtlCol="0" anchor="ctr"/>
-          <a:lstStyle/>
-          <a:p>
-            <a:pPr indent="0" marL="0">
-              <a:lnSpc>
-                <a:spcPct val="105000"/>
-              </a:lnSpc>
-              <a:buNone/>
-            </a:pPr>
-            <a:r>
-              <a:rPr lang="en-US" sz="1450" b="1" dirty="0">
-                <a:solidFill>
-                  <a:srgbClr val="1C2A24"/>
-                </a:solidFill>
-                <a:latin typeface="Calibri" pitchFamily="34" charset="0"/>
-                <a:ea typeface="Calibri" pitchFamily="34" charset="-122"/>
-                <a:cs typeface="Calibri" pitchFamily="34" charset="-120"/>
-              </a:rPr>
-              <a:t>Le DataFrame : un tableau typé</a:t>
-            </a:r>
-            <a:endParaRPr lang="en-US" sz="1450" dirty="0"/>
-          </a:p>
-          <a:p>
-            <a:pPr indent="0" marL="0">
-              <a:lnSpc>
-                <a:spcPct val="105000"/>
-              </a:lnSpc>
-              <a:buNone/>
-            </a:pPr>
-            <a:r>
-              <a:rPr lang="en-US" sz="1250" dirty="0">
-                <a:solidFill>
-                  <a:srgbClr val="5C6B63"/>
-                </a:solidFill>
-                <a:latin typeface="Calibri" pitchFamily="34" charset="0"/>
-                <a:ea typeface="Calibri" pitchFamily="34" charset="-122"/>
-                <a:cs typeface="Calibri" pitchFamily="34" charset="-120"/>
-              </a:rPr>
-              <a:t>Colonnes nommées, opérations vectorisées — fini la boucle ligne à ligne.</a:t>
-            </a:r>
-            <a:endParaRPr lang="en-US" sz="1450" dirty="0"/>
-          </a:p>
-        </p:txBody>
-      </p:sp>
-      <p:sp>
-        <p:nvSpPr>
-          <p:cNvPr id="7" name="Shape 4"/>
-          <p:cNvSpPr/>
-          <p:nvPr/>
-        </p:nvSpPr>
-        <p:spPr>
-          <a:xfrm>
-            <a:off x="640080" y="2926080"/>
+          <p:cNvPr id="5" name="Shape 2"/>
+          <p:cNvSpPr/>
+          <p:nvPr/>
+        </p:nvSpPr>
+        <p:spPr>
+          <a:xfrm>
+            <a:off x="640080" y="1874520"/>
             <a:ext cx="411480" cy="411480"/>
           </a:xfrm>
           <a:prstGeom prst="ellipse">
             <a:avLst/>
           </a:prstGeom>
           <a:solidFill>
-            <a:srgbClr val="1E7A50"/>
+            <a:srgbClr val="2E9E4F"/>
           </a:solidFill>
           <a:ln/>
         </p:spPr>
       </p:sp>
       <p:pic>
         <p:nvPicPr>
-          <p:cNvPr id="8" name="Image 1" descr="icons/check.png">    </p:cNvPr>
+          <p:cNvPr id="6" name="Image 1" descr="icons/check.png">    </p:cNvPr>
           <p:cNvPicPr>
             <a:picLocks noChangeAspect="1"/>
           </p:cNvPicPr>
@@ -5492,7 +5526,7 @@
         </p:blipFill>
         <p:spPr>
           <a:xfrm>
-            <a:off x="747065" y="3033065"/>
+            <a:off x="747065" y="1981505"/>
             <a:ext cx="197510" cy="197510"/>
           </a:xfrm>
           <a:prstGeom prst="rect">
@@ -5502,13 +5536,13 @@
       </p:pic>
       <p:sp>
         <p:nvSpPr>
-          <p:cNvPr id="9" name="Text 5"/>
-          <p:cNvSpPr/>
-          <p:nvPr/>
-        </p:nvSpPr>
-        <p:spPr>
-          <a:xfrm>
-            <a:off x="1234440" y="2852928"/>
+          <p:cNvPr id="7" name="Text 3"/>
+          <p:cNvSpPr/>
+          <p:nvPr/>
+        </p:nvSpPr>
+        <p:spPr>
+          <a:xfrm>
+            <a:off x="1234440" y="1801368"/>
             <a:ext cx="4800600" cy="960120"/>
           </a:xfrm>
           <a:prstGeom prst="rect">
@@ -5536,7 +5570,7 @@
                 <a:ea typeface="Calibri" pitchFamily="34" charset="-122"/>
                 <a:cs typeface="Calibri" pitchFamily="34" charset="-120"/>
               </a:rPr>
-              <a:t>dtype={"nif": str} au chargement</a:t>
+              <a:t>Le DataFrame : un tableau typé</a:t>
             </a:r>
             <a:endParaRPr lang="en-US" sz="1450" dirty="0"/>
           </a:p>
@@ -5556,7 +5590,7 @@
                 <a:ea typeface="Calibri" pitchFamily="34" charset="-122"/>
                 <a:cs typeface="Calibri" pitchFamily="34" charset="-120"/>
               </a:rPr>
-              <a:t>Sinon les NIF deviennent des nombres et perdent leurs zéros.</a:t>
+              <a:t>Colonnes nommées, opérations vectorisées — fini la boucle ligne à ligne.</a:t>
             </a:r>
             <a:endParaRPr lang="en-US" sz="1450" dirty="0"/>
           </a:p>
@@ -5564,27 +5598,27 @@
       </p:sp>
       <p:sp>
         <p:nvSpPr>
-          <p:cNvPr id="10" name="Shape 6"/>
-          <p:cNvSpPr/>
-          <p:nvPr/>
-        </p:nvSpPr>
-        <p:spPr>
-          <a:xfrm>
-            <a:off x="640080" y="3977640"/>
+          <p:cNvPr id="8" name="Shape 4"/>
+          <p:cNvSpPr/>
+          <p:nvPr/>
+        </p:nvSpPr>
+        <p:spPr>
+          <a:xfrm>
+            <a:off x="640080" y="2926080"/>
             <a:ext cx="411480" cy="411480"/>
           </a:xfrm>
           <a:prstGeom prst="ellipse">
             <a:avLst/>
           </a:prstGeom>
           <a:solidFill>
-            <a:srgbClr val="1E7A50"/>
+            <a:srgbClr val="2E9E4F"/>
           </a:solidFill>
           <a:ln/>
         </p:spPr>
       </p:sp>
       <p:pic>
         <p:nvPicPr>
-          <p:cNvPr id="11" name="Image 2" descr="icons/check.png">    </p:cNvPr>
+          <p:cNvPr id="9" name="Image 2" descr="icons/check.png">    </p:cNvPr>
           <p:cNvPicPr>
             <a:picLocks noChangeAspect="1"/>
           </p:cNvPicPr>
@@ -5598,7 +5632,7 @@
         </p:blipFill>
         <p:spPr>
           <a:xfrm>
-            <a:off x="747065" y="4084625"/>
+            <a:off x="747065" y="3033065"/>
             <a:ext cx="197510" cy="197510"/>
           </a:xfrm>
           <a:prstGeom prst="rect">
@@ -5608,13 +5642,13 @@
       </p:pic>
       <p:sp>
         <p:nvSpPr>
-          <p:cNvPr id="12" name="Text 7"/>
-          <p:cNvSpPr/>
-          <p:nvPr/>
-        </p:nvSpPr>
-        <p:spPr>
-          <a:xfrm>
-            <a:off x="1234440" y="3904488"/>
+          <p:cNvPr id="10" name="Text 5"/>
+          <p:cNvSpPr/>
+          <p:nvPr/>
+        </p:nvSpPr>
+        <p:spPr>
+          <a:xfrm>
+            <a:off x="1234440" y="2852928"/>
             <a:ext cx="4800600" cy="960120"/>
           </a:xfrm>
           <a:prstGeom prst="rect">
@@ -5642,7 +5676,7 @@
                 <a:ea typeface="Calibri" pitchFamily="34" charset="-122"/>
                 <a:cs typeface="Calibri" pitchFamily="34" charset="-120"/>
               </a:rPr>
-              <a:t>info() et describe() d’abord</a:t>
+              <a:t>dtype={"nif": str} au chargement</a:t>
             </a:r>
             <a:endParaRPr lang="en-US" sz="1450" dirty="0"/>
           </a:p>
@@ -5662,7 +5696,7 @@
                 <a:ea typeface="Calibri" pitchFamily="34" charset="-122"/>
                 <a:cs typeface="Calibri" pitchFamily="34" charset="-120"/>
               </a:rPr>
-              <a:t>Types, valeurs manquantes, ordres de grandeur — AVANT de calculer.</a:t>
+              <a:t>Sinon les NIF deviennent des nombres et perdent leurs zéros.</a:t>
             </a:r>
             <a:endParaRPr lang="en-US" sz="1450" dirty="0"/>
           </a:p>
@@ -5670,27 +5704,27 @@
       </p:sp>
       <p:sp>
         <p:nvSpPr>
-          <p:cNvPr id="13" name="Shape 8"/>
-          <p:cNvSpPr/>
-          <p:nvPr/>
-        </p:nvSpPr>
-        <p:spPr>
-          <a:xfrm>
-            <a:off x="640080" y="5029200"/>
+          <p:cNvPr id="11" name="Shape 6"/>
+          <p:cNvSpPr/>
+          <p:nvPr/>
+        </p:nvSpPr>
+        <p:spPr>
+          <a:xfrm>
+            <a:off x="640080" y="3977640"/>
             <a:ext cx="411480" cy="411480"/>
           </a:xfrm>
           <a:prstGeom prst="ellipse">
             <a:avLst/>
           </a:prstGeom>
           <a:solidFill>
-            <a:srgbClr val="1E7A50"/>
+            <a:srgbClr val="2E9E4F"/>
           </a:solidFill>
           <a:ln/>
         </p:spPr>
       </p:sp>
       <p:pic>
         <p:nvPicPr>
-          <p:cNvPr id="14" name="Image 3" descr="icons/check.png">    </p:cNvPr>
+          <p:cNvPr id="12" name="Image 3" descr="icons/check.png">    </p:cNvPr>
           <p:cNvPicPr>
             <a:picLocks noChangeAspect="1"/>
           </p:cNvPicPr>
@@ -5704,7 +5738,7 @@
         </p:blipFill>
         <p:spPr>
           <a:xfrm>
-            <a:off x="747065" y="5136185"/>
+            <a:off x="747065" y="4084625"/>
             <a:ext cx="197510" cy="197510"/>
           </a:xfrm>
           <a:prstGeom prst="rect">
@@ -5714,13 +5748,13 @@
       </p:pic>
       <p:sp>
         <p:nvSpPr>
-          <p:cNvPr id="15" name="Text 9"/>
-          <p:cNvSpPr/>
-          <p:nvPr/>
-        </p:nvSpPr>
-        <p:spPr>
-          <a:xfrm>
-            <a:off x="1234440" y="4956048"/>
+          <p:cNvPr id="13" name="Text 7"/>
+          <p:cNvSpPr/>
+          <p:nvPr/>
+        </p:nvSpPr>
+        <p:spPr>
+          <a:xfrm>
+            <a:off x="1234440" y="3904488"/>
             <a:ext cx="4800600" cy="960120"/>
           </a:xfrm>
           <a:prstGeom prst="rect">
@@ -5748,7 +5782,7 @@
                 <a:ea typeface="Calibri" pitchFamily="34" charset="-122"/>
                 <a:cs typeface="Calibri" pitchFamily="34" charset="-120"/>
               </a:rPr>
-              <a:t>Filtrer par masque</a:t>
+              <a:t>info() et describe() d’abord</a:t>
             </a:r>
             <a:endParaRPr lang="en-US" sz="1450" dirty="0"/>
           </a:p>
@@ -5768,6 +5802,112 @@
                 <a:ea typeface="Calibri" pitchFamily="34" charset="-122"/>
                 <a:cs typeface="Calibri" pitchFamily="34" charset="-120"/>
               </a:rPr>
+              <a:t>Types, valeurs manquantes, ordres de grandeur — AVANT de calculer.</a:t>
+            </a:r>
+            <a:endParaRPr lang="en-US" sz="1450" dirty="0"/>
+          </a:p>
+        </p:txBody>
+      </p:sp>
+      <p:sp>
+        <p:nvSpPr>
+          <p:cNvPr id="14" name="Shape 8"/>
+          <p:cNvSpPr/>
+          <p:nvPr/>
+        </p:nvSpPr>
+        <p:spPr>
+          <a:xfrm>
+            <a:off x="640080" y="5029200"/>
+            <a:ext cx="411480" cy="411480"/>
+          </a:xfrm>
+          <a:prstGeom prst="ellipse">
+            <a:avLst/>
+          </a:prstGeom>
+          <a:solidFill>
+            <a:srgbClr val="2E9E4F"/>
+          </a:solidFill>
+          <a:ln/>
+        </p:spPr>
+      </p:sp>
+      <p:pic>
+        <p:nvPicPr>
+          <p:cNvPr id="15" name="Image 4" descr="icons/check.png">    </p:cNvPr>
+          <p:cNvPicPr>
+            <a:picLocks noChangeAspect="1"/>
+          </p:cNvPicPr>
+          <p:nvPr/>
+        </p:nvPicPr>
+        <p:blipFill>
+          <a:blip r:embed="rId5"/>
+          <a:stretch>
+            <a:fillRect/>
+          </a:stretch>
+        </p:blipFill>
+        <p:spPr>
+          <a:xfrm>
+            <a:off x="747065" y="5136185"/>
+            <a:ext cx="197510" cy="197510"/>
+          </a:xfrm>
+          <a:prstGeom prst="rect">
+            <a:avLst/>
+          </a:prstGeom>
+        </p:spPr>
+      </p:pic>
+      <p:sp>
+        <p:nvSpPr>
+          <p:cNvPr id="16" name="Text 9"/>
+          <p:cNvSpPr/>
+          <p:nvPr/>
+        </p:nvSpPr>
+        <p:spPr>
+          <a:xfrm>
+            <a:off x="1234440" y="4956048"/>
+            <a:ext cx="4800600" cy="960120"/>
+          </a:xfrm>
+          <a:prstGeom prst="rect">
+            <a:avLst/>
+          </a:prstGeom>
+          <a:noFill/>
+          <a:ln/>
+        </p:spPr>
+        <p:txBody>
+          <a:bodyPr wrap="square" lIns="0" tIns="0" rIns="0" bIns="0" rtlCol="0" anchor="ctr"/>
+          <a:lstStyle/>
+          <a:p>
+            <a:pPr indent="0" marL="0">
+              <a:lnSpc>
+                <a:spcPct val="105000"/>
+              </a:lnSpc>
+              <a:buNone/>
+            </a:pPr>
+            <a:r>
+              <a:rPr lang="en-US" sz="1450" b="1" dirty="0">
+                <a:solidFill>
+                  <a:srgbClr val="1C2A24"/>
+                </a:solidFill>
+                <a:latin typeface="Calibri" pitchFamily="34" charset="0"/>
+                <a:ea typeface="Calibri" pitchFamily="34" charset="-122"/>
+                <a:cs typeface="Calibri" pitchFamily="34" charset="-120"/>
+              </a:rPr>
+              <a:t>Filtrer par masque</a:t>
+            </a:r>
+            <a:endParaRPr lang="en-US" sz="1450" dirty="0"/>
+          </a:p>
+          <a:p>
+            <a:pPr indent="0" marL="0">
+              <a:lnSpc>
+                <a:spcPct val="105000"/>
+              </a:lnSpc>
+              <a:buNone/>
+            </a:pPr>
+            <a:r>
+              <a:rPr lang="en-US" sz="1250" dirty="0">
+                <a:solidFill>
+                  <a:srgbClr val="5C6B63"/>
+                </a:solidFill>
+                <a:latin typeface="Calibri" pitchFamily="34" charset="0"/>
+                <a:ea typeface="Calibri" pitchFamily="34" charset="-122"/>
+                <a:cs typeface="Calibri" pitchFamily="34" charset="-120"/>
+              </a:rPr>
               <a:t>df[df["chiffre_affaires"] &gt; 0] : la condition indexe le tableau.</a:t>
             </a:r>
             <a:endParaRPr lang="en-US" sz="1450" dirty="0"/>
@@ -5776,7 +5916,7 @@
       </p:sp>
       <p:sp>
         <p:nvSpPr>
-          <p:cNvPr id="16" name="Shape 10"/>
+          <p:cNvPr id="17" name="Shape 10"/>
           <p:cNvSpPr/>
           <p:nvPr/>
         </p:nvSpPr>
@@ -5791,14 +5931,14 @@
             </a:avLst>
           </a:prstGeom>
           <a:solidFill>
-            <a:srgbClr val="10241B"/>
+            <a:srgbClr val="0F2418"/>
           </a:solidFill>
           <a:ln/>
         </p:spPr>
       </p:sp>
       <p:sp>
         <p:nvSpPr>
-          <p:cNvPr id="17" name="Shape 11"/>
+          <p:cNvPr id="18" name="Shape 11"/>
           <p:cNvSpPr/>
           <p:nvPr/>
         </p:nvSpPr>
@@ -5818,7 +5958,7 @@
       </p:sp>
       <p:sp>
         <p:nvSpPr>
-          <p:cNvPr id="18" name="Shape 12"/>
+          <p:cNvPr id="19" name="Shape 12"/>
           <p:cNvSpPr/>
           <p:nvPr/>
         </p:nvSpPr>
@@ -5831,14 +5971,14 @@
             <a:avLst/>
           </a:prstGeom>
           <a:solidFill>
-            <a:srgbClr val="C9A227"/>
+            <a:srgbClr val="C79100"/>
           </a:solidFill>
           <a:ln/>
         </p:spPr>
       </p:sp>
       <p:sp>
         <p:nvSpPr>
-          <p:cNvPr id="19" name="Shape 13"/>
+          <p:cNvPr id="20" name="Shape 13"/>
           <p:cNvSpPr/>
           <p:nvPr/>
         </p:nvSpPr>
@@ -5858,7 +5998,7 @@
       </p:sp>
       <p:sp>
         <p:nvSpPr>
-          <p:cNvPr id="20" name="Text 14"/>
+          <p:cNvPr id="21" name="Text 14"/>
           <p:cNvSpPr/>
           <p:nvPr/>
         </p:nvSpPr>
@@ -5897,7 +6037,7 @@
       </p:sp>
       <p:sp>
         <p:nvSpPr>
-          <p:cNvPr id="21" name="Text 15"/>
+          <p:cNvPr id="22" name="Text 15"/>
           <p:cNvSpPr/>
           <p:nvPr/>
         </p:nvSpPr>
@@ -6501,7 +6641,7 @@
         <p:spPr>
           <a:xfrm>
             <a:off x="548640" y="384048"/>
-            <a:ext cx="10972800" cy="320040"/>
+            <a:ext cx="9601200" cy="320040"/>
           </a:xfrm>
           <a:prstGeom prst="rect">
             <a:avLst/>
@@ -6519,7 +6659,7 @@
             <a:r>
               <a:rPr lang="en-US" sz="1300" b="1" spc="200" kern="0" dirty="0">
                 <a:solidFill>
-                  <a:srgbClr val="C9A227"/>
+                  <a:srgbClr val="C79100"/>
                 </a:solidFill>
                 <a:latin typeface="Calibri" pitchFamily="34" charset="0"/>
                 <a:ea typeface="Calibri" pitchFamily="34" charset="-122"/>
@@ -6540,7 +6680,7 @@
         <p:spPr>
           <a:xfrm>
             <a:off x="548640" y="658368"/>
-            <a:ext cx="11064240" cy="731520"/>
+            <a:ext cx="9966960" cy="731520"/>
           </a:xfrm>
           <a:prstGeom prst="rect">
             <a:avLst/>
@@ -6558,7 +6698,7 @@
             <a:r>
               <a:rPr lang="en-US" sz="3400" b="1" dirty="0">
                 <a:solidFill>
-                  <a:srgbClr val="14563C"/>
+                  <a:srgbClr val="0E7A3D"/>
                 </a:solidFill>
                 <a:latin typeface="Cambria" pitchFamily="34" charset="0"/>
                 <a:ea typeface="Cambria" pitchFamily="34" charset="-122"/>
@@ -6570,29 +6710,9 @@
           </a:p>
         </p:txBody>
       </p:sp>
-      <p:sp>
-        <p:nvSpPr>
-          <p:cNvPr id="4" name="Shape 2"/>
-          <p:cNvSpPr/>
-          <p:nvPr/>
-        </p:nvSpPr>
-        <p:spPr>
-          <a:xfrm>
-            <a:off x="640080" y="1874520"/>
-            <a:ext cx="411480" cy="411480"/>
-          </a:xfrm>
-          <a:prstGeom prst="ellipse">
-            <a:avLst/>
-          </a:prstGeom>
-          <a:solidFill>
-            <a:srgbClr val="1E7A50"/>
-          </a:solidFill>
-          <a:ln/>
-        </p:spPr>
-      </p:sp>
       <p:pic>
         <p:nvPicPr>
-          <p:cNvPr id="5" name="Image 0" descr="icons/check.png">    </p:cNvPr>
+          <p:cNvPr id="4" name="Image 0" descr="logo-dgi.png">    </p:cNvPr>
           <p:cNvPicPr>
             <a:picLocks noChangeAspect="1"/>
           </p:cNvPicPr>
@@ -6606,8 +6726,8 @@
         </p:blipFill>
         <p:spPr>
           <a:xfrm>
-            <a:off x="747065" y="1981505"/>
-            <a:ext cx="197510" cy="197510"/>
+            <a:off x="10744200" y="384048"/>
+            <a:ext cx="1051560" cy="795528"/>
           </a:xfrm>
           <a:prstGeom prst="rect">
             <a:avLst/>
@@ -6616,89 +6736,27 @@
       </p:pic>
       <p:sp>
         <p:nvSpPr>
-          <p:cNvPr id="6" name="Text 3"/>
-          <p:cNvSpPr/>
-          <p:nvPr/>
-        </p:nvSpPr>
-        <p:spPr>
-          <a:xfrm>
-            <a:off x="1234440" y="1801368"/>
-            <a:ext cx="4800600" cy="960120"/>
-          </a:xfrm>
-          <a:prstGeom prst="rect">
-            <a:avLst/>
-          </a:prstGeom>
-          <a:noFill/>
-          <a:ln/>
-        </p:spPr>
-        <p:txBody>
-          <a:bodyPr wrap="square" lIns="0" tIns="0" rIns="0" bIns="0" rtlCol="0" anchor="ctr"/>
-          <a:lstStyle/>
-          <a:p>
-            <a:pPr indent="0" marL="0">
-              <a:lnSpc>
-                <a:spcPct val="105000"/>
-              </a:lnSpc>
-              <a:buNone/>
-            </a:pPr>
-            <a:r>
-              <a:rPr lang="en-US" sz="1450" b="1" dirty="0">
-                <a:solidFill>
-                  <a:srgbClr val="1C2A24"/>
-                </a:solidFill>
-                <a:latin typeface="Calibri" pitchFamily="34" charset="0"/>
-                <a:ea typeface="Calibri" pitchFamily="34" charset="-122"/>
-                <a:cs typeface="Calibri" pitchFamily="34" charset="-120"/>
-              </a:rPr>
-              <a:t>drop_duplicates(subset="nif")</a:t>
-            </a:r>
-            <a:endParaRPr lang="en-US" sz="1450" dirty="0"/>
-          </a:p>
-          <a:p>
-            <a:pPr indent="0" marL="0">
-              <a:lnSpc>
-                <a:spcPct val="105000"/>
-              </a:lnSpc>
-              <a:buNone/>
-            </a:pPr>
-            <a:r>
-              <a:rPr lang="en-US" sz="1250" dirty="0">
-                <a:solidFill>
-                  <a:srgbClr val="5C6B63"/>
-                </a:solidFill>
-                <a:latin typeface="Calibri" pitchFamily="34" charset="0"/>
-                <a:ea typeface="Calibri" pitchFamily="34" charset="-122"/>
-                <a:cs typeface="Calibri" pitchFamily="34" charset="-120"/>
-              </a:rPr>
-              <a:t>Les doubles saisies du fichier contribuables disparaissent.</a:t>
-            </a:r>
-            <a:endParaRPr lang="en-US" sz="1450" dirty="0"/>
-          </a:p>
-        </p:txBody>
-      </p:sp>
-      <p:sp>
-        <p:nvSpPr>
-          <p:cNvPr id="7" name="Shape 4"/>
-          <p:cNvSpPr/>
-          <p:nvPr/>
-        </p:nvSpPr>
-        <p:spPr>
-          <a:xfrm>
-            <a:off x="640080" y="2926080"/>
+          <p:cNvPr id="5" name="Shape 2"/>
+          <p:cNvSpPr/>
+          <p:nvPr/>
+        </p:nvSpPr>
+        <p:spPr>
+          <a:xfrm>
+            <a:off x="640080" y="1874520"/>
             <a:ext cx="411480" cy="411480"/>
           </a:xfrm>
           <a:prstGeom prst="ellipse">
             <a:avLst/>
           </a:prstGeom>
           <a:solidFill>
-            <a:srgbClr val="1E7A50"/>
+            <a:srgbClr val="2E9E4F"/>
           </a:solidFill>
           <a:ln/>
         </p:spPr>
       </p:sp>
       <p:pic>
         <p:nvPicPr>
-          <p:cNvPr id="8" name="Image 1" descr="icons/check.png">    </p:cNvPr>
+          <p:cNvPr id="6" name="Image 1" descr="icons/check.png">    </p:cNvPr>
           <p:cNvPicPr>
             <a:picLocks noChangeAspect="1"/>
           </p:cNvPicPr>
@@ -6712,7 +6770,7 @@
         </p:blipFill>
         <p:spPr>
           <a:xfrm>
-            <a:off x="747065" y="3033065"/>
+            <a:off x="747065" y="1981505"/>
             <a:ext cx="197510" cy="197510"/>
           </a:xfrm>
           <a:prstGeom prst="rect">
@@ -6722,13 +6780,13 @@
       </p:pic>
       <p:sp>
         <p:nvSpPr>
-          <p:cNvPr id="9" name="Text 5"/>
-          <p:cNvSpPr/>
-          <p:nvPr/>
-        </p:nvSpPr>
-        <p:spPr>
-          <a:xfrm>
-            <a:off x="1234440" y="2852928"/>
+          <p:cNvPr id="7" name="Text 3"/>
+          <p:cNvSpPr/>
+          <p:nvPr/>
+        </p:nvSpPr>
+        <p:spPr>
+          <a:xfrm>
+            <a:off x="1234440" y="1801368"/>
             <a:ext cx="4800600" cy="960120"/>
           </a:xfrm>
           <a:prstGeom prst="rect">
@@ -6756,7 +6814,7 @@
                 <a:ea typeface="Calibri" pitchFamily="34" charset="-122"/>
                 <a:cs typeface="Calibri" pitchFamily="34" charset="-120"/>
               </a:rPr>
-              <a:t>.str.strip().str.upper()</a:t>
+              <a:t>drop_duplicates(subset="nif")</a:t>
             </a:r>
             <a:endParaRPr lang="en-US" sz="1450" dirty="0"/>
           </a:p>
@@ -6776,7 +6834,7 @@
                 <a:ea typeface="Calibri" pitchFamily="34" charset="-122"/>
                 <a:cs typeface="Calibri" pitchFamily="34" charset="-120"/>
               </a:rPr>
-              <a:t>« commerce gal », « COMMERCE GENERAL » → une seule catégorie.</a:t>
+              <a:t>Les doubles saisies du fichier contribuables disparaissent.</a:t>
             </a:r>
             <a:endParaRPr lang="en-US" sz="1450" dirty="0"/>
           </a:p>
@@ -6784,27 +6842,27 @@
       </p:sp>
       <p:sp>
         <p:nvSpPr>
-          <p:cNvPr id="10" name="Shape 6"/>
-          <p:cNvSpPr/>
-          <p:nvPr/>
-        </p:nvSpPr>
-        <p:spPr>
-          <a:xfrm>
-            <a:off x="640080" y="3977640"/>
+          <p:cNvPr id="8" name="Shape 4"/>
+          <p:cNvSpPr/>
+          <p:nvPr/>
+        </p:nvSpPr>
+        <p:spPr>
+          <a:xfrm>
+            <a:off x="640080" y="2926080"/>
             <a:ext cx="411480" cy="411480"/>
           </a:xfrm>
           <a:prstGeom prst="ellipse">
             <a:avLst/>
           </a:prstGeom>
           <a:solidFill>
-            <a:srgbClr val="1E7A50"/>
+            <a:srgbClr val="2E9E4F"/>
           </a:solidFill>
           <a:ln/>
         </p:spPr>
       </p:sp>
       <p:pic>
         <p:nvPicPr>
-          <p:cNvPr id="11" name="Image 2" descr="icons/check.png">    </p:cNvPr>
+          <p:cNvPr id="9" name="Image 2" descr="icons/check.png">    </p:cNvPr>
           <p:cNvPicPr>
             <a:picLocks noChangeAspect="1"/>
           </p:cNvPicPr>
@@ -6818,7 +6876,7 @@
         </p:blipFill>
         <p:spPr>
           <a:xfrm>
-            <a:off x="747065" y="4084625"/>
+            <a:off x="747065" y="3033065"/>
             <a:ext cx="197510" cy="197510"/>
           </a:xfrm>
           <a:prstGeom prst="rect">
@@ -6828,13 +6886,13 @@
       </p:pic>
       <p:sp>
         <p:nvSpPr>
-          <p:cNvPr id="12" name="Text 7"/>
-          <p:cNvSpPr/>
-          <p:nvPr/>
-        </p:nvSpPr>
-        <p:spPr>
-          <a:xfrm>
-            <a:off x="1234440" y="3904488"/>
+          <p:cNvPr id="10" name="Text 5"/>
+          <p:cNvSpPr/>
+          <p:nvPr/>
+        </p:nvSpPr>
+        <p:spPr>
+          <a:xfrm>
+            <a:off x="1234440" y="2852928"/>
             <a:ext cx="4800600" cy="960120"/>
           </a:xfrm>
           <a:prstGeom prst="rect">
@@ -6862,7 +6920,7 @@
                 <a:ea typeface="Calibri" pitchFamily="34" charset="-122"/>
                 <a:cs typeface="Calibri" pitchFamily="34" charset="-120"/>
               </a:rPr>
-              <a:t>fillna(0)</a:t>
+              <a:t>.str.strip().str.upper()</a:t>
             </a:r>
             <a:endParaRPr lang="en-US" sz="1450" dirty="0"/>
           </a:p>
@@ -6882,7 +6940,7 @@
                 <a:ea typeface="Calibri" pitchFamily="34" charset="-122"/>
                 <a:cs typeface="Calibri" pitchFamily="34" charset="-120"/>
               </a:rPr>
-              <a:t>Les TVA collectées vides deviennent exploitables.</a:t>
+              <a:t>« commerce gal », « COMMERCE GENERAL » → une seule catégorie.</a:t>
             </a:r>
             <a:endParaRPr lang="en-US" sz="1450" dirty="0"/>
           </a:p>
@@ -6890,27 +6948,27 @@
       </p:sp>
       <p:sp>
         <p:nvSpPr>
-          <p:cNvPr id="13" name="Shape 8"/>
-          <p:cNvSpPr/>
-          <p:nvPr/>
-        </p:nvSpPr>
-        <p:spPr>
-          <a:xfrm>
-            <a:off x="640080" y="5029200"/>
+          <p:cNvPr id="11" name="Shape 6"/>
+          <p:cNvSpPr/>
+          <p:nvPr/>
+        </p:nvSpPr>
+        <p:spPr>
+          <a:xfrm>
+            <a:off x="640080" y="3977640"/>
             <a:ext cx="411480" cy="411480"/>
           </a:xfrm>
           <a:prstGeom prst="ellipse">
             <a:avLst/>
           </a:prstGeom>
           <a:solidFill>
-            <a:srgbClr val="1E7A50"/>
+            <a:srgbClr val="2E9E4F"/>
           </a:solidFill>
           <a:ln/>
         </p:spPr>
       </p:sp>
       <p:pic>
         <p:nvPicPr>
-          <p:cNvPr id="14" name="Image 3" descr="icons/check.png">    </p:cNvPr>
+          <p:cNvPr id="12" name="Image 3" descr="icons/check.png">    </p:cNvPr>
           <p:cNvPicPr>
             <a:picLocks noChangeAspect="1"/>
           </p:cNvPicPr>
@@ -6924,7 +6982,7 @@
         </p:blipFill>
         <p:spPr>
           <a:xfrm>
-            <a:off x="747065" y="5136185"/>
+            <a:off x="747065" y="4084625"/>
             <a:ext cx="197510" cy="197510"/>
           </a:xfrm>
           <a:prstGeom prst="rect">
@@ -6934,13 +6992,13 @@
       </p:pic>
       <p:sp>
         <p:nvSpPr>
-          <p:cNvPr id="15" name="Text 9"/>
-          <p:cNvSpPr/>
-          <p:nvPr/>
-        </p:nvSpPr>
-        <p:spPr>
-          <a:xfrm>
-            <a:off x="1234440" y="4956048"/>
+          <p:cNvPr id="13" name="Text 7"/>
+          <p:cNvSpPr/>
+          <p:nvPr/>
+        </p:nvSpPr>
+        <p:spPr>
+          <a:xfrm>
+            <a:off x="1234440" y="3904488"/>
             <a:ext cx="4800600" cy="960120"/>
           </a:xfrm>
           <a:prstGeom prst="rect">
@@ -6968,7 +7026,7 @@
                 <a:ea typeface="Calibri" pitchFamily="34" charset="-122"/>
                 <a:cs typeface="Calibri" pitchFamily="34" charset="-120"/>
               </a:rPr>
-              <a:t>.clip(lower=0)</a:t>
+              <a:t>fillna(0)</a:t>
             </a:r>
             <a:endParaRPr lang="en-US" sz="1450" dirty="0"/>
           </a:p>
@@ -6988,6 +7046,112 @@
                 <a:ea typeface="Calibri" pitchFamily="34" charset="-122"/>
                 <a:cs typeface="Calibri" pitchFamily="34" charset="-120"/>
               </a:rPr>
+              <a:t>Les TVA collectées vides deviennent exploitables.</a:t>
+            </a:r>
+            <a:endParaRPr lang="en-US" sz="1450" dirty="0"/>
+          </a:p>
+        </p:txBody>
+      </p:sp>
+      <p:sp>
+        <p:nvSpPr>
+          <p:cNvPr id="14" name="Shape 8"/>
+          <p:cNvSpPr/>
+          <p:nvPr/>
+        </p:nvSpPr>
+        <p:spPr>
+          <a:xfrm>
+            <a:off x="640080" y="5029200"/>
+            <a:ext cx="411480" cy="411480"/>
+          </a:xfrm>
+          <a:prstGeom prst="ellipse">
+            <a:avLst/>
+          </a:prstGeom>
+          <a:solidFill>
+            <a:srgbClr val="2E9E4F"/>
+          </a:solidFill>
+          <a:ln/>
+        </p:spPr>
+      </p:sp>
+      <p:pic>
+        <p:nvPicPr>
+          <p:cNvPr id="15" name="Image 4" descr="icons/check.png">    </p:cNvPr>
+          <p:cNvPicPr>
+            <a:picLocks noChangeAspect="1"/>
+          </p:cNvPicPr>
+          <p:nvPr/>
+        </p:nvPicPr>
+        <p:blipFill>
+          <a:blip r:embed="rId5"/>
+          <a:stretch>
+            <a:fillRect/>
+          </a:stretch>
+        </p:blipFill>
+        <p:spPr>
+          <a:xfrm>
+            <a:off x="747065" y="5136185"/>
+            <a:ext cx="197510" cy="197510"/>
+          </a:xfrm>
+          <a:prstGeom prst="rect">
+            <a:avLst/>
+          </a:prstGeom>
+        </p:spPr>
+      </p:pic>
+      <p:sp>
+        <p:nvSpPr>
+          <p:cNvPr id="16" name="Text 9"/>
+          <p:cNvSpPr/>
+          <p:nvPr/>
+        </p:nvSpPr>
+        <p:spPr>
+          <a:xfrm>
+            <a:off x="1234440" y="4956048"/>
+            <a:ext cx="4800600" cy="960120"/>
+          </a:xfrm>
+          <a:prstGeom prst="rect">
+            <a:avLst/>
+          </a:prstGeom>
+          <a:noFill/>
+          <a:ln/>
+        </p:spPr>
+        <p:txBody>
+          <a:bodyPr wrap="square" lIns="0" tIns="0" rIns="0" bIns="0" rtlCol="0" anchor="ctr"/>
+          <a:lstStyle/>
+          <a:p>
+            <a:pPr indent="0" marL="0">
+              <a:lnSpc>
+                <a:spcPct val="105000"/>
+              </a:lnSpc>
+              <a:buNone/>
+            </a:pPr>
+            <a:r>
+              <a:rPr lang="en-US" sz="1450" b="1" dirty="0">
+                <a:solidFill>
+                  <a:srgbClr val="1C2A24"/>
+                </a:solidFill>
+                <a:latin typeface="Calibri" pitchFamily="34" charset="0"/>
+                <a:ea typeface="Calibri" pitchFamily="34" charset="-122"/>
+                <a:cs typeface="Calibri" pitchFamily="34" charset="-120"/>
+              </a:rPr>
+              <a:t>.clip(lower=0)</a:t>
+            </a:r>
+            <a:endParaRPr lang="en-US" sz="1450" dirty="0"/>
+          </a:p>
+          <a:p>
+            <a:pPr indent="0" marL="0">
+              <a:lnSpc>
+                <a:spcPct val="105000"/>
+              </a:lnSpc>
+              <a:buNone/>
+            </a:pPr>
+            <a:r>
+              <a:rPr lang="en-US" sz="1250" dirty="0">
+                <a:solidFill>
+                  <a:srgbClr val="5C6B63"/>
+                </a:solidFill>
+                <a:latin typeface="Calibri" pitchFamily="34" charset="0"/>
+                <a:ea typeface="Calibri" pitchFamily="34" charset="-122"/>
+                <a:cs typeface="Calibri" pitchFamily="34" charset="-120"/>
+              </a:rPr>
               <a:t>La TVA nette ne descend jamais sous zéro — comme au module 08.</a:t>
             </a:r>
             <a:endParaRPr lang="en-US" sz="1450" dirty="0"/>
@@ -6996,7 +7160,7 @@
       </p:sp>
       <p:sp>
         <p:nvSpPr>
-          <p:cNvPr id="16" name="Shape 10"/>
+          <p:cNvPr id="17" name="Shape 10"/>
           <p:cNvSpPr/>
           <p:nvPr/>
         </p:nvSpPr>
@@ -7011,14 +7175,14 @@
             </a:avLst>
           </a:prstGeom>
           <a:solidFill>
-            <a:srgbClr val="10241B"/>
+            <a:srgbClr val="0F2418"/>
           </a:solidFill>
           <a:ln/>
         </p:spPr>
       </p:sp>
       <p:sp>
         <p:nvSpPr>
-          <p:cNvPr id="17" name="Shape 11"/>
+          <p:cNvPr id="18" name="Shape 11"/>
           <p:cNvSpPr/>
           <p:nvPr/>
         </p:nvSpPr>
@@ -7038,7 +7202,7 @@
       </p:sp>
       <p:sp>
         <p:nvSpPr>
-          <p:cNvPr id="18" name="Shape 12"/>
+          <p:cNvPr id="19" name="Shape 12"/>
           <p:cNvSpPr/>
           <p:nvPr/>
         </p:nvSpPr>
@@ -7051,14 +7215,14 @@
             <a:avLst/>
           </a:prstGeom>
           <a:solidFill>
-            <a:srgbClr val="C9A227"/>
+            <a:srgbClr val="C79100"/>
           </a:solidFill>
           <a:ln/>
         </p:spPr>
       </p:sp>
       <p:sp>
         <p:nvSpPr>
-          <p:cNvPr id="19" name="Shape 13"/>
+          <p:cNvPr id="20" name="Shape 13"/>
           <p:cNvSpPr/>
           <p:nvPr/>
         </p:nvSpPr>
@@ -7078,7 +7242,7 @@
       </p:sp>
       <p:sp>
         <p:nvSpPr>
-          <p:cNvPr id="20" name="Text 14"/>
+          <p:cNvPr id="21" name="Text 14"/>
           <p:cNvSpPr/>
           <p:nvPr/>
         </p:nvSpPr>
@@ -7117,7 +7281,7 @@
       </p:sp>
       <p:sp>
         <p:nvSpPr>
-          <p:cNvPr id="21" name="Text 15"/>
+          <p:cNvPr id="22" name="Text 15"/>
           <p:cNvSpPr/>
           <p:nvPr/>
         </p:nvSpPr>
@@ -7738,7 +7902,7 @@
         <p:spPr>
           <a:xfrm>
             <a:off x="548640" y="384048"/>
-            <a:ext cx="10972800" cy="320040"/>
+            <a:ext cx="9601200" cy="320040"/>
           </a:xfrm>
           <a:prstGeom prst="rect">
             <a:avLst/>
@@ -7756,7 +7920,7 @@
             <a:r>
               <a:rPr lang="en-US" sz="1300" b="1" spc="200" kern="0" dirty="0">
                 <a:solidFill>
-                  <a:srgbClr val="C9A227"/>
+                  <a:srgbClr val="C79100"/>
                 </a:solidFill>
                 <a:latin typeface="Calibri" pitchFamily="34" charset="0"/>
                 <a:ea typeface="Calibri" pitchFamily="34" charset="-122"/>
@@ -7777,7 +7941,7 @@
         <p:spPr>
           <a:xfrm>
             <a:off x="548640" y="658368"/>
-            <a:ext cx="11064240" cy="731520"/>
+            <a:ext cx="9966960" cy="731520"/>
           </a:xfrm>
           <a:prstGeom prst="rect">
             <a:avLst/>
@@ -7795,7 +7959,7 @@
             <a:r>
               <a:rPr lang="en-US" sz="3400" b="1" dirty="0">
                 <a:solidFill>
-                  <a:srgbClr val="14563C"/>
+                  <a:srgbClr val="0E7A3D"/>
                 </a:solidFill>
                 <a:latin typeface="Cambria" pitchFamily="34" charset="0"/>
                 <a:ea typeface="Cambria" pitchFamily="34" charset="-122"/>
@@ -7807,29 +7971,9 @@
           </a:p>
         </p:txBody>
       </p:sp>
-      <p:sp>
-        <p:nvSpPr>
-          <p:cNvPr id="4" name="Shape 2"/>
-          <p:cNvSpPr/>
-          <p:nvPr/>
-        </p:nvSpPr>
-        <p:spPr>
-          <a:xfrm>
-            <a:off x="640080" y="1874520"/>
-            <a:ext cx="411480" cy="411480"/>
-          </a:xfrm>
-          <a:prstGeom prst="ellipse">
-            <a:avLst/>
-          </a:prstGeom>
-          <a:solidFill>
-            <a:srgbClr val="1E7A50"/>
-          </a:solidFill>
-          <a:ln/>
-        </p:spPr>
-      </p:sp>
       <p:pic>
         <p:nvPicPr>
-          <p:cNvPr id="5" name="Image 0" descr="icons/check.png">    </p:cNvPr>
+          <p:cNvPr id="4" name="Image 0" descr="logo-dgi.png">    </p:cNvPr>
           <p:cNvPicPr>
             <a:picLocks noChangeAspect="1"/>
           </p:cNvPicPr>
@@ -7843,8 +7987,8 @@
         </p:blipFill>
         <p:spPr>
           <a:xfrm>
-            <a:off x="747065" y="1981505"/>
-            <a:ext cx="197510" cy="197510"/>
+            <a:off x="10744200" y="384048"/>
+            <a:ext cx="1051560" cy="795528"/>
           </a:xfrm>
           <a:prstGeom prst="rect">
             <a:avLst/>
@@ -7853,89 +7997,27 @@
       </p:pic>
       <p:sp>
         <p:nvSpPr>
-          <p:cNvPr id="6" name="Text 3"/>
-          <p:cNvSpPr/>
-          <p:nvPr/>
-        </p:nvSpPr>
-        <p:spPr>
-          <a:xfrm>
-            <a:off x="1234440" y="1801368"/>
-            <a:ext cx="4800600" cy="960120"/>
-          </a:xfrm>
-          <a:prstGeom prst="rect">
-            <a:avLst/>
-          </a:prstGeom>
-          <a:noFill/>
-          <a:ln/>
-        </p:spPr>
-        <p:txBody>
-          <a:bodyPr wrap="square" lIns="0" tIns="0" rIns="0" bIns="0" rtlCol="0" anchor="ctr"/>
-          <a:lstStyle/>
-          <a:p>
-            <a:pPr indent="0" marL="0">
-              <a:lnSpc>
-                <a:spcPct val="105000"/>
-              </a:lnSpc>
-              <a:buNone/>
-            </a:pPr>
-            <a:r>
-              <a:rPr lang="en-US" sz="1450" b="1" dirty="0">
-                <a:solidFill>
-                  <a:srgbClr val="1C2A24"/>
-                </a:solidFill>
-                <a:latin typeface="Calibri" pitchFamily="34" charset="0"/>
-                <a:ea typeface="Calibri" pitchFamily="34" charset="-122"/>
-                <a:cs typeface="Calibri" pitchFamily="34" charset="-120"/>
-              </a:rPr>
-              <a:t>groupby = le comptage du J2</a:t>
-            </a:r>
-            <a:endParaRPr lang="en-US" sz="1450" dirty="0"/>
-          </a:p>
-          <a:p>
-            <a:pPr indent="0" marL="0">
-              <a:lnSpc>
-                <a:spcPct val="105000"/>
-              </a:lnSpc>
-              <a:buNone/>
-            </a:pPr>
-            <a:r>
-              <a:rPr lang="en-US" sz="1250" dirty="0">
-                <a:solidFill>
-                  <a:srgbClr val="5C6B63"/>
-                </a:solidFill>
-                <a:latin typeface="Calibri" pitchFamily="34" charset="0"/>
-                <a:ea typeface="Calibri" pitchFamily="34" charset="-122"/>
-                <a:cs typeface="Calibri" pitchFamily="34" charset="-120"/>
-              </a:rPr>
-              <a:t>compte.get(k, 0) + 1 devient .groupby("region").sum().</a:t>
-            </a:r>
-            <a:endParaRPr lang="en-US" sz="1450" dirty="0"/>
-          </a:p>
-        </p:txBody>
-      </p:sp>
-      <p:sp>
-        <p:nvSpPr>
-          <p:cNvPr id="7" name="Shape 4"/>
-          <p:cNvSpPr/>
-          <p:nvPr/>
-        </p:nvSpPr>
-        <p:spPr>
-          <a:xfrm>
-            <a:off x="640080" y="2926080"/>
+          <p:cNvPr id="5" name="Shape 2"/>
+          <p:cNvSpPr/>
+          <p:nvPr/>
+        </p:nvSpPr>
+        <p:spPr>
+          <a:xfrm>
+            <a:off x="640080" y="1874520"/>
             <a:ext cx="411480" cy="411480"/>
           </a:xfrm>
           <a:prstGeom prst="ellipse">
             <a:avLst/>
           </a:prstGeom>
           <a:solidFill>
-            <a:srgbClr val="1E7A50"/>
+            <a:srgbClr val="2E9E4F"/>
           </a:solidFill>
           <a:ln/>
         </p:spPr>
       </p:sp>
       <p:pic>
         <p:nvPicPr>
-          <p:cNvPr id="8" name="Image 1" descr="icons/check.png">    </p:cNvPr>
+          <p:cNvPr id="6" name="Image 1" descr="icons/check.png">    </p:cNvPr>
           <p:cNvPicPr>
             <a:picLocks noChangeAspect="1"/>
           </p:cNvPicPr>
@@ -7949,7 +8031,7 @@
         </p:blipFill>
         <p:spPr>
           <a:xfrm>
-            <a:off x="747065" y="3033065"/>
+            <a:off x="747065" y="1981505"/>
             <a:ext cx="197510" cy="197510"/>
           </a:xfrm>
           <a:prstGeom prst="rect">
@@ -7959,13 +8041,13 @@
       </p:pic>
       <p:sp>
         <p:nvSpPr>
-          <p:cNvPr id="9" name="Text 5"/>
-          <p:cNvSpPr/>
-          <p:nvPr/>
-        </p:nvSpPr>
-        <p:spPr>
-          <a:xfrm>
-            <a:off x="1234440" y="2852928"/>
+          <p:cNvPr id="7" name="Text 3"/>
+          <p:cNvSpPr/>
+          <p:nvPr/>
+        </p:nvSpPr>
+        <p:spPr>
+          <a:xfrm>
+            <a:off x="1234440" y="1801368"/>
             <a:ext cx="4800600" cy="960120"/>
           </a:xfrm>
           <a:prstGeom prst="rect">
@@ -7993,7 +8075,7 @@
                 <a:ea typeface="Calibri" pitchFamily="34" charset="-122"/>
                 <a:cs typeface="Calibri" pitchFamily="34" charset="-120"/>
               </a:rPr>
-              <a:t>merge = la jointure</a:t>
+              <a:t>groupby = le comptage du J2</a:t>
             </a:r>
             <a:endParaRPr lang="en-US" sz="1450" dirty="0"/>
           </a:p>
@@ -8013,7 +8095,7 @@
                 <a:ea typeface="Calibri" pitchFamily="34" charset="-122"/>
                 <a:cs typeface="Calibri" pitchFamily="34" charset="-120"/>
               </a:rPr>
-              <a:t>déclarations ← contribuables (sur nif) ← régions (sur code).</a:t>
+              <a:t>compte.get(k, 0) + 1 devient .groupby("region").sum().</a:t>
             </a:r>
             <a:endParaRPr lang="en-US" sz="1450" dirty="0"/>
           </a:p>
@@ -8021,27 +8103,27 @@
       </p:sp>
       <p:sp>
         <p:nvSpPr>
-          <p:cNvPr id="10" name="Shape 6"/>
-          <p:cNvSpPr/>
-          <p:nvPr/>
-        </p:nvSpPr>
-        <p:spPr>
-          <a:xfrm>
-            <a:off x="640080" y="3977640"/>
+          <p:cNvPr id="8" name="Shape 4"/>
+          <p:cNvSpPr/>
+          <p:nvPr/>
+        </p:nvSpPr>
+        <p:spPr>
+          <a:xfrm>
+            <a:off x="640080" y="2926080"/>
             <a:ext cx="411480" cy="411480"/>
           </a:xfrm>
           <a:prstGeom prst="ellipse">
             <a:avLst/>
           </a:prstGeom>
           <a:solidFill>
-            <a:srgbClr val="1E7A50"/>
+            <a:srgbClr val="2E9E4F"/>
           </a:solidFill>
           <a:ln/>
         </p:spPr>
       </p:sp>
       <p:pic>
         <p:nvPicPr>
-          <p:cNvPr id="11" name="Image 2" descr="icons/check.png">    </p:cNvPr>
+          <p:cNvPr id="9" name="Image 2" descr="icons/check.png">    </p:cNvPr>
           <p:cNvPicPr>
             <a:picLocks noChangeAspect="1"/>
           </p:cNvPicPr>
@@ -8055,7 +8137,7 @@
         </p:blipFill>
         <p:spPr>
           <a:xfrm>
-            <a:off x="747065" y="4084625"/>
+            <a:off x="747065" y="3033065"/>
             <a:ext cx="197510" cy="197510"/>
           </a:xfrm>
           <a:prstGeom prst="rect">
@@ -8065,13 +8147,13 @@
       </p:pic>
       <p:sp>
         <p:nvSpPr>
-          <p:cNvPr id="12" name="Text 7"/>
-          <p:cNvSpPr/>
-          <p:nvPr/>
-        </p:nvSpPr>
-        <p:spPr>
-          <a:xfrm>
-            <a:off x="1234440" y="3904488"/>
+          <p:cNvPr id="10" name="Text 5"/>
+          <p:cNvSpPr/>
+          <p:nvPr/>
+        </p:nvSpPr>
+        <p:spPr>
+          <a:xfrm>
+            <a:off x="1234440" y="2852928"/>
             <a:ext cx="4800600" cy="960120"/>
           </a:xfrm>
           <a:prstGeom prst="rect">
@@ -8099,7 +8181,7 @@
                 <a:ea typeface="Calibri" pitchFamily="34" charset="-122"/>
                 <a:cs typeface="Calibri" pitchFamily="34" charset="-120"/>
               </a:rPr>
-              <a:t>how="left" révèle les orphelins</a:t>
+              <a:t>merge = la jointure</a:t>
             </a:r>
             <a:endParaRPr lang="en-US" sz="1450" dirty="0"/>
           </a:p>
@@ -8119,7 +8201,7 @@
                 <a:ea typeface="Calibri" pitchFamily="34" charset="-122"/>
                 <a:cs typeface="Calibri" pitchFamily="34" charset="-120"/>
               </a:rPr>
-              <a:t>raison_sociale manquante = déclaration sans contribuable.</a:t>
+              <a:t>déclarations ← contribuables (sur nif) ← régions (sur code).</a:t>
             </a:r>
             <a:endParaRPr lang="en-US" sz="1450" dirty="0"/>
           </a:p>
@@ -8127,27 +8209,27 @@
       </p:sp>
       <p:sp>
         <p:nvSpPr>
-          <p:cNvPr id="13" name="Shape 8"/>
-          <p:cNvSpPr/>
-          <p:nvPr/>
-        </p:nvSpPr>
-        <p:spPr>
-          <a:xfrm>
-            <a:off x="640080" y="5029200"/>
+          <p:cNvPr id="11" name="Shape 6"/>
+          <p:cNvSpPr/>
+          <p:nvPr/>
+        </p:nvSpPr>
+        <p:spPr>
+          <a:xfrm>
+            <a:off x="640080" y="3977640"/>
             <a:ext cx="411480" cy="411480"/>
           </a:xfrm>
           <a:prstGeom prst="ellipse">
             <a:avLst/>
           </a:prstGeom>
           <a:solidFill>
-            <a:srgbClr val="1E7A50"/>
+            <a:srgbClr val="2E9E4F"/>
           </a:solidFill>
           <a:ln/>
         </p:spPr>
       </p:sp>
       <p:pic>
         <p:nvPicPr>
-          <p:cNvPr id="14" name="Image 3" descr="icons/check.png">    </p:cNvPr>
+          <p:cNvPr id="12" name="Image 3" descr="icons/check.png">    </p:cNvPr>
           <p:cNvPicPr>
             <a:picLocks noChangeAspect="1"/>
           </p:cNvPicPr>
@@ -8161,7 +8243,7 @@
         </p:blipFill>
         <p:spPr>
           <a:xfrm>
-            <a:off x="747065" y="5136185"/>
+            <a:off x="747065" y="4084625"/>
             <a:ext cx="197510" cy="197510"/>
           </a:xfrm>
           <a:prstGeom prst="rect">
@@ -8171,13 +8253,13 @@
       </p:pic>
       <p:sp>
         <p:nvSpPr>
-          <p:cNvPr id="15" name="Text 9"/>
-          <p:cNvSpPr/>
-          <p:nvPr/>
-        </p:nvSpPr>
-        <p:spPr>
-          <a:xfrm>
-            <a:off x="1234440" y="4956048"/>
+          <p:cNvPr id="13" name="Text 7"/>
+          <p:cNvSpPr/>
+          <p:nvPr/>
+        </p:nvSpPr>
+        <p:spPr>
+          <a:xfrm>
+            <a:off x="1234440" y="3904488"/>
             <a:ext cx="4800600" cy="960120"/>
           </a:xfrm>
           <a:prstGeom prst="rect">
@@ -8205,7 +8287,7 @@
                 <a:ea typeface="Calibri" pitchFamily="34" charset="-122"/>
                 <a:cs typeface="Calibri" pitchFamily="34" charset="-120"/>
               </a:rPr>
-              <a:t>Export en une ligne</a:t>
+              <a:t>how="left" révèle les orphelins</a:t>
             </a:r>
             <a:endParaRPr lang="en-US" sz="1450" dirty="0"/>
           </a:p>
@@ -8225,6 +8307,112 @@
                 <a:ea typeface="Calibri" pitchFamily="34" charset="-122"/>
                 <a:cs typeface="Calibri" pitchFamily="34" charset="-120"/>
               </a:rPr>
+              <a:t>raison_sociale manquante = déclaration sans contribuable.</a:t>
+            </a:r>
+            <a:endParaRPr lang="en-US" sz="1450" dirty="0"/>
+          </a:p>
+        </p:txBody>
+      </p:sp>
+      <p:sp>
+        <p:nvSpPr>
+          <p:cNvPr id="14" name="Shape 8"/>
+          <p:cNvSpPr/>
+          <p:nvPr/>
+        </p:nvSpPr>
+        <p:spPr>
+          <a:xfrm>
+            <a:off x="640080" y="5029200"/>
+            <a:ext cx="411480" cy="411480"/>
+          </a:xfrm>
+          <a:prstGeom prst="ellipse">
+            <a:avLst/>
+          </a:prstGeom>
+          <a:solidFill>
+            <a:srgbClr val="2E9E4F"/>
+          </a:solidFill>
+          <a:ln/>
+        </p:spPr>
+      </p:sp>
+      <p:pic>
+        <p:nvPicPr>
+          <p:cNvPr id="15" name="Image 4" descr="icons/check.png">    </p:cNvPr>
+          <p:cNvPicPr>
+            <a:picLocks noChangeAspect="1"/>
+          </p:cNvPicPr>
+          <p:nvPr/>
+        </p:nvPicPr>
+        <p:blipFill>
+          <a:blip r:embed="rId5"/>
+          <a:stretch>
+            <a:fillRect/>
+          </a:stretch>
+        </p:blipFill>
+        <p:spPr>
+          <a:xfrm>
+            <a:off x="747065" y="5136185"/>
+            <a:ext cx="197510" cy="197510"/>
+          </a:xfrm>
+          <a:prstGeom prst="rect">
+            <a:avLst/>
+          </a:prstGeom>
+        </p:spPr>
+      </p:pic>
+      <p:sp>
+        <p:nvSpPr>
+          <p:cNvPr id="16" name="Text 9"/>
+          <p:cNvSpPr/>
+          <p:nvPr/>
+        </p:nvSpPr>
+        <p:spPr>
+          <a:xfrm>
+            <a:off x="1234440" y="4956048"/>
+            <a:ext cx="4800600" cy="960120"/>
+          </a:xfrm>
+          <a:prstGeom prst="rect">
+            <a:avLst/>
+          </a:prstGeom>
+          <a:noFill/>
+          <a:ln/>
+        </p:spPr>
+        <p:txBody>
+          <a:bodyPr wrap="square" lIns="0" tIns="0" rIns="0" bIns="0" rtlCol="0" anchor="ctr"/>
+          <a:lstStyle/>
+          <a:p>
+            <a:pPr indent="0" marL="0">
+              <a:lnSpc>
+                <a:spcPct val="105000"/>
+              </a:lnSpc>
+              <a:buNone/>
+            </a:pPr>
+            <a:r>
+              <a:rPr lang="en-US" sz="1450" b="1" dirty="0">
+                <a:solidFill>
+                  <a:srgbClr val="1C2A24"/>
+                </a:solidFill>
+                <a:latin typeface="Calibri" pitchFamily="34" charset="0"/>
+                <a:ea typeface="Calibri" pitchFamily="34" charset="-122"/>
+                <a:cs typeface="Calibri" pitchFamily="34" charset="-120"/>
+              </a:rPr>
+              <a:t>Export en une ligne</a:t>
+            </a:r>
+            <a:endParaRPr lang="en-US" sz="1450" dirty="0"/>
+          </a:p>
+          <a:p>
+            <a:pPr indent="0" marL="0">
+              <a:lnSpc>
+                <a:spcPct val="105000"/>
+              </a:lnSpc>
+              <a:buNone/>
+            </a:pPr>
+            <a:r>
+              <a:rPr lang="en-US" sz="1250" dirty="0">
+                <a:solidFill>
+                  <a:srgbClr val="5C6B63"/>
+                </a:solidFill>
+                <a:latin typeface="Calibri" pitchFamily="34" charset="0"/>
+                <a:ea typeface="Calibri" pitchFamily="34" charset="-122"/>
+                <a:cs typeface="Calibri" pitchFamily="34" charset="-120"/>
+              </a:rPr>
               <a:t>to_csv, to_excel : le rapport part chez le destinataire.</a:t>
             </a:r>
             <a:endParaRPr lang="en-US" sz="1450" dirty="0"/>
@@ -8233,7 +8421,7 @@
       </p:sp>
       <p:sp>
         <p:nvSpPr>
-          <p:cNvPr id="16" name="Shape 10"/>
+          <p:cNvPr id="17" name="Shape 10"/>
           <p:cNvSpPr/>
           <p:nvPr/>
         </p:nvSpPr>
@@ -8248,14 +8436,14 @@
             </a:avLst>
           </a:prstGeom>
           <a:solidFill>
-            <a:srgbClr val="10241B"/>
+            <a:srgbClr val="0F2418"/>
           </a:solidFill>
           <a:ln/>
         </p:spPr>
       </p:sp>
       <p:sp>
         <p:nvSpPr>
-          <p:cNvPr id="17" name="Shape 11"/>
+          <p:cNvPr id="18" name="Shape 11"/>
           <p:cNvSpPr/>
           <p:nvPr/>
         </p:nvSpPr>
@@ -8275,7 +8463,7 @@
       </p:sp>
       <p:sp>
         <p:nvSpPr>
-          <p:cNvPr id="18" name="Shape 12"/>
+          <p:cNvPr id="19" name="Shape 12"/>
           <p:cNvSpPr/>
           <p:nvPr/>
         </p:nvSpPr>
@@ -8288,14 +8476,14 @@
             <a:avLst/>
           </a:prstGeom>
           <a:solidFill>
-            <a:srgbClr val="C9A227"/>
+            <a:srgbClr val="C79100"/>
           </a:solidFill>
           <a:ln/>
         </p:spPr>
       </p:sp>
       <p:sp>
         <p:nvSpPr>
-          <p:cNvPr id="19" name="Shape 13"/>
+          <p:cNvPr id="20" name="Shape 13"/>
           <p:cNvSpPr/>
           <p:nvPr/>
         </p:nvSpPr>
@@ -8315,7 +8503,7 @@
       </p:sp>
       <p:sp>
         <p:nvSpPr>
-          <p:cNvPr id="20" name="Text 14"/>
+          <p:cNvPr id="21" name="Text 14"/>
           <p:cNvSpPr/>
           <p:nvPr/>
         </p:nvSpPr>
@@ -8354,7 +8542,7 @@
       </p:sp>
       <p:sp>
         <p:nvSpPr>
-          <p:cNvPr id="21" name="Text 15"/>
+          <p:cNvPr id="22" name="Text 15"/>
           <p:cNvSpPr/>
           <p:nvPr/>
         </p:nvSpPr>
@@ -8806,7 +8994,7 @@
                 <a:ea typeface="Courier New" pitchFamily="34" charset="-122"/>
                 <a:cs typeface="Courier New" pitchFamily="34" charset="-120"/>
               </a:rPr>
-              <a:t>Nzérékoré    6.84e+09</a:t>
+              <a:t>Gabú         6.84e+09</a:t>
             </a:r>
             <a:endParaRPr lang="en-US" sz="1250" dirty="0"/>
           </a:p>
@@ -8826,7 +9014,7 @@
                 <a:ea typeface="Courier New" pitchFamily="34" charset="-122"/>
                 <a:cs typeface="Courier New" pitchFamily="34" charset="-120"/>
               </a:rPr>
-              <a:t>Kankan       6.82e+09  …</a:t>
+              <a:t>Oio          6.82e+09  …</a:t>
             </a:r>
             <a:endParaRPr lang="en-US" sz="1250" dirty="0"/>
           </a:p>
@@ -8873,7 +9061,7 @@
         <p:spPr>
           <a:xfrm>
             <a:off x="548640" y="384048"/>
-            <a:ext cx="10972800" cy="320040"/>
+            <a:ext cx="9601200" cy="320040"/>
           </a:xfrm>
           <a:prstGeom prst="rect">
             <a:avLst/>
@@ -8891,7 +9079,7 @@
             <a:r>
               <a:rPr lang="en-US" sz="1300" b="1" spc="200" kern="0" dirty="0">
                 <a:solidFill>
-                  <a:srgbClr val="C9A227"/>
+                  <a:srgbClr val="C79100"/>
                 </a:solidFill>
                 <a:latin typeface="Calibri" pitchFamily="34" charset="0"/>
                 <a:ea typeface="Calibri" pitchFamily="34" charset="-122"/>
@@ -8912,7 +9100,7 @@
         <p:spPr>
           <a:xfrm>
             <a:off x="548640" y="658368"/>
-            <a:ext cx="11064240" cy="731520"/>
+            <a:ext cx="9966960" cy="731520"/>
           </a:xfrm>
           <a:prstGeom prst="rect">
             <a:avLst/>
@@ -8930,7 +9118,7 @@
             <a:r>
               <a:rPr lang="en-US" sz="3400" b="1" dirty="0">
                 <a:solidFill>
-                  <a:srgbClr val="14563C"/>
+                  <a:srgbClr val="0E7A3D"/>
                 </a:solidFill>
                 <a:latin typeface="Cambria" pitchFamily="34" charset="0"/>
                 <a:ea typeface="Cambria" pitchFamily="34" charset="-122"/>
@@ -8942,9 +9130,33 @@
           </a:p>
         </p:txBody>
       </p:sp>
-      <p:sp>
-        <p:nvSpPr>
-          <p:cNvPr id="4" name="Shape 2"/>
+      <p:pic>
+        <p:nvPicPr>
+          <p:cNvPr id="4" name="Image 0" descr="logo-dgi.png">    </p:cNvPr>
+          <p:cNvPicPr>
+            <a:picLocks noChangeAspect="1"/>
+          </p:cNvPicPr>
+          <p:nvPr/>
+        </p:nvPicPr>
+        <p:blipFill>
+          <a:blip r:embed="rId1"/>
+          <a:stretch>
+            <a:fillRect/>
+          </a:stretch>
+        </p:blipFill>
+        <p:spPr>
+          <a:xfrm>
+            <a:off x="10744200" y="384048"/>
+            <a:ext cx="1051560" cy="795528"/>
+          </a:xfrm>
+          <a:prstGeom prst="rect">
+            <a:avLst/>
+          </a:prstGeom>
+        </p:spPr>
+      </p:pic>
+      <p:sp>
+        <p:nvSpPr>
+          <p:cNvPr id="5" name="Shape 2"/>
           <p:cNvSpPr/>
           <p:nvPr/>
         </p:nvSpPr>
@@ -8959,14 +9171,14 @@
             </a:avLst>
           </a:prstGeom>
           <a:solidFill>
-            <a:srgbClr val="EEF4F0"/>
+            <a:srgbClr val="EEF5EF"/>
           </a:solidFill>
           <a:ln/>
         </p:spPr>
       </p:sp>
       <p:sp>
         <p:nvSpPr>
-          <p:cNvPr id="5" name="Text 3"/>
+          <p:cNvPr id="6" name="Text 3"/>
           <p:cNvSpPr/>
           <p:nvPr/>
         </p:nvSpPr>
@@ -8991,7 +9203,7 @@
             <a:r>
               <a:rPr lang="en-US" sz="1550" b="1" dirty="0">
                 <a:solidFill>
-                  <a:srgbClr val="14563C"/>
+                  <a:srgbClr val="0E7A3D"/>
                 </a:solidFill>
                 <a:latin typeface="Calibri" pitchFamily="34" charset="0"/>
                 <a:ea typeface="Calibri" pitchFamily="34" charset="-122"/>
@@ -9005,7 +9217,7 @@
       </p:sp>
       <p:sp>
         <p:nvSpPr>
-          <p:cNvPr id="6" name="Text 4"/>
+          <p:cNvPr id="7" name="Text 4"/>
           <p:cNvSpPr/>
           <p:nvPr/>
         </p:nvSpPr>
@@ -9044,7 +9256,7 @@
       </p:sp>
       <p:sp>
         <p:nvSpPr>
-          <p:cNvPr id="7" name="Shape 5"/>
+          <p:cNvPr id="8" name="Shape 5"/>
           <p:cNvSpPr/>
           <p:nvPr/>
         </p:nvSpPr>
@@ -9059,14 +9271,14 @@
             </a:avLst>
           </a:prstGeom>
           <a:solidFill>
-            <a:srgbClr val="EEF4F0"/>
+            <a:srgbClr val="EEF5EF"/>
           </a:solidFill>
           <a:ln/>
         </p:spPr>
       </p:sp>
       <p:sp>
         <p:nvSpPr>
-          <p:cNvPr id="8" name="Text 6"/>
+          <p:cNvPr id="9" name="Text 6"/>
           <p:cNvSpPr/>
           <p:nvPr/>
         </p:nvSpPr>
@@ -9091,7 +9303,7 @@
             <a:r>
               <a:rPr lang="en-US" sz="1550" b="1" dirty="0">
                 <a:solidFill>
-                  <a:srgbClr val="14563C"/>
+                  <a:srgbClr val="0E7A3D"/>
                 </a:solidFill>
                 <a:latin typeface="Calibri" pitchFamily="34" charset="0"/>
                 <a:ea typeface="Calibri" pitchFamily="34" charset="-122"/>
@@ -9105,7 +9317,7 @@
       </p:sp>
       <p:sp>
         <p:nvSpPr>
-          <p:cNvPr id="9" name="Text 7"/>
+          <p:cNvPr id="10" name="Text 7"/>
           <p:cNvSpPr/>
           <p:nvPr/>
         </p:nvSpPr>
@@ -9144,7 +9356,7 @@
       </p:sp>
       <p:sp>
         <p:nvSpPr>
-          <p:cNvPr id="10" name="Shape 8"/>
+          <p:cNvPr id="11" name="Shape 8"/>
           <p:cNvSpPr/>
           <p:nvPr/>
         </p:nvSpPr>
@@ -9159,14 +9371,14 @@
             </a:avLst>
           </a:prstGeom>
           <a:solidFill>
-            <a:srgbClr val="EEF4F0"/>
+            <a:srgbClr val="EEF5EF"/>
           </a:solidFill>
           <a:ln/>
         </p:spPr>
       </p:sp>
       <p:sp>
         <p:nvSpPr>
-          <p:cNvPr id="11" name="Text 9"/>
+          <p:cNvPr id="12" name="Text 9"/>
           <p:cNvSpPr/>
           <p:nvPr/>
         </p:nvSpPr>
@@ -9191,7 +9403,7 @@
             <a:r>
               <a:rPr lang="en-US" sz="1550" b="1" dirty="0">
                 <a:solidFill>
-                  <a:srgbClr val="14563C"/>
+                  <a:srgbClr val="0E7A3D"/>
                 </a:solidFill>
                 <a:latin typeface="Calibri" pitchFamily="34" charset="0"/>
                 <a:ea typeface="Calibri" pitchFamily="34" charset="-122"/>
@@ -9205,7 +9417,7 @@
       </p:sp>
       <p:sp>
         <p:nvSpPr>
-          <p:cNvPr id="12" name="Text 10"/>
+          <p:cNvPr id="13" name="Text 10"/>
           <p:cNvSpPr/>
           <p:nvPr/>
         </p:nvSpPr>
@@ -9244,7 +9456,7 @@
       </p:sp>
       <p:sp>
         <p:nvSpPr>
-          <p:cNvPr id="13" name="Shape 11"/>
+          <p:cNvPr id="14" name="Shape 11"/>
           <p:cNvSpPr/>
           <p:nvPr/>
         </p:nvSpPr>
@@ -9259,14 +9471,14 @@
             </a:avLst>
           </a:prstGeom>
           <a:solidFill>
-            <a:srgbClr val="EEF4F0"/>
+            <a:srgbClr val="EEF5EF"/>
           </a:solidFill>
           <a:ln/>
         </p:spPr>
       </p:sp>
       <p:sp>
         <p:nvSpPr>
-          <p:cNvPr id="14" name="Text 12"/>
+          <p:cNvPr id="15" name="Text 12"/>
           <p:cNvSpPr/>
           <p:nvPr/>
         </p:nvSpPr>
@@ -9291,7 +9503,7 @@
             <a:r>
               <a:rPr lang="en-US" sz="1550" b="1" dirty="0">
                 <a:solidFill>
-                  <a:srgbClr val="14563C"/>
+                  <a:srgbClr val="0E7A3D"/>
                 </a:solidFill>
                 <a:latin typeface="Calibri" pitchFamily="34" charset="0"/>
                 <a:ea typeface="Calibri" pitchFamily="34" charset="-122"/>
@@ -9305,7 +9517,7 @@
       </p:sp>
       <p:sp>
         <p:nvSpPr>
-          <p:cNvPr id="15" name="Text 13"/>
+          <p:cNvPr id="16" name="Text 13"/>
           <p:cNvSpPr/>
           <p:nvPr/>
         </p:nvSpPr>
@@ -9344,7 +9556,7 @@
       </p:sp>
       <p:sp>
         <p:nvSpPr>
-          <p:cNvPr id="16" name="Shape 14"/>
+          <p:cNvPr id="17" name="Shape 14"/>
           <p:cNvSpPr/>
           <p:nvPr/>
         </p:nvSpPr>
@@ -9359,14 +9571,14 @@
             </a:avLst>
           </a:prstGeom>
           <a:solidFill>
-            <a:srgbClr val="EEF4F0"/>
+            <a:srgbClr val="EEF5EF"/>
           </a:solidFill>
           <a:ln/>
         </p:spPr>
       </p:sp>
       <p:sp>
         <p:nvSpPr>
-          <p:cNvPr id="17" name="Text 15"/>
+          <p:cNvPr id="18" name="Text 15"/>
           <p:cNvSpPr/>
           <p:nvPr/>
         </p:nvSpPr>
@@ -9391,7 +9603,7 @@
             <a:r>
               <a:rPr lang="en-US" sz="1550" b="1" dirty="0">
                 <a:solidFill>
-                  <a:srgbClr val="14563C"/>
+                  <a:srgbClr val="0E7A3D"/>
                 </a:solidFill>
                 <a:latin typeface="Calibri" pitchFamily="34" charset="0"/>
                 <a:ea typeface="Calibri" pitchFamily="34" charset="-122"/>
@@ -9405,7 +9617,7 @@
       </p:sp>
       <p:sp>
         <p:nvSpPr>
-          <p:cNvPr id="18" name="Text 16"/>
+          <p:cNvPr id="19" name="Text 16"/>
           <p:cNvSpPr/>
           <p:nvPr/>
         </p:nvSpPr>
@@ -9444,7 +9656,7 @@
       </p:sp>
       <p:sp>
         <p:nvSpPr>
-          <p:cNvPr id="19" name="Text 17"/>
+          <p:cNvPr id="20" name="Text 17"/>
           <p:cNvSpPr/>
           <p:nvPr/>
         </p:nvSpPr>
@@ -9469,7 +9681,7 @@
             <a:r>
               <a:rPr lang="en-US" sz="1250" i="1" dirty="0">
                 <a:solidFill>
-                  <a:srgbClr val="14563C"/>
+                  <a:srgbClr val="0E7A3D"/>
                 </a:solidFill>
                 <a:latin typeface="Calibri" pitchFamily="34" charset="0"/>
                 <a:ea typeface="Calibri" pitchFamily="34" charset="-122"/>
@@ -9522,7 +9734,7 @@
         <p:spPr>
           <a:xfrm>
             <a:off x="548640" y="384048"/>
-            <a:ext cx="10972800" cy="320040"/>
+            <a:ext cx="9601200" cy="320040"/>
           </a:xfrm>
           <a:prstGeom prst="rect">
             <a:avLst/>
@@ -9540,7 +9752,7 @@
             <a:r>
               <a:rPr lang="en-US" sz="1300" b="1" spc="200" kern="0" dirty="0">
                 <a:solidFill>
-                  <a:srgbClr val="C9A227"/>
+                  <a:srgbClr val="C79100"/>
                 </a:solidFill>
                 <a:latin typeface="Calibri" pitchFamily="34" charset="0"/>
                 <a:ea typeface="Calibri" pitchFamily="34" charset="-122"/>
@@ -9561,7 +9773,7 @@
         <p:spPr>
           <a:xfrm>
             <a:off x="548640" y="658368"/>
-            <a:ext cx="11064240" cy="731520"/>
+            <a:ext cx="9966960" cy="731520"/>
           </a:xfrm>
           <a:prstGeom prst="rect">
             <a:avLst/>
@@ -9579,7 +9791,7 @@
             <a:r>
               <a:rPr lang="en-US" sz="3400" b="1" dirty="0">
                 <a:solidFill>
-                  <a:srgbClr val="14563C"/>
+                  <a:srgbClr val="0E7A3D"/>
                 </a:solidFill>
                 <a:latin typeface="Cambria" pitchFamily="34" charset="0"/>
                 <a:ea typeface="Cambria" pitchFamily="34" charset="-122"/>
@@ -9591,51 +9803,9 @@
           </a:p>
         </p:txBody>
       </p:sp>
-      <p:sp>
-        <p:nvSpPr>
-          <p:cNvPr id="4" name="Shape 2"/>
-          <p:cNvSpPr/>
-          <p:nvPr/>
-        </p:nvSpPr>
-        <p:spPr>
-          <a:xfrm>
-            <a:off x="640080" y="1920240"/>
-            <a:ext cx="2651760" cy="3108960"/>
-          </a:xfrm>
-          <a:prstGeom prst="roundRect">
-            <a:avLst>
-              <a:gd name="adj" fmla="val 3448"/>
-            </a:avLst>
-          </a:prstGeom>
-          <a:solidFill>
-            <a:srgbClr val="EEF4F0"/>
-          </a:solidFill>
-          <a:ln/>
-        </p:spPr>
-      </p:sp>
-      <p:sp>
-        <p:nvSpPr>
-          <p:cNvPr id="5" name="Shape 3"/>
-          <p:cNvSpPr/>
-          <p:nvPr/>
-        </p:nvSpPr>
-        <p:spPr>
-          <a:xfrm>
-            <a:off x="896112" y="2176272"/>
-            <a:ext cx="512064" cy="512064"/>
-          </a:xfrm>
-          <a:prstGeom prst="ellipse">
-            <a:avLst/>
-          </a:prstGeom>
-          <a:solidFill>
-            <a:srgbClr val="C9A227"/>
-          </a:solidFill>
-          <a:ln/>
-        </p:spPr>
-      </p:sp>
       <p:pic>
         <p:nvPicPr>
-          <p:cNvPr id="6" name="Image 0" descr="icons/flag.png">    </p:cNvPr>
+          <p:cNvPr id="4" name="Image 0" descr="logo-dgi.png">    </p:cNvPr>
           <p:cNvPicPr>
             <a:picLocks noChangeAspect="1"/>
           </p:cNvPicPr>
@@ -9649,8 +9819,8 @@
         </p:blipFill>
         <p:spPr>
           <a:xfrm>
-            <a:off x="1029249" y="2309409"/>
-            <a:ext cx="245791" cy="245791"/>
+            <a:off x="10744200" y="384048"/>
+            <a:ext cx="1051560" cy="795528"/>
           </a:xfrm>
           <a:prstGeom prst="rect">
             <a:avLst/>
@@ -9659,94 +9829,13 @@
       </p:pic>
       <p:sp>
         <p:nvSpPr>
-          <p:cNvPr id="7" name="Text 4"/>
-          <p:cNvSpPr/>
-          <p:nvPr/>
-        </p:nvSpPr>
-        <p:spPr>
-          <a:xfrm>
-            <a:off x="896112" y="2880360"/>
-            <a:ext cx="2194560" cy="365760"/>
-          </a:xfrm>
-          <a:prstGeom prst="rect">
-            <a:avLst/>
-          </a:prstGeom>
-          <a:noFill/>
-          <a:ln/>
-        </p:spPr>
-        <p:txBody>
-          <a:bodyPr wrap="square" lIns="0" tIns="0" rIns="0" bIns="0" rtlCol="0" anchor="ctr"/>
-          <a:lstStyle/>
-          <a:p>
-            <a:pPr indent="0" marL="0">
-              <a:buNone/>
-            </a:pPr>
-            <a:r>
-              <a:rPr lang="en-US" sz="1600" b="1" dirty="0">
-                <a:solidFill>
-                  <a:srgbClr val="14563C"/>
-                </a:solidFill>
-                <a:latin typeface="Calibri" pitchFamily="34" charset="0"/>
-                <a:ea typeface="Calibri" pitchFamily="34" charset="-122"/>
-                <a:cs typeface="Calibri" pitchFamily="34" charset="-120"/>
-              </a:rPr>
-              <a:t>J4 midi</a:t>
-            </a:r>
-            <a:endParaRPr lang="en-US" sz="1600" dirty="0"/>
-          </a:p>
-        </p:txBody>
-      </p:sp>
-      <p:sp>
-        <p:nvSpPr>
-          <p:cNvPr id="8" name="Text 5"/>
-          <p:cNvSpPr/>
-          <p:nvPr/>
-        </p:nvSpPr>
-        <p:spPr>
-          <a:xfrm>
-            <a:off x="896112" y="3291840"/>
-            <a:ext cx="2148840" cy="1554480"/>
-          </a:xfrm>
-          <a:prstGeom prst="rect">
-            <a:avLst/>
-          </a:prstGeom>
-          <a:noFill/>
-          <a:ln/>
-        </p:spPr>
-        <p:txBody>
-          <a:bodyPr wrap="square" lIns="0" tIns="0" rIns="0" bIns="0" rtlCol="0" anchor="t"/>
-          <a:lstStyle/>
-          <a:p>
-            <a:pPr indent="0" marL="0">
-              <a:lnSpc>
-                <a:spcPct val="112000"/>
-              </a:lnSpc>
-              <a:buNone/>
-            </a:pPr>
-            <a:r>
-              <a:rPr lang="en-US" sz="1200" dirty="0">
-                <a:solidFill>
-                  <a:srgbClr val="5C6B63"/>
-                </a:solidFill>
-                <a:latin typeface="Calibri" pitchFamily="34" charset="0"/>
-                <a:ea typeface="Calibri" pitchFamily="34" charset="-122"/>
-                <a:cs typeface="Calibri" pitchFamily="34" charset="-120"/>
-              </a:rPr>
-              <a:t>Sujet tiré, dépôt du groupe créé, socle exécuté tel quel</a:t>
-            </a:r>
-            <a:endParaRPr lang="en-US" sz="1200" dirty="0"/>
-          </a:p>
-        </p:txBody>
-      </p:sp>
-      <p:sp>
-        <p:nvSpPr>
-          <p:cNvPr id="9" name="Shape 6"/>
-          <p:cNvSpPr/>
-          <p:nvPr/>
-        </p:nvSpPr>
-        <p:spPr>
-          <a:xfrm>
-            <a:off x="3456432" y="1920240"/>
+          <p:cNvPr id="5" name="Shape 2"/>
+          <p:cNvSpPr/>
+          <p:nvPr/>
+        </p:nvSpPr>
+        <p:spPr>
+          <a:xfrm>
+            <a:off x="640080" y="1920240"/>
             <a:ext cx="2651760" cy="3108960"/>
           </a:xfrm>
           <a:prstGeom prst="roundRect">
@@ -9755,34 +9844,34 @@
             </a:avLst>
           </a:prstGeom>
           <a:solidFill>
-            <a:srgbClr val="EEF4F0"/>
+            <a:srgbClr val="EEF5EF"/>
           </a:solidFill>
           <a:ln/>
         </p:spPr>
       </p:sp>
       <p:sp>
         <p:nvSpPr>
-          <p:cNvPr id="10" name="Shape 7"/>
-          <p:cNvSpPr/>
-          <p:nvPr/>
-        </p:nvSpPr>
-        <p:spPr>
-          <a:xfrm>
-            <a:off x="3712464" y="2176272"/>
+          <p:cNvPr id="6" name="Shape 3"/>
+          <p:cNvSpPr/>
+          <p:nvPr/>
+        </p:nvSpPr>
+        <p:spPr>
+          <a:xfrm>
+            <a:off x="896112" y="2176272"/>
             <a:ext cx="512064" cy="512064"/>
           </a:xfrm>
           <a:prstGeom prst="ellipse">
             <a:avLst/>
           </a:prstGeom>
           <a:solidFill>
-            <a:srgbClr val="14563C"/>
+            <a:srgbClr val="C79100"/>
           </a:solidFill>
           <a:ln/>
         </p:spPr>
       </p:sp>
       <p:pic>
         <p:nvPicPr>
-          <p:cNvPr id="11" name="Image 1" descr="icons/db.png">    </p:cNvPr>
+          <p:cNvPr id="7" name="Image 1" descr="icons/flag.png">    </p:cNvPr>
           <p:cNvPicPr>
             <a:picLocks noChangeAspect="1"/>
           </p:cNvPicPr>
@@ -9796,7 +9885,7 @@
         </p:blipFill>
         <p:spPr>
           <a:xfrm>
-            <a:off x="3845601" y="2309409"/>
+            <a:off x="1029249" y="2309409"/>
             <a:ext cx="245791" cy="245791"/>
           </a:xfrm>
           <a:prstGeom prst="rect">
@@ -9806,13 +9895,13 @@
       </p:pic>
       <p:sp>
         <p:nvSpPr>
-          <p:cNvPr id="12" name="Text 8"/>
-          <p:cNvSpPr/>
-          <p:nvPr/>
-        </p:nvSpPr>
-        <p:spPr>
-          <a:xfrm>
-            <a:off x="3712464" y="2880360"/>
+          <p:cNvPr id="8" name="Text 4"/>
+          <p:cNvSpPr/>
+          <p:nvPr/>
+        </p:nvSpPr>
+        <p:spPr>
+          <a:xfrm>
+            <a:off x="896112" y="2880360"/>
             <a:ext cx="2194560" cy="365760"/>
           </a:xfrm>
           <a:prstGeom prst="rect">
@@ -9831,13 +9920,13 @@
             <a:r>
               <a:rPr lang="en-US" sz="1600" b="1" dirty="0">
                 <a:solidFill>
-                  <a:srgbClr val="14563C"/>
+                  <a:srgbClr val="0E7A3D"/>
                 </a:solidFill>
                 <a:latin typeface="Calibri" pitchFamily="34" charset="0"/>
                 <a:ea typeface="Calibri" pitchFamily="34" charset="-122"/>
                 <a:cs typeface="Calibri" pitchFamily="34" charset="-120"/>
               </a:rPr>
-              <a:t>J4 soir</a:t>
+              <a:t>J4 midi</a:t>
             </a:r>
             <a:endParaRPr lang="en-US" sz="1600" dirty="0"/>
           </a:p>
@@ -9845,13 +9934,13 @@
       </p:sp>
       <p:sp>
         <p:nvSpPr>
-          <p:cNvPr id="13" name="Text 9"/>
-          <p:cNvSpPr/>
-          <p:nvPr/>
-        </p:nvSpPr>
-        <p:spPr>
-          <a:xfrm>
-            <a:off x="3712464" y="3291840"/>
+          <p:cNvPr id="9" name="Text 5"/>
+          <p:cNvSpPr/>
+          <p:nvPr/>
+        </p:nvSpPr>
+        <p:spPr>
+          <a:xfrm>
+            <a:off x="896112" y="3291840"/>
             <a:ext cx="2148840" cy="1554480"/>
           </a:xfrm>
           <a:prstGeom prst="rect">
@@ -9879,7 +9968,7 @@
                 <a:ea typeface="Calibri" pitchFamily="34" charset="-122"/>
                 <a:cs typeface="Calibri" pitchFamily="34" charset="-120"/>
               </a:rPr>
-              <a:t>Lecture + validation opérationnelles sur les vraies données</a:t>
+              <a:t>Sujet tiré, dépôt du groupe créé, socle exécuté tel quel</a:t>
             </a:r>
             <a:endParaRPr lang="en-US" sz="1200" dirty="0"/>
           </a:p>
@@ -9887,13 +9976,13 @@
       </p:sp>
       <p:sp>
         <p:nvSpPr>
-          <p:cNvPr id="14" name="Shape 10"/>
-          <p:cNvSpPr/>
-          <p:nvPr/>
-        </p:nvSpPr>
-        <p:spPr>
-          <a:xfrm>
-            <a:off x="6272784" y="1920240"/>
+          <p:cNvPr id="10" name="Shape 6"/>
+          <p:cNvSpPr/>
+          <p:nvPr/>
+        </p:nvSpPr>
+        <p:spPr>
+          <a:xfrm>
+            <a:off x="3456432" y="1920240"/>
             <a:ext cx="2651760" cy="3108960"/>
           </a:xfrm>
           <a:prstGeom prst="roundRect">
@@ -9902,34 +9991,34 @@
             </a:avLst>
           </a:prstGeom>
           <a:solidFill>
-            <a:srgbClr val="EEF4F0"/>
+            <a:srgbClr val="EEF5EF"/>
           </a:solidFill>
           <a:ln/>
         </p:spPr>
       </p:sp>
       <p:sp>
         <p:nvSpPr>
-          <p:cNvPr id="15" name="Shape 11"/>
-          <p:cNvSpPr/>
-          <p:nvPr/>
-        </p:nvSpPr>
-        <p:spPr>
-          <a:xfrm>
-            <a:off x="6528816" y="2176272"/>
+          <p:cNvPr id="11" name="Shape 7"/>
+          <p:cNvSpPr/>
+          <p:nvPr/>
+        </p:nvSpPr>
+        <p:spPr>
+          <a:xfrm>
+            <a:off x="3712464" y="2176272"/>
             <a:ext cx="512064" cy="512064"/>
           </a:xfrm>
           <a:prstGeom prst="ellipse">
             <a:avLst/>
           </a:prstGeom>
           <a:solidFill>
-            <a:srgbClr val="1E7A50"/>
+            <a:srgbClr val="0E7A3D"/>
           </a:solidFill>
           <a:ln/>
         </p:spPr>
       </p:sp>
       <p:pic>
         <p:nvPicPr>
-          <p:cNvPr id="16" name="Image 2" descr="icons/cogs.png">    </p:cNvPr>
+          <p:cNvPr id="12" name="Image 2" descr="icons/db.png">    </p:cNvPr>
           <p:cNvPicPr>
             <a:picLocks noChangeAspect="1"/>
           </p:cNvPicPr>
@@ -9943,7 +10032,7 @@
         </p:blipFill>
         <p:spPr>
           <a:xfrm>
-            <a:off x="6661953" y="2309409"/>
+            <a:off x="3845601" y="2309409"/>
             <a:ext cx="245791" cy="245791"/>
           </a:xfrm>
           <a:prstGeom prst="rect">
@@ -9953,13 +10042,13 @@
       </p:pic>
       <p:sp>
         <p:nvSpPr>
-          <p:cNvPr id="17" name="Text 12"/>
-          <p:cNvSpPr/>
-          <p:nvPr/>
-        </p:nvSpPr>
-        <p:spPr>
-          <a:xfrm>
-            <a:off x="6528816" y="2880360"/>
+          <p:cNvPr id="13" name="Text 8"/>
+          <p:cNvSpPr/>
+          <p:nvPr/>
+        </p:nvSpPr>
+        <p:spPr>
+          <a:xfrm>
+            <a:off x="3712464" y="2880360"/>
             <a:ext cx="2194560" cy="365760"/>
           </a:xfrm>
           <a:prstGeom prst="rect">
@@ -9978,13 +10067,13 @@
             <a:r>
               <a:rPr lang="en-US" sz="1600" b="1" dirty="0">
                 <a:solidFill>
-                  <a:srgbClr val="14563C"/>
+                  <a:srgbClr val="0E7A3D"/>
                 </a:solidFill>
                 <a:latin typeface="Calibri" pitchFamily="34" charset="0"/>
                 <a:ea typeface="Calibri" pitchFamily="34" charset="-122"/>
                 <a:cs typeface="Calibri" pitchFamily="34" charset="-120"/>
               </a:rPr>
-              <a:t>J5 midi</a:t>
+              <a:t>J4 soir</a:t>
             </a:r>
             <a:endParaRPr lang="en-US" sz="1600" dirty="0"/>
           </a:p>
@@ -9992,13 +10081,13 @@
       </p:sp>
       <p:sp>
         <p:nvSpPr>
-          <p:cNvPr id="18" name="Text 13"/>
-          <p:cNvSpPr/>
-          <p:nvPr/>
-        </p:nvSpPr>
-        <p:spPr>
-          <a:xfrm>
-            <a:off x="6528816" y="3291840"/>
+          <p:cNvPr id="14" name="Text 9"/>
+          <p:cNvSpPr/>
+          <p:nvPr/>
+        </p:nvSpPr>
+        <p:spPr>
+          <a:xfrm>
+            <a:off x="3712464" y="3291840"/>
             <a:ext cx="2148840" cy="1554480"/>
           </a:xfrm>
           <a:prstGeom prst="rect">
@@ -10026,7 +10115,7 @@
                 <a:ea typeface="Calibri" pitchFamily="34" charset="-122"/>
                 <a:cs typeface="Calibri" pitchFamily="34" charset="-120"/>
               </a:rPr>
-              <a:t>Chaîne complète exécutable en UNE commande</a:t>
+              <a:t>Lecture + validation opérationnelles sur les vraies données</a:t>
             </a:r>
             <a:endParaRPr lang="en-US" sz="1200" dirty="0"/>
           </a:p>
@@ -10034,13 +10123,13 @@
       </p:sp>
       <p:sp>
         <p:nvSpPr>
-          <p:cNvPr id="19" name="Shape 14"/>
-          <p:cNvSpPr/>
-          <p:nvPr/>
-        </p:nvSpPr>
-        <p:spPr>
-          <a:xfrm>
-            <a:off x="9089136" y="1920240"/>
+          <p:cNvPr id="15" name="Shape 10"/>
+          <p:cNvSpPr/>
+          <p:nvPr/>
+        </p:nvSpPr>
+        <p:spPr>
+          <a:xfrm>
+            <a:off x="6272784" y="1920240"/>
             <a:ext cx="2651760" cy="3108960"/>
           </a:xfrm>
           <a:prstGeom prst="roundRect">
@@ -10049,34 +10138,34 @@
             </a:avLst>
           </a:prstGeom>
           <a:solidFill>
-            <a:srgbClr val="EEF4F0"/>
+            <a:srgbClr val="EEF5EF"/>
           </a:solidFill>
           <a:ln/>
         </p:spPr>
       </p:sp>
       <p:sp>
         <p:nvSpPr>
-          <p:cNvPr id="20" name="Shape 15"/>
-          <p:cNvSpPr/>
-          <p:nvPr/>
-        </p:nvSpPr>
-        <p:spPr>
-          <a:xfrm>
-            <a:off x="9345168" y="2176272"/>
+          <p:cNvPr id="16" name="Shape 11"/>
+          <p:cNvSpPr/>
+          <p:nvPr/>
+        </p:nvSpPr>
+        <p:spPr>
+          <a:xfrm>
+            <a:off x="6528816" y="2176272"/>
             <a:ext cx="512064" cy="512064"/>
           </a:xfrm>
           <a:prstGeom prst="ellipse">
             <a:avLst/>
           </a:prstGeom>
           <a:solidFill>
-            <a:srgbClr val="0D3325"/>
+            <a:srgbClr val="2E9E4F"/>
           </a:solidFill>
           <a:ln/>
         </p:spPr>
       </p:sp>
       <p:pic>
         <p:nvPicPr>
-          <p:cNvPr id="21" name="Image 3" descr="icons/comments.png">    </p:cNvPr>
+          <p:cNvPr id="17" name="Image 3" descr="icons/cogs.png">    </p:cNvPr>
           <p:cNvPicPr>
             <a:picLocks noChangeAspect="1"/>
           </p:cNvPicPr>
@@ -10090,7 +10179,7 @@
         </p:blipFill>
         <p:spPr>
           <a:xfrm>
-            <a:off x="9478305" y="2309409"/>
+            <a:off x="6661953" y="2309409"/>
             <a:ext cx="245791" cy="245791"/>
           </a:xfrm>
           <a:prstGeom prst="rect">
@@ -10100,13 +10189,13 @@
       </p:pic>
       <p:sp>
         <p:nvSpPr>
-          <p:cNvPr id="22" name="Text 16"/>
-          <p:cNvSpPr/>
-          <p:nvPr/>
-        </p:nvSpPr>
-        <p:spPr>
-          <a:xfrm>
-            <a:off x="9345168" y="2880360"/>
+          <p:cNvPr id="18" name="Text 12"/>
+          <p:cNvSpPr/>
+          <p:nvPr/>
+        </p:nvSpPr>
+        <p:spPr>
+          <a:xfrm>
+            <a:off x="6528816" y="2880360"/>
             <a:ext cx="2194560" cy="365760"/>
           </a:xfrm>
           <a:prstGeom prst="rect">
@@ -10125,13 +10214,13 @@
             <a:r>
               <a:rPr lang="en-US" sz="1600" b="1" dirty="0">
                 <a:solidFill>
-                  <a:srgbClr val="14563C"/>
+                  <a:srgbClr val="0E7A3D"/>
                 </a:solidFill>
                 <a:latin typeface="Calibri" pitchFamily="34" charset="0"/>
                 <a:ea typeface="Calibri" pitchFamily="34" charset="-122"/>
                 <a:cs typeface="Calibri" pitchFamily="34" charset="-120"/>
               </a:rPr>
-              <a:t>J5 après-midi</a:t>
+              <a:t>J5 midi</a:t>
             </a:r>
             <a:endParaRPr lang="en-US" sz="1600" dirty="0"/>
           </a:p>
@@ -10139,13 +10228,13 @@
       </p:sp>
       <p:sp>
         <p:nvSpPr>
-          <p:cNvPr id="23" name="Text 17"/>
-          <p:cNvSpPr/>
-          <p:nvPr/>
-        </p:nvSpPr>
-        <p:spPr>
-          <a:xfrm>
-            <a:off x="9345168" y="3291840"/>
+          <p:cNvPr id="19" name="Text 13"/>
+          <p:cNvSpPr/>
+          <p:nvPr/>
+        </p:nvSpPr>
+        <p:spPr>
+          <a:xfrm>
+            <a:off x="6528816" y="3291840"/>
             <a:ext cx="2148840" cy="1554480"/>
           </a:xfrm>
           <a:prstGeom prst="rect">
@@ -10173,6 +10262,153 @@
                 <a:ea typeface="Calibri" pitchFamily="34" charset="-122"/>
                 <a:cs typeface="Calibri" pitchFamily="34" charset="-120"/>
               </a:rPr>
+              <a:t>Chaîne complète exécutable en UNE commande</a:t>
+            </a:r>
+            <a:endParaRPr lang="en-US" sz="1200" dirty="0"/>
+          </a:p>
+        </p:txBody>
+      </p:sp>
+      <p:sp>
+        <p:nvSpPr>
+          <p:cNvPr id="20" name="Shape 14"/>
+          <p:cNvSpPr/>
+          <p:nvPr/>
+        </p:nvSpPr>
+        <p:spPr>
+          <a:xfrm>
+            <a:off x="9089136" y="1920240"/>
+            <a:ext cx="2651760" cy="3108960"/>
+          </a:xfrm>
+          <a:prstGeom prst="roundRect">
+            <a:avLst>
+              <a:gd name="adj" fmla="val 3448"/>
+            </a:avLst>
+          </a:prstGeom>
+          <a:solidFill>
+            <a:srgbClr val="EEF5EF"/>
+          </a:solidFill>
+          <a:ln/>
+        </p:spPr>
+      </p:sp>
+      <p:sp>
+        <p:nvSpPr>
+          <p:cNvPr id="21" name="Shape 15"/>
+          <p:cNvSpPr/>
+          <p:nvPr/>
+        </p:nvSpPr>
+        <p:spPr>
+          <a:xfrm>
+            <a:off x="9345168" y="2176272"/>
+            <a:ext cx="512064" cy="512064"/>
+          </a:xfrm>
+          <a:prstGeom prst="ellipse">
+            <a:avLst/>
+          </a:prstGeom>
+          <a:solidFill>
+            <a:srgbClr val="0A2E1A"/>
+          </a:solidFill>
+          <a:ln/>
+        </p:spPr>
+      </p:sp>
+      <p:pic>
+        <p:nvPicPr>
+          <p:cNvPr id="22" name="Image 4" descr="icons/comments.png">    </p:cNvPr>
+          <p:cNvPicPr>
+            <a:picLocks noChangeAspect="1"/>
+          </p:cNvPicPr>
+          <p:nvPr/>
+        </p:nvPicPr>
+        <p:blipFill>
+          <a:blip r:embed="rId5"/>
+          <a:stretch>
+            <a:fillRect/>
+          </a:stretch>
+        </p:blipFill>
+        <p:spPr>
+          <a:xfrm>
+            <a:off x="9478305" y="2309409"/>
+            <a:ext cx="245791" cy="245791"/>
+          </a:xfrm>
+          <a:prstGeom prst="rect">
+            <a:avLst/>
+          </a:prstGeom>
+        </p:spPr>
+      </p:pic>
+      <p:sp>
+        <p:nvSpPr>
+          <p:cNvPr id="23" name="Text 16"/>
+          <p:cNvSpPr/>
+          <p:nvPr/>
+        </p:nvSpPr>
+        <p:spPr>
+          <a:xfrm>
+            <a:off x="9345168" y="2880360"/>
+            <a:ext cx="2194560" cy="365760"/>
+          </a:xfrm>
+          <a:prstGeom prst="rect">
+            <a:avLst/>
+          </a:prstGeom>
+          <a:noFill/>
+          <a:ln/>
+        </p:spPr>
+        <p:txBody>
+          <a:bodyPr wrap="square" lIns="0" tIns="0" rIns="0" bIns="0" rtlCol="0" anchor="ctr"/>
+          <a:lstStyle/>
+          <a:p>
+            <a:pPr indent="0" marL="0">
+              <a:buNone/>
+            </a:pPr>
+            <a:r>
+              <a:rPr lang="en-US" sz="1600" b="1" dirty="0">
+                <a:solidFill>
+                  <a:srgbClr val="0E7A3D"/>
+                </a:solidFill>
+                <a:latin typeface="Calibri" pitchFamily="34" charset="0"/>
+                <a:ea typeface="Calibri" pitchFamily="34" charset="-122"/>
+                <a:cs typeface="Calibri" pitchFamily="34" charset="-120"/>
+              </a:rPr>
+              <a:t>J5 après-midi</a:t>
+            </a:r>
+            <a:endParaRPr lang="en-US" sz="1600" dirty="0"/>
+          </a:p>
+        </p:txBody>
+      </p:sp>
+      <p:sp>
+        <p:nvSpPr>
+          <p:cNvPr id="24" name="Text 17"/>
+          <p:cNvSpPr/>
+          <p:nvPr/>
+        </p:nvSpPr>
+        <p:spPr>
+          <a:xfrm>
+            <a:off x="9345168" y="3291840"/>
+            <a:ext cx="2148840" cy="1554480"/>
+          </a:xfrm>
+          <a:prstGeom prst="rect">
+            <a:avLst/>
+          </a:prstGeom>
+          <a:noFill/>
+          <a:ln/>
+        </p:spPr>
+        <p:txBody>
+          <a:bodyPr wrap="square" lIns="0" tIns="0" rIns="0" bIns="0" rtlCol="0" anchor="t"/>
+          <a:lstStyle/>
+          <a:p>
+            <a:pPr indent="0" marL="0">
+              <a:lnSpc>
+                <a:spcPct val="112000"/>
+              </a:lnSpc>
+              <a:buNone/>
+            </a:pPr>
+            <a:r>
+              <a:rPr lang="en-US" sz="1200" dirty="0">
+                <a:solidFill>
+                  <a:srgbClr val="5C6B63"/>
+                </a:solidFill>
+                <a:latin typeface="Calibri" pitchFamily="34" charset="0"/>
+                <a:ea typeface="Calibri" pitchFamily="34" charset="-122"/>
+                <a:cs typeface="Calibri" pitchFamily="34" charset="-120"/>
+              </a:rPr>
               <a:t>Soutenance : 10 min de démonstration + 5 min de questions</a:t>
             </a:r>
             <a:endParaRPr lang="en-US" sz="1200" dirty="0"/>
@@ -10181,7 +10417,7 @@
       </p:sp>
       <p:sp>
         <p:nvSpPr>
-          <p:cNvPr id="24" name="Text 18"/>
+          <p:cNvPr id="25" name="Text 18"/>
           <p:cNvSpPr/>
           <p:nvPr/>
         </p:nvSpPr>
@@ -10206,7 +10442,7 @@
             <a:r>
               <a:rPr lang="en-US" sz="1350" b="1" dirty="0">
                 <a:solidFill>
-                  <a:srgbClr val="14563C"/>
+                  <a:srgbClr val="0E7A3D"/>
                 </a:solidFill>
                 <a:latin typeface="Calibri" pitchFamily="34" charset="0"/>
                 <a:ea typeface="Calibri" pitchFamily="34" charset="-122"/>
@@ -10273,7 +10509,7 @@
         <p:spPr>
           <a:xfrm>
             <a:off x="548640" y="384048"/>
-            <a:ext cx="10972800" cy="320040"/>
+            <a:ext cx="9601200" cy="320040"/>
           </a:xfrm>
           <a:prstGeom prst="rect">
             <a:avLst/>
@@ -10291,7 +10527,7 @@
             <a:r>
               <a:rPr lang="en-US" sz="1300" b="1" spc="200" kern="0" dirty="0">
                 <a:solidFill>
-                  <a:srgbClr val="C9A227"/>
+                  <a:srgbClr val="C79100"/>
                 </a:solidFill>
                 <a:latin typeface="Calibri" pitchFamily="34" charset="0"/>
                 <a:ea typeface="Calibri" pitchFamily="34" charset="-122"/>
@@ -10312,7 +10548,7 @@
         <p:spPr>
           <a:xfrm>
             <a:off x="548640" y="658368"/>
-            <a:ext cx="11064240" cy="731520"/>
+            <a:ext cx="9966960" cy="731520"/>
           </a:xfrm>
           <a:prstGeom prst="rect">
             <a:avLst/>
@@ -10330,7 +10566,7 @@
             <a:r>
               <a:rPr lang="en-US" sz="3400" b="1" dirty="0">
                 <a:solidFill>
-                  <a:srgbClr val="14563C"/>
+                  <a:srgbClr val="0E7A3D"/>
                 </a:solidFill>
                 <a:latin typeface="Cambria" pitchFamily="34" charset="0"/>
                 <a:ea typeface="Cambria" pitchFamily="34" charset="-122"/>
@@ -10342,499 +10578,9 @@
           </a:p>
         </p:txBody>
       </p:sp>
-      <p:sp>
-        <p:nvSpPr>
-          <p:cNvPr id="4" name="Shape 2"/>
-          <p:cNvSpPr/>
-          <p:nvPr/>
-        </p:nvSpPr>
-        <p:spPr>
-          <a:xfrm>
-            <a:off x="640080" y="1783080"/>
-            <a:ext cx="457200" cy="457200"/>
-          </a:xfrm>
-          <a:prstGeom prst="ellipse">
-            <a:avLst/>
-          </a:prstGeom>
-          <a:solidFill>
-            <a:srgbClr val="14563C"/>
-          </a:solidFill>
-          <a:ln/>
-        </p:spPr>
-      </p:sp>
-      <p:sp>
-        <p:nvSpPr>
-          <p:cNvPr id="5" name="Text 3"/>
-          <p:cNvSpPr/>
-          <p:nvPr/>
-        </p:nvSpPr>
-        <p:spPr>
-          <a:xfrm>
-            <a:off x="640080" y="1783080"/>
-            <a:ext cx="457200" cy="457200"/>
-          </a:xfrm>
-          <a:prstGeom prst="rect">
-            <a:avLst/>
-          </a:prstGeom>
-          <a:noFill/>
-          <a:ln/>
-        </p:spPr>
-        <p:txBody>
-          <a:bodyPr wrap="square" lIns="0" tIns="0" rIns="0" bIns="0" rtlCol="0" anchor="ctr"/>
-          <a:lstStyle/>
-          <a:p>
-            <a:pPr algn="ctr" indent="0" marL="0">
-              <a:buNone/>
-            </a:pPr>
-            <a:r>
-              <a:rPr lang="en-US" sz="1400" b="1" dirty="0">
-                <a:solidFill>
-                  <a:srgbClr val="FFFFFF"/>
-                </a:solidFill>
-                <a:latin typeface="Calibri" pitchFamily="34" charset="0"/>
-                <a:ea typeface="Calibri" pitchFamily="34" charset="-122"/>
-                <a:cs typeface="Calibri" pitchFamily="34" charset="-120"/>
-              </a:rPr>
-              <a:t>1</a:t>
-            </a:r>
-            <a:endParaRPr lang="en-US" sz="1400" dirty="0"/>
-          </a:p>
-        </p:txBody>
-      </p:sp>
-      <p:sp>
-        <p:nvSpPr>
-          <p:cNvPr id="6" name="Text 4"/>
-          <p:cNvSpPr/>
-          <p:nvPr/>
-        </p:nvSpPr>
-        <p:spPr>
-          <a:xfrm>
-            <a:off x="1234440" y="1764792"/>
-            <a:ext cx="6309360" cy="548640"/>
-          </a:xfrm>
-          <a:prstGeom prst="rect">
-            <a:avLst/>
-          </a:prstGeom>
-          <a:noFill/>
-          <a:ln/>
-        </p:spPr>
-        <p:txBody>
-          <a:bodyPr wrap="square" lIns="0" tIns="0" rIns="0" bIns="0" rtlCol="0" anchor="ctr"/>
-          <a:lstStyle/>
-          <a:p>
-            <a:pPr indent="0" marL="0">
-              <a:buNone/>
-            </a:pPr>
-            <a:r>
-              <a:rPr lang="en-US" sz="1400" b="1" dirty="0">
-                <a:solidFill>
-                  <a:srgbClr val="1C2A24"/>
-                </a:solidFill>
-                <a:latin typeface="Calibri" pitchFamily="34" charset="0"/>
-                <a:ea typeface="Calibri" pitchFamily="34" charset="-122"/>
-                <a:cs typeface="Calibri" pitchFamily="34" charset="-120"/>
-              </a:rPr>
-              <a:t>tp_contribuable.py</a:t>
-            </a:r>
-            <a:pPr indent="0" marL="0">
-              <a:buNone/>
-            </a:pPr>
-            <a:r>
-              <a:rPr lang="en-US" sz="1400" dirty="0">
-                <a:solidFill>
-                  <a:srgbClr val="5C6B63"/>
-                </a:solidFill>
-                <a:latin typeface="Calibri" pitchFamily="34" charset="0"/>
-                <a:ea typeface="Calibri" pitchFamily="34" charset="-122"/>
-                <a:cs typeface="Calibri" pitchFamily="34" charset="-120"/>
-              </a:rPr>
-              <a:t>  —  tva_nette, ca_total, tva_due_totale — assert fournis</a:t>
-            </a:r>
-            <a:endParaRPr lang="en-US" sz="1400" dirty="0"/>
-          </a:p>
-        </p:txBody>
-      </p:sp>
-      <p:sp>
-        <p:nvSpPr>
-          <p:cNvPr id="7" name="Shape 5"/>
-          <p:cNvSpPr/>
-          <p:nvPr/>
-        </p:nvSpPr>
-        <p:spPr>
-          <a:xfrm>
-            <a:off x="640080" y="2532888"/>
-            <a:ext cx="457200" cy="457200"/>
-          </a:xfrm>
-          <a:prstGeom prst="ellipse">
-            <a:avLst/>
-          </a:prstGeom>
-          <a:solidFill>
-            <a:srgbClr val="14563C"/>
-          </a:solidFill>
-          <a:ln/>
-        </p:spPr>
-      </p:sp>
-      <p:sp>
-        <p:nvSpPr>
-          <p:cNvPr id="8" name="Text 6"/>
-          <p:cNvSpPr/>
-          <p:nvPr/>
-        </p:nvSpPr>
-        <p:spPr>
-          <a:xfrm>
-            <a:off x="640080" y="2532888"/>
-            <a:ext cx="457200" cy="457200"/>
-          </a:xfrm>
-          <a:prstGeom prst="rect">
-            <a:avLst/>
-          </a:prstGeom>
-          <a:noFill/>
-          <a:ln/>
-        </p:spPr>
-        <p:txBody>
-          <a:bodyPr wrap="square" lIns="0" tIns="0" rIns="0" bIns="0" rtlCol="0" anchor="ctr"/>
-          <a:lstStyle/>
-          <a:p>
-            <a:pPr algn="ctr" indent="0" marL="0">
-              <a:buNone/>
-            </a:pPr>
-            <a:r>
-              <a:rPr lang="en-US" sz="1400" b="1" dirty="0">
-                <a:solidFill>
-                  <a:srgbClr val="FFFFFF"/>
-                </a:solidFill>
-                <a:latin typeface="Calibri" pitchFamily="34" charset="0"/>
-                <a:ea typeface="Calibri" pitchFamily="34" charset="-122"/>
-                <a:cs typeface="Calibri" pitchFamily="34" charset="-120"/>
-              </a:rPr>
-              <a:t>2</a:t>
-            </a:r>
-            <a:endParaRPr lang="en-US" sz="1400" dirty="0"/>
-          </a:p>
-        </p:txBody>
-      </p:sp>
-      <p:sp>
-        <p:nvSpPr>
-          <p:cNvPr id="9" name="Text 7"/>
-          <p:cNvSpPr/>
-          <p:nvPr/>
-        </p:nvSpPr>
-        <p:spPr>
-          <a:xfrm>
-            <a:off x="1234440" y="2514600"/>
-            <a:ext cx="6309360" cy="548640"/>
-          </a:xfrm>
-          <a:prstGeom prst="rect">
-            <a:avLst/>
-          </a:prstGeom>
-          <a:noFill/>
-          <a:ln/>
-        </p:spPr>
-        <p:txBody>
-          <a:bodyPr wrap="square" lIns="0" tIns="0" rIns="0" bIns="0" rtlCol="0" anchor="ctr"/>
-          <a:lstStyle/>
-          <a:p>
-            <a:pPr indent="0" marL="0">
-              <a:buNone/>
-            </a:pPr>
-            <a:r>
-              <a:rPr lang="en-US" sz="1400" b="1" dirty="0">
-                <a:solidFill>
-                  <a:srgbClr val="1C2A24"/>
-                </a:solidFill>
-                <a:latin typeface="Calibri" pitchFamily="34" charset="0"/>
-                <a:ea typeface="Calibri" pitchFamily="34" charset="-122"/>
-                <a:cs typeface="Calibri" pitchFamily="34" charset="-120"/>
-              </a:rPr>
-              <a:t>tp_analyse.py</a:t>
-            </a:r>
-            <a:pPr indent="0" marL="0">
-              <a:buNone/>
-            </a:pPr>
-            <a:r>
-              <a:rPr lang="en-US" sz="1400" dirty="0">
-                <a:solidFill>
-                  <a:srgbClr val="5C6B63"/>
-                </a:solidFill>
-                <a:latin typeface="Calibri" pitchFamily="34" charset="0"/>
-                <a:ea typeface="Calibri" pitchFamily="34" charset="-122"/>
-                <a:cs typeface="Calibri" pitchFamily="34" charset="-120"/>
-              </a:rPr>
-              <a:t>  —  le rapport TVA par région, de bout en bout</a:t>
-            </a:r>
-            <a:endParaRPr lang="en-US" sz="1400" dirty="0"/>
-          </a:p>
-        </p:txBody>
-      </p:sp>
-      <p:sp>
-        <p:nvSpPr>
-          <p:cNvPr id="10" name="Shape 8"/>
-          <p:cNvSpPr/>
-          <p:nvPr/>
-        </p:nvSpPr>
-        <p:spPr>
-          <a:xfrm>
-            <a:off x="640080" y="3282696"/>
-            <a:ext cx="457200" cy="457200"/>
-          </a:xfrm>
-          <a:prstGeom prst="ellipse">
-            <a:avLst/>
-          </a:prstGeom>
-          <a:solidFill>
-            <a:srgbClr val="14563C"/>
-          </a:solidFill>
-          <a:ln/>
-        </p:spPr>
-      </p:sp>
-      <p:sp>
-        <p:nvSpPr>
-          <p:cNvPr id="11" name="Text 9"/>
-          <p:cNvSpPr/>
-          <p:nvPr/>
-        </p:nvSpPr>
-        <p:spPr>
-          <a:xfrm>
-            <a:off x="640080" y="3282696"/>
-            <a:ext cx="457200" cy="457200"/>
-          </a:xfrm>
-          <a:prstGeom prst="rect">
-            <a:avLst/>
-          </a:prstGeom>
-          <a:noFill/>
-          <a:ln/>
-        </p:spPr>
-        <p:txBody>
-          <a:bodyPr wrap="square" lIns="0" tIns="0" rIns="0" bIns="0" rtlCol="0" anchor="ctr"/>
-          <a:lstStyle/>
-          <a:p>
-            <a:pPr algn="ctr" indent="0" marL="0">
-              <a:buNone/>
-            </a:pPr>
-            <a:r>
-              <a:rPr lang="en-US" sz="1400" b="1" dirty="0">
-                <a:solidFill>
-                  <a:srgbClr val="FFFFFF"/>
-                </a:solidFill>
-                <a:latin typeface="Calibri" pitchFamily="34" charset="0"/>
-                <a:ea typeface="Calibri" pitchFamily="34" charset="-122"/>
-                <a:cs typeface="Calibri" pitchFamily="34" charset="-120"/>
-              </a:rPr>
-              <a:t>3</a:t>
-            </a:r>
-            <a:endParaRPr lang="en-US" sz="1400" dirty="0"/>
-          </a:p>
-        </p:txBody>
-      </p:sp>
-      <p:sp>
-        <p:nvSpPr>
-          <p:cNvPr id="12" name="Text 10"/>
-          <p:cNvSpPr/>
-          <p:nvPr/>
-        </p:nvSpPr>
-        <p:spPr>
-          <a:xfrm>
-            <a:off x="1234440" y="3264408"/>
-            <a:ext cx="6309360" cy="548640"/>
-          </a:xfrm>
-          <a:prstGeom prst="rect">
-            <a:avLst/>
-          </a:prstGeom>
-          <a:noFill/>
-          <a:ln/>
-        </p:spPr>
-        <p:txBody>
-          <a:bodyPr wrap="square" lIns="0" tIns="0" rIns="0" bIns="0" rtlCol="0" anchor="ctr"/>
-          <a:lstStyle/>
-          <a:p>
-            <a:pPr indent="0" marL="0">
-              <a:buNone/>
-            </a:pPr>
-            <a:r>
-              <a:rPr lang="en-US" sz="1400" b="1" dirty="0">
-                <a:solidFill>
-                  <a:srgbClr val="1C2A24"/>
-                </a:solidFill>
-                <a:latin typeface="Calibri" pitchFamily="34" charset="0"/>
-                <a:ea typeface="Calibri" pitchFamily="34" charset="-122"/>
-                <a:cs typeface="Calibri" pitchFamily="34" charset="-120"/>
-              </a:rPr>
-              <a:t>Tirage des sujets</a:t>
-            </a:r>
-            <a:pPr indent="0" marL="0">
-              <a:buNone/>
-            </a:pPr>
-            <a:r>
-              <a:rPr lang="en-US" sz="1400" dirty="0">
-                <a:solidFill>
-                  <a:srgbClr val="5C6B63"/>
-                </a:solidFill>
-                <a:latin typeface="Calibri" pitchFamily="34" charset="0"/>
-                <a:ea typeface="Calibri" pitchFamily="34" charset="-122"/>
-                <a:cs typeface="Calibri" pitchFamily="34" charset="-120"/>
-              </a:rPr>
-              <a:t>  —  fin de matinée — constituez les groupes AVANT</a:t>
-            </a:r>
-            <a:endParaRPr lang="en-US" sz="1400" dirty="0"/>
-          </a:p>
-        </p:txBody>
-      </p:sp>
-      <p:sp>
-        <p:nvSpPr>
-          <p:cNvPr id="13" name="Shape 11"/>
-          <p:cNvSpPr/>
-          <p:nvPr/>
-        </p:nvSpPr>
-        <p:spPr>
-          <a:xfrm>
-            <a:off x="640080" y="4032504"/>
-            <a:ext cx="457200" cy="457200"/>
-          </a:xfrm>
-          <a:prstGeom prst="ellipse">
-            <a:avLst/>
-          </a:prstGeom>
-          <a:solidFill>
-            <a:srgbClr val="14563C"/>
-          </a:solidFill>
-          <a:ln/>
-        </p:spPr>
-      </p:sp>
-      <p:sp>
-        <p:nvSpPr>
-          <p:cNvPr id="14" name="Text 12"/>
-          <p:cNvSpPr/>
-          <p:nvPr/>
-        </p:nvSpPr>
-        <p:spPr>
-          <a:xfrm>
-            <a:off x="640080" y="4032504"/>
-            <a:ext cx="457200" cy="457200"/>
-          </a:xfrm>
-          <a:prstGeom prst="rect">
-            <a:avLst/>
-          </a:prstGeom>
-          <a:noFill/>
-          <a:ln/>
-        </p:spPr>
-        <p:txBody>
-          <a:bodyPr wrap="square" lIns="0" tIns="0" rIns="0" bIns="0" rtlCol="0" anchor="ctr"/>
-          <a:lstStyle/>
-          <a:p>
-            <a:pPr algn="ctr" indent="0" marL="0">
-              <a:buNone/>
-            </a:pPr>
-            <a:r>
-              <a:rPr lang="en-US" sz="1400" b="1" dirty="0">
-                <a:solidFill>
-                  <a:srgbClr val="FFFFFF"/>
-                </a:solidFill>
-                <a:latin typeface="Calibri" pitchFamily="34" charset="0"/>
-                <a:ea typeface="Calibri" pitchFamily="34" charset="-122"/>
-                <a:cs typeface="Calibri" pitchFamily="34" charset="-120"/>
-              </a:rPr>
-              <a:t>4</a:t>
-            </a:r>
-            <a:endParaRPr lang="en-US" sz="1400" dirty="0"/>
-          </a:p>
-        </p:txBody>
-      </p:sp>
-      <p:sp>
-        <p:nvSpPr>
-          <p:cNvPr id="15" name="Text 13"/>
-          <p:cNvSpPr/>
-          <p:nvPr/>
-        </p:nvSpPr>
-        <p:spPr>
-          <a:xfrm>
-            <a:off x="1234440" y="4014216"/>
-            <a:ext cx="6309360" cy="548640"/>
-          </a:xfrm>
-          <a:prstGeom prst="rect">
-            <a:avLst/>
-          </a:prstGeom>
-          <a:noFill/>
-          <a:ln/>
-        </p:spPr>
-        <p:txBody>
-          <a:bodyPr wrap="square" lIns="0" tIns="0" rIns="0" bIns="0" rtlCol="0" anchor="ctr"/>
-          <a:lstStyle/>
-          <a:p>
-            <a:pPr indent="0" marL="0">
-              <a:buNone/>
-            </a:pPr>
-            <a:r>
-              <a:rPr lang="en-US" sz="1400" b="1" dirty="0">
-                <a:solidFill>
-                  <a:srgbClr val="1C2A24"/>
-                </a:solidFill>
-                <a:latin typeface="Calibri" pitchFamily="34" charset="0"/>
-                <a:ea typeface="Calibri" pitchFamily="34" charset="-122"/>
-                <a:cs typeface="Calibri" pitchFamily="34" charset="-120"/>
-              </a:rPr>
-              <a:t>Jalon du soir</a:t>
-            </a:r>
-            <a:pPr indent="0" marL="0">
-              <a:buNone/>
-            </a:pPr>
-            <a:r>
-              <a:rPr lang="en-US" sz="1400" dirty="0">
-                <a:solidFill>
-                  <a:srgbClr val="5C6B63"/>
-                </a:solidFill>
-                <a:latin typeface="Calibri" pitchFamily="34" charset="0"/>
-                <a:ea typeface="Calibri" pitchFamily="34" charset="-122"/>
-                <a:cs typeface="Calibri" pitchFamily="34" charset="-120"/>
-              </a:rPr>
-              <a:t>  —  socle exécuté + lecture/validation sur vraies données</a:t>
-            </a:r>
-            <a:endParaRPr lang="en-US" sz="1400" dirty="0"/>
-          </a:p>
-        </p:txBody>
-      </p:sp>
-      <p:sp>
-        <p:nvSpPr>
-          <p:cNvPr id="16" name="Shape 14"/>
-          <p:cNvSpPr/>
-          <p:nvPr/>
-        </p:nvSpPr>
-        <p:spPr>
-          <a:xfrm>
-            <a:off x="7863840" y="1737360"/>
-            <a:ext cx="3749040" cy="3017520"/>
-          </a:xfrm>
-          <a:prstGeom prst="roundRect">
-            <a:avLst>
-              <a:gd name="adj" fmla="val 3030"/>
-            </a:avLst>
-          </a:prstGeom>
-          <a:solidFill>
-            <a:srgbClr val="EEF4F0"/>
-          </a:solidFill>
-          <a:ln/>
-        </p:spPr>
-      </p:sp>
-      <p:sp>
-        <p:nvSpPr>
-          <p:cNvPr id="17" name="Shape 15"/>
-          <p:cNvSpPr/>
-          <p:nvPr/>
-        </p:nvSpPr>
-        <p:spPr>
-          <a:xfrm>
-            <a:off x="8138160" y="1965960"/>
-            <a:ext cx="457200" cy="457200"/>
-          </a:xfrm>
-          <a:prstGeom prst="ellipse">
-            <a:avLst/>
-          </a:prstGeom>
-          <a:solidFill>
-            <a:srgbClr val="C9A227"/>
-          </a:solidFill>
-          <a:ln/>
-        </p:spPr>
-      </p:sp>
       <p:pic>
         <p:nvPicPr>
-          <p:cNvPr id="18" name="Image 0" descr="icons/folder.png">    </p:cNvPr>
+          <p:cNvPr id="4" name="Image 0" descr="logo-dgi.png">    </p:cNvPr>
           <p:cNvPicPr>
             <a:picLocks noChangeAspect="1"/>
           </p:cNvPicPr>
@@ -10848,8 +10594,8 @@
         </p:blipFill>
         <p:spPr>
           <a:xfrm>
-            <a:off x="8257032" y="2084832"/>
-            <a:ext cx="219456" cy="219456"/>
+            <a:off x="10744200" y="384048"/>
+            <a:ext cx="1051560" cy="795528"/>
           </a:xfrm>
           <a:prstGeom prst="rect">
             <a:avLst/>
@@ -10858,14 +10604,34 @@
       </p:pic>
       <p:sp>
         <p:nvSpPr>
-          <p:cNvPr id="19" name="Text 16"/>
-          <p:cNvSpPr/>
-          <p:nvPr/>
-        </p:nvSpPr>
-        <p:spPr>
-          <a:xfrm>
-            <a:off x="8732520" y="2011680"/>
-            <a:ext cx="2743200" cy="365760"/>
+          <p:cNvPr id="5" name="Shape 2"/>
+          <p:cNvSpPr/>
+          <p:nvPr/>
+        </p:nvSpPr>
+        <p:spPr>
+          <a:xfrm>
+            <a:off x="640080" y="1783080"/>
+            <a:ext cx="457200" cy="457200"/>
+          </a:xfrm>
+          <a:prstGeom prst="ellipse">
+            <a:avLst/>
+          </a:prstGeom>
+          <a:solidFill>
+            <a:srgbClr val="0E7A3D"/>
+          </a:solidFill>
+          <a:ln/>
+        </p:spPr>
+      </p:sp>
+      <p:sp>
+        <p:nvSpPr>
+          <p:cNvPr id="6" name="Text 3"/>
+          <p:cNvSpPr/>
+          <p:nvPr/>
+        </p:nvSpPr>
+        <p:spPr>
+          <a:xfrm>
+            <a:off x="640080" y="1783080"/>
+            <a:ext cx="457200" cy="457200"/>
           </a:xfrm>
           <a:prstGeom prst="rect">
             <a:avLst/>
@@ -10877,19 +10643,19 @@
           <a:bodyPr wrap="square" lIns="0" tIns="0" rIns="0" bIns="0" rtlCol="0" anchor="ctr"/>
           <a:lstStyle/>
           <a:p>
-            <a:pPr indent="0" marL="0">
+            <a:pPr algn="ctr" indent="0" marL="0">
               <a:buNone/>
             </a:pPr>
             <a:r>
               <a:rPr lang="en-US" sz="1400" b="1" dirty="0">
                 <a:solidFill>
-                  <a:srgbClr val="14563C"/>
+                  <a:srgbClr val="FFFFFF"/>
                 </a:solidFill>
                 <a:latin typeface="Calibri" pitchFamily="34" charset="0"/>
                 <a:ea typeface="Calibri" pitchFamily="34" charset="-122"/>
                 <a:cs typeface="Calibri" pitchFamily="34" charset="-120"/>
               </a:rPr>
-              <a:t>Fichiers du jour</a:t>
+              <a:t>1</a:t>
             </a:r>
             <a:endParaRPr lang="en-US" sz="1400" dirty="0"/>
           </a:p>
@@ -10897,14 +10663,14 @@
       </p:sp>
       <p:sp>
         <p:nvSpPr>
-          <p:cNvPr id="20" name="Text 17"/>
-          <p:cNvSpPr/>
-          <p:nvPr/>
-        </p:nvSpPr>
-        <p:spPr>
-          <a:xfrm>
-            <a:off x="8138160" y="2606040"/>
-            <a:ext cx="3291840" cy="2011680"/>
+          <p:cNvPr id="7" name="Text 4"/>
+          <p:cNvSpPr/>
+          <p:nvPr/>
+        </p:nvSpPr>
+        <p:spPr>
+          <a:xfrm>
+            <a:off x="1234440" y="1764792"/>
+            <a:ext cx="6309360" cy="548640"/>
           </a:xfrm>
           <a:prstGeom prst="rect">
             <a:avLst/>
@@ -10913,155 +10679,422 @@
           <a:ln/>
         </p:spPr>
         <p:txBody>
-          <a:bodyPr wrap="square" lIns="0" tIns="0" rIns="0" bIns="0" rtlCol="0" anchor="t"/>
-          <a:lstStyle/>
-          <a:p>
-            <a:pPr indent="0" marL="0">
-              <a:lnSpc>
-                <a:spcPct val="135000"/>
-              </a:lnSpc>
-              <a:buNone/>
-            </a:pPr>
-            <a:r>
-              <a:rPr lang="en-US" sz="1150" dirty="0">
+          <a:bodyPr wrap="square" lIns="0" tIns="0" rIns="0" bIns="0" rtlCol="0" anchor="ctr"/>
+          <a:lstStyle/>
+          <a:p>
+            <a:pPr indent="0" marL="0">
+              <a:buNone/>
+            </a:pPr>
+            <a:r>
+              <a:rPr lang="en-US" sz="1400" b="1" dirty="0">
                 <a:solidFill>
                   <a:srgbClr val="1C2A24"/>
                 </a:solidFill>
-                <a:latin typeface="Courier New" pitchFamily="34" charset="0"/>
-                <a:ea typeface="Courier New" pitchFamily="34" charset="-122"/>
-                <a:cs typeface="Courier New" pitchFamily="34" charset="-120"/>
-              </a:rPr>
-              <a:t>08-poo/</a:t>
-            </a:r>
-            <a:endParaRPr lang="en-US" sz="1150" dirty="0"/>
-          </a:p>
-          <a:p>
-            <a:pPr indent="0" marL="0">
-              <a:lnSpc>
-                <a:spcPct val="135000"/>
-              </a:lnSpc>
-              <a:buNone/>
-            </a:pPr>
-            <a:r>
-              <a:rPr lang="en-US" sz="1150" dirty="0">
+                <a:latin typeface="Calibri" pitchFamily="34" charset="0"/>
+                <a:ea typeface="Calibri" pitchFamily="34" charset="-122"/>
+                <a:cs typeface="Calibri" pitchFamily="34" charset="-120"/>
+              </a:rPr>
+              <a:t>tp_contribuable.py</a:t>
+            </a:r>
+            <a:pPr indent="0" marL="0">
+              <a:buNone/>
+            </a:pPr>
+            <a:r>
+              <a:rPr lang="en-US" sz="1400" dirty="0">
+                <a:solidFill>
+                  <a:srgbClr val="5C6B63"/>
+                </a:solidFill>
+                <a:latin typeface="Calibri" pitchFamily="34" charset="0"/>
+                <a:ea typeface="Calibri" pitchFamily="34" charset="-122"/>
+                <a:cs typeface="Calibri" pitchFamily="34" charset="-120"/>
+              </a:rPr>
+              <a:t>  —  tva_nette, ca_total, tva_due_totale — assert fournis</a:t>
+            </a:r>
+            <a:endParaRPr lang="en-US" sz="1400" dirty="0"/>
+          </a:p>
+        </p:txBody>
+      </p:sp>
+      <p:sp>
+        <p:nvSpPr>
+          <p:cNvPr id="8" name="Shape 5"/>
+          <p:cNvSpPr/>
+          <p:nvPr/>
+        </p:nvSpPr>
+        <p:spPr>
+          <a:xfrm>
+            <a:off x="640080" y="2532888"/>
+            <a:ext cx="457200" cy="457200"/>
+          </a:xfrm>
+          <a:prstGeom prst="ellipse">
+            <a:avLst/>
+          </a:prstGeom>
+          <a:solidFill>
+            <a:srgbClr val="0E7A3D"/>
+          </a:solidFill>
+          <a:ln/>
+        </p:spPr>
+      </p:sp>
+      <p:sp>
+        <p:nvSpPr>
+          <p:cNvPr id="9" name="Text 6"/>
+          <p:cNvSpPr/>
+          <p:nvPr/>
+        </p:nvSpPr>
+        <p:spPr>
+          <a:xfrm>
+            <a:off x="640080" y="2532888"/>
+            <a:ext cx="457200" cy="457200"/>
+          </a:xfrm>
+          <a:prstGeom prst="rect">
+            <a:avLst/>
+          </a:prstGeom>
+          <a:noFill/>
+          <a:ln/>
+        </p:spPr>
+        <p:txBody>
+          <a:bodyPr wrap="square" lIns="0" tIns="0" rIns="0" bIns="0" rtlCol="0" anchor="ctr"/>
+          <a:lstStyle/>
+          <a:p>
+            <a:pPr algn="ctr" indent="0" marL="0">
+              <a:buNone/>
+            </a:pPr>
+            <a:r>
+              <a:rPr lang="en-US" sz="1400" b="1" dirty="0">
+                <a:solidFill>
+                  <a:srgbClr val="FFFFFF"/>
+                </a:solidFill>
+                <a:latin typeface="Calibri" pitchFamily="34" charset="0"/>
+                <a:ea typeface="Calibri" pitchFamily="34" charset="-122"/>
+                <a:cs typeface="Calibri" pitchFamily="34" charset="-120"/>
+              </a:rPr>
+              <a:t>2</a:t>
+            </a:r>
+            <a:endParaRPr lang="en-US" sz="1400" dirty="0"/>
+          </a:p>
+        </p:txBody>
+      </p:sp>
+      <p:sp>
+        <p:nvSpPr>
+          <p:cNvPr id="10" name="Text 7"/>
+          <p:cNvSpPr/>
+          <p:nvPr/>
+        </p:nvSpPr>
+        <p:spPr>
+          <a:xfrm>
+            <a:off x="1234440" y="2514600"/>
+            <a:ext cx="6309360" cy="548640"/>
+          </a:xfrm>
+          <a:prstGeom prst="rect">
+            <a:avLst/>
+          </a:prstGeom>
+          <a:noFill/>
+          <a:ln/>
+        </p:spPr>
+        <p:txBody>
+          <a:bodyPr wrap="square" lIns="0" tIns="0" rIns="0" bIns="0" rtlCol="0" anchor="ctr"/>
+          <a:lstStyle/>
+          <a:p>
+            <a:pPr indent="0" marL="0">
+              <a:buNone/>
+            </a:pPr>
+            <a:r>
+              <a:rPr lang="en-US" sz="1400" b="1" dirty="0">
                 <a:solidFill>
                   <a:srgbClr val="1C2A24"/>
                 </a:solidFill>
-                <a:latin typeface="Courier New" pitchFamily="34" charset="0"/>
-                <a:ea typeface="Courier New" pitchFamily="34" charset="-122"/>
-                <a:cs typeface="Courier New" pitchFamily="34" charset="-120"/>
-              </a:rPr>
-              <a:t>  tp_contribuable.py</a:t>
-            </a:r>
-            <a:endParaRPr lang="en-US" sz="1150" dirty="0"/>
-          </a:p>
-          <a:p>
-            <a:pPr indent="0" marL="0">
-              <a:lnSpc>
-                <a:spcPct val="135000"/>
-              </a:lnSpc>
-              <a:buNone/>
-            </a:pPr>
-            <a:r>
-              <a:rPr lang="en-US" sz="1150" dirty="0">
+                <a:latin typeface="Calibri" pitchFamily="34" charset="0"/>
+                <a:ea typeface="Calibri" pitchFamily="34" charset="-122"/>
+                <a:cs typeface="Calibri" pitchFamily="34" charset="-120"/>
+              </a:rPr>
+              <a:t>tp_analyse.py</a:t>
+            </a:r>
+            <a:pPr indent="0" marL="0">
+              <a:buNone/>
+            </a:pPr>
+            <a:r>
+              <a:rPr lang="en-US" sz="1400" dirty="0">
+                <a:solidFill>
+                  <a:srgbClr val="5C6B63"/>
+                </a:solidFill>
+                <a:latin typeface="Calibri" pitchFamily="34" charset="0"/>
+                <a:ea typeface="Calibri" pitchFamily="34" charset="-122"/>
+                <a:cs typeface="Calibri" pitchFamily="34" charset="-120"/>
+              </a:rPr>
+              <a:t>  —  le rapport TVA par région, de bout en bout</a:t>
+            </a:r>
+            <a:endParaRPr lang="en-US" sz="1400" dirty="0"/>
+          </a:p>
+        </p:txBody>
+      </p:sp>
+      <p:sp>
+        <p:nvSpPr>
+          <p:cNvPr id="11" name="Shape 8"/>
+          <p:cNvSpPr/>
+          <p:nvPr/>
+        </p:nvSpPr>
+        <p:spPr>
+          <a:xfrm>
+            <a:off x="640080" y="3282696"/>
+            <a:ext cx="457200" cy="457200"/>
+          </a:xfrm>
+          <a:prstGeom prst="ellipse">
+            <a:avLst/>
+          </a:prstGeom>
+          <a:solidFill>
+            <a:srgbClr val="0E7A3D"/>
+          </a:solidFill>
+          <a:ln/>
+        </p:spPr>
+      </p:sp>
+      <p:sp>
+        <p:nvSpPr>
+          <p:cNvPr id="12" name="Text 9"/>
+          <p:cNvSpPr/>
+          <p:nvPr/>
+        </p:nvSpPr>
+        <p:spPr>
+          <a:xfrm>
+            <a:off x="640080" y="3282696"/>
+            <a:ext cx="457200" cy="457200"/>
+          </a:xfrm>
+          <a:prstGeom prst="rect">
+            <a:avLst/>
+          </a:prstGeom>
+          <a:noFill/>
+          <a:ln/>
+        </p:spPr>
+        <p:txBody>
+          <a:bodyPr wrap="square" lIns="0" tIns="0" rIns="0" bIns="0" rtlCol="0" anchor="ctr"/>
+          <a:lstStyle/>
+          <a:p>
+            <a:pPr algn="ctr" indent="0" marL="0">
+              <a:buNone/>
+            </a:pPr>
+            <a:r>
+              <a:rPr lang="en-US" sz="1400" b="1" dirty="0">
+                <a:solidFill>
+                  <a:srgbClr val="FFFFFF"/>
+                </a:solidFill>
+                <a:latin typeface="Calibri" pitchFamily="34" charset="0"/>
+                <a:ea typeface="Calibri" pitchFamily="34" charset="-122"/>
+                <a:cs typeface="Calibri" pitchFamily="34" charset="-120"/>
+              </a:rPr>
+              <a:t>3</a:t>
+            </a:r>
+            <a:endParaRPr lang="en-US" sz="1400" dirty="0"/>
+          </a:p>
+        </p:txBody>
+      </p:sp>
+      <p:sp>
+        <p:nvSpPr>
+          <p:cNvPr id="13" name="Text 10"/>
+          <p:cNvSpPr/>
+          <p:nvPr/>
+        </p:nvSpPr>
+        <p:spPr>
+          <a:xfrm>
+            <a:off x="1234440" y="3264408"/>
+            <a:ext cx="6309360" cy="548640"/>
+          </a:xfrm>
+          <a:prstGeom prst="rect">
+            <a:avLst/>
+          </a:prstGeom>
+          <a:noFill/>
+          <a:ln/>
+        </p:spPr>
+        <p:txBody>
+          <a:bodyPr wrap="square" lIns="0" tIns="0" rIns="0" bIns="0" rtlCol="0" anchor="ctr"/>
+          <a:lstStyle/>
+          <a:p>
+            <a:pPr indent="0" marL="0">
+              <a:buNone/>
+            </a:pPr>
+            <a:r>
+              <a:rPr lang="en-US" sz="1400" b="1" dirty="0">
                 <a:solidFill>
                   <a:srgbClr val="1C2A24"/>
                 </a:solidFill>
-                <a:latin typeface="Courier New" pitchFamily="34" charset="0"/>
-                <a:ea typeface="Courier New" pitchFamily="34" charset="-122"/>
-                <a:cs typeface="Courier New" pitchFamily="34" charset="-120"/>
-              </a:rPr>
-              <a:t>09-pandas-analyse/</a:t>
-            </a:r>
-            <a:endParaRPr lang="en-US" sz="1150" dirty="0"/>
-          </a:p>
-          <a:p>
-            <a:pPr indent="0" marL="0">
-              <a:lnSpc>
-                <a:spcPct val="135000"/>
-              </a:lnSpc>
-              <a:buNone/>
-            </a:pPr>
-            <a:r>
-              <a:rPr lang="en-US" sz="1150" dirty="0">
+                <a:latin typeface="Calibri" pitchFamily="34" charset="0"/>
+                <a:ea typeface="Calibri" pitchFamily="34" charset="-122"/>
+                <a:cs typeface="Calibri" pitchFamily="34" charset="-120"/>
+              </a:rPr>
+              <a:t>Tirage des sujets</a:t>
+            </a:r>
+            <a:pPr indent="0" marL="0">
+              <a:buNone/>
+            </a:pPr>
+            <a:r>
+              <a:rPr lang="en-US" sz="1400" dirty="0">
+                <a:solidFill>
+                  <a:srgbClr val="5C6B63"/>
+                </a:solidFill>
+                <a:latin typeface="Calibri" pitchFamily="34" charset="0"/>
+                <a:ea typeface="Calibri" pitchFamily="34" charset="-122"/>
+                <a:cs typeface="Calibri" pitchFamily="34" charset="-120"/>
+              </a:rPr>
+              <a:t>  —  fin de matinée — constituez les groupes AVANT</a:t>
+            </a:r>
+            <a:endParaRPr lang="en-US" sz="1400" dirty="0"/>
+          </a:p>
+        </p:txBody>
+      </p:sp>
+      <p:sp>
+        <p:nvSpPr>
+          <p:cNvPr id="14" name="Shape 11"/>
+          <p:cNvSpPr/>
+          <p:nvPr/>
+        </p:nvSpPr>
+        <p:spPr>
+          <a:xfrm>
+            <a:off x="640080" y="4032504"/>
+            <a:ext cx="457200" cy="457200"/>
+          </a:xfrm>
+          <a:prstGeom prst="ellipse">
+            <a:avLst/>
+          </a:prstGeom>
+          <a:solidFill>
+            <a:srgbClr val="0E7A3D"/>
+          </a:solidFill>
+          <a:ln/>
+        </p:spPr>
+      </p:sp>
+      <p:sp>
+        <p:nvSpPr>
+          <p:cNvPr id="15" name="Text 12"/>
+          <p:cNvSpPr/>
+          <p:nvPr/>
+        </p:nvSpPr>
+        <p:spPr>
+          <a:xfrm>
+            <a:off x="640080" y="4032504"/>
+            <a:ext cx="457200" cy="457200"/>
+          </a:xfrm>
+          <a:prstGeom prst="rect">
+            <a:avLst/>
+          </a:prstGeom>
+          <a:noFill/>
+          <a:ln/>
+        </p:spPr>
+        <p:txBody>
+          <a:bodyPr wrap="square" lIns="0" tIns="0" rIns="0" bIns="0" rtlCol="0" anchor="ctr"/>
+          <a:lstStyle/>
+          <a:p>
+            <a:pPr algn="ctr" indent="0" marL="0">
+              <a:buNone/>
+            </a:pPr>
+            <a:r>
+              <a:rPr lang="en-US" sz="1400" b="1" dirty="0">
+                <a:solidFill>
+                  <a:srgbClr val="FFFFFF"/>
+                </a:solidFill>
+                <a:latin typeface="Calibri" pitchFamily="34" charset="0"/>
+                <a:ea typeface="Calibri" pitchFamily="34" charset="-122"/>
+                <a:cs typeface="Calibri" pitchFamily="34" charset="-120"/>
+              </a:rPr>
+              <a:t>4</a:t>
+            </a:r>
+            <a:endParaRPr lang="en-US" sz="1400" dirty="0"/>
+          </a:p>
+        </p:txBody>
+      </p:sp>
+      <p:sp>
+        <p:nvSpPr>
+          <p:cNvPr id="16" name="Text 13"/>
+          <p:cNvSpPr/>
+          <p:nvPr/>
+        </p:nvSpPr>
+        <p:spPr>
+          <a:xfrm>
+            <a:off x="1234440" y="4014216"/>
+            <a:ext cx="6309360" cy="548640"/>
+          </a:xfrm>
+          <a:prstGeom prst="rect">
+            <a:avLst/>
+          </a:prstGeom>
+          <a:noFill/>
+          <a:ln/>
+        </p:spPr>
+        <p:txBody>
+          <a:bodyPr wrap="square" lIns="0" tIns="0" rIns="0" bIns="0" rtlCol="0" anchor="ctr"/>
+          <a:lstStyle/>
+          <a:p>
+            <a:pPr indent="0" marL="0">
+              <a:buNone/>
+            </a:pPr>
+            <a:r>
+              <a:rPr lang="en-US" sz="1400" b="1" dirty="0">
                 <a:solidFill>
                   <a:srgbClr val="1C2A24"/>
                 </a:solidFill>
-                <a:latin typeface="Courier New" pitchFamily="34" charset="0"/>
-                <a:ea typeface="Courier New" pitchFamily="34" charset="-122"/>
-                <a:cs typeface="Courier New" pitchFamily="34" charset="-120"/>
-              </a:rPr>
-              <a:t>  tp_analyse.py</a:t>
-            </a:r>
-            <a:endParaRPr lang="en-US" sz="1150" dirty="0"/>
-          </a:p>
-          <a:p>
-            <a:pPr indent="0" marL="0">
-              <a:lnSpc>
-                <a:spcPct val="135000"/>
-              </a:lnSpc>
-              <a:buNone/>
-            </a:pPr>
-            <a:r>
-              <a:rPr lang="en-US" sz="1150" dirty="0">
-                <a:solidFill>
-                  <a:srgbClr val="1C2A24"/>
-                </a:solidFill>
-                <a:latin typeface="Courier New" pitchFamily="34" charset="0"/>
-                <a:ea typeface="Courier New" pitchFamily="34" charset="-122"/>
-                <a:cs typeface="Courier New" pitchFamily="34" charset="-120"/>
-              </a:rPr>
-              <a:t>projet-final/consignes.md</a:t>
-            </a:r>
-            <a:endParaRPr lang="en-US" sz="1150" dirty="0"/>
-          </a:p>
-        </p:txBody>
-      </p:sp>
-      <p:sp>
-        <p:nvSpPr>
-          <p:cNvPr id="21" name="Shape 18"/>
-          <p:cNvSpPr/>
-          <p:nvPr/>
-        </p:nvSpPr>
-        <p:spPr>
-          <a:xfrm>
-            <a:off x="7863840" y="4983480"/>
-            <a:ext cx="3749040" cy="1234440"/>
+                <a:latin typeface="Calibri" pitchFamily="34" charset="0"/>
+                <a:ea typeface="Calibri" pitchFamily="34" charset="-122"/>
+                <a:cs typeface="Calibri" pitchFamily="34" charset="-120"/>
+              </a:rPr>
+              <a:t>Jalon du soir</a:t>
+            </a:r>
+            <a:pPr indent="0" marL="0">
+              <a:buNone/>
+            </a:pPr>
+            <a:r>
+              <a:rPr lang="en-US" sz="1400" dirty="0">
+                <a:solidFill>
+                  <a:srgbClr val="5C6B63"/>
+                </a:solidFill>
+                <a:latin typeface="Calibri" pitchFamily="34" charset="0"/>
+                <a:ea typeface="Calibri" pitchFamily="34" charset="-122"/>
+                <a:cs typeface="Calibri" pitchFamily="34" charset="-120"/>
+              </a:rPr>
+              <a:t>  —  socle exécuté + lecture/validation sur vraies données</a:t>
+            </a:r>
+            <a:endParaRPr lang="en-US" sz="1400" dirty="0"/>
+          </a:p>
+        </p:txBody>
+      </p:sp>
+      <p:sp>
+        <p:nvSpPr>
+          <p:cNvPr id="17" name="Shape 14"/>
+          <p:cNvSpPr/>
+          <p:nvPr/>
+        </p:nvSpPr>
+        <p:spPr>
+          <a:xfrm>
+            <a:off x="7863840" y="1737360"/>
+            <a:ext cx="3749040" cy="3017520"/>
           </a:xfrm>
           <a:prstGeom prst="roundRect">
             <a:avLst>
-              <a:gd name="adj" fmla="val 7407"/>
+              <a:gd name="adj" fmla="val 3030"/>
             </a:avLst>
           </a:prstGeom>
           <a:solidFill>
-            <a:srgbClr val="0D3325"/>
+            <a:srgbClr val="EEF5EF"/>
           </a:solidFill>
           <a:ln/>
         </p:spPr>
       </p:sp>
       <p:sp>
         <p:nvSpPr>
-          <p:cNvPr id="22" name="Shape 19"/>
-          <p:cNvSpPr/>
-          <p:nvPr/>
-        </p:nvSpPr>
-        <p:spPr>
-          <a:xfrm>
-            <a:off x="8138160" y="5212080"/>
+          <p:cNvPr id="18" name="Shape 15"/>
+          <p:cNvSpPr/>
+          <p:nvPr/>
+        </p:nvSpPr>
+        <p:spPr>
+          <a:xfrm>
+            <a:off x="8138160" y="1965960"/>
             <a:ext cx="457200" cy="457200"/>
           </a:xfrm>
           <a:prstGeom prst="ellipse">
             <a:avLst/>
           </a:prstGeom>
           <a:solidFill>
-            <a:srgbClr val="C9A227"/>
+            <a:srgbClr val="C79100"/>
           </a:solidFill>
           <a:ln/>
         </p:spPr>
       </p:sp>
       <p:pic>
         <p:nvPicPr>
-          <p:cNvPr id="23" name="Image 1" descr="icons/bulb.png">    </p:cNvPr>
+          <p:cNvPr id="19" name="Image 1" descr="icons/folder.png">    </p:cNvPr>
           <p:cNvPicPr>
             <a:picLocks noChangeAspect="1"/>
           </p:cNvPicPr>
@@ -11075,6 +11108,233 @@
         </p:blipFill>
         <p:spPr>
           <a:xfrm>
+            <a:off x="8257032" y="2084832"/>
+            <a:ext cx="219456" cy="219456"/>
+          </a:xfrm>
+          <a:prstGeom prst="rect">
+            <a:avLst/>
+          </a:prstGeom>
+        </p:spPr>
+      </p:pic>
+      <p:sp>
+        <p:nvSpPr>
+          <p:cNvPr id="20" name="Text 16"/>
+          <p:cNvSpPr/>
+          <p:nvPr/>
+        </p:nvSpPr>
+        <p:spPr>
+          <a:xfrm>
+            <a:off x="8732520" y="2011680"/>
+            <a:ext cx="2743200" cy="365760"/>
+          </a:xfrm>
+          <a:prstGeom prst="rect">
+            <a:avLst/>
+          </a:prstGeom>
+          <a:noFill/>
+          <a:ln/>
+        </p:spPr>
+        <p:txBody>
+          <a:bodyPr wrap="square" lIns="0" tIns="0" rIns="0" bIns="0" rtlCol="0" anchor="ctr"/>
+          <a:lstStyle/>
+          <a:p>
+            <a:pPr indent="0" marL="0">
+              <a:buNone/>
+            </a:pPr>
+            <a:r>
+              <a:rPr lang="en-US" sz="1400" b="1" dirty="0">
+                <a:solidFill>
+                  <a:srgbClr val="0E7A3D"/>
+                </a:solidFill>
+                <a:latin typeface="Calibri" pitchFamily="34" charset="0"/>
+                <a:ea typeface="Calibri" pitchFamily="34" charset="-122"/>
+                <a:cs typeface="Calibri" pitchFamily="34" charset="-120"/>
+              </a:rPr>
+              <a:t>Fichiers du jour</a:t>
+            </a:r>
+            <a:endParaRPr lang="en-US" sz="1400" dirty="0"/>
+          </a:p>
+        </p:txBody>
+      </p:sp>
+      <p:sp>
+        <p:nvSpPr>
+          <p:cNvPr id="21" name="Text 17"/>
+          <p:cNvSpPr/>
+          <p:nvPr/>
+        </p:nvSpPr>
+        <p:spPr>
+          <a:xfrm>
+            <a:off x="8138160" y="2606040"/>
+            <a:ext cx="3291840" cy="2011680"/>
+          </a:xfrm>
+          <a:prstGeom prst="rect">
+            <a:avLst/>
+          </a:prstGeom>
+          <a:noFill/>
+          <a:ln/>
+        </p:spPr>
+        <p:txBody>
+          <a:bodyPr wrap="square" lIns="0" tIns="0" rIns="0" bIns="0" rtlCol="0" anchor="t"/>
+          <a:lstStyle/>
+          <a:p>
+            <a:pPr indent="0" marL="0">
+              <a:lnSpc>
+                <a:spcPct val="135000"/>
+              </a:lnSpc>
+              <a:buNone/>
+            </a:pPr>
+            <a:r>
+              <a:rPr lang="en-US" sz="1150" dirty="0">
+                <a:solidFill>
+                  <a:srgbClr val="1C2A24"/>
+                </a:solidFill>
+                <a:latin typeface="Courier New" pitchFamily="34" charset="0"/>
+                <a:ea typeface="Courier New" pitchFamily="34" charset="-122"/>
+                <a:cs typeface="Courier New" pitchFamily="34" charset="-120"/>
+              </a:rPr>
+              <a:t>08-poo/</a:t>
+            </a:r>
+            <a:endParaRPr lang="en-US" sz="1150" dirty="0"/>
+          </a:p>
+          <a:p>
+            <a:pPr indent="0" marL="0">
+              <a:lnSpc>
+                <a:spcPct val="135000"/>
+              </a:lnSpc>
+              <a:buNone/>
+            </a:pPr>
+            <a:r>
+              <a:rPr lang="en-US" sz="1150" dirty="0">
+                <a:solidFill>
+                  <a:srgbClr val="1C2A24"/>
+                </a:solidFill>
+                <a:latin typeface="Courier New" pitchFamily="34" charset="0"/>
+                <a:ea typeface="Courier New" pitchFamily="34" charset="-122"/>
+                <a:cs typeface="Courier New" pitchFamily="34" charset="-120"/>
+              </a:rPr>
+              <a:t>  tp_contribuable.py</a:t>
+            </a:r>
+            <a:endParaRPr lang="en-US" sz="1150" dirty="0"/>
+          </a:p>
+          <a:p>
+            <a:pPr indent="0" marL="0">
+              <a:lnSpc>
+                <a:spcPct val="135000"/>
+              </a:lnSpc>
+              <a:buNone/>
+            </a:pPr>
+            <a:r>
+              <a:rPr lang="en-US" sz="1150" dirty="0">
+                <a:solidFill>
+                  <a:srgbClr val="1C2A24"/>
+                </a:solidFill>
+                <a:latin typeface="Courier New" pitchFamily="34" charset="0"/>
+                <a:ea typeface="Courier New" pitchFamily="34" charset="-122"/>
+                <a:cs typeface="Courier New" pitchFamily="34" charset="-120"/>
+              </a:rPr>
+              <a:t>09-pandas-analyse/</a:t>
+            </a:r>
+            <a:endParaRPr lang="en-US" sz="1150" dirty="0"/>
+          </a:p>
+          <a:p>
+            <a:pPr indent="0" marL="0">
+              <a:lnSpc>
+                <a:spcPct val="135000"/>
+              </a:lnSpc>
+              <a:buNone/>
+            </a:pPr>
+            <a:r>
+              <a:rPr lang="en-US" sz="1150" dirty="0">
+                <a:solidFill>
+                  <a:srgbClr val="1C2A24"/>
+                </a:solidFill>
+                <a:latin typeface="Courier New" pitchFamily="34" charset="0"/>
+                <a:ea typeface="Courier New" pitchFamily="34" charset="-122"/>
+                <a:cs typeface="Courier New" pitchFamily="34" charset="-120"/>
+              </a:rPr>
+              <a:t>  tp_analyse.py</a:t>
+            </a:r>
+            <a:endParaRPr lang="en-US" sz="1150" dirty="0"/>
+          </a:p>
+          <a:p>
+            <a:pPr indent="0" marL="0">
+              <a:lnSpc>
+                <a:spcPct val="135000"/>
+              </a:lnSpc>
+              <a:buNone/>
+            </a:pPr>
+            <a:r>
+              <a:rPr lang="en-US" sz="1150" dirty="0">
+                <a:solidFill>
+                  <a:srgbClr val="1C2A24"/>
+                </a:solidFill>
+                <a:latin typeface="Courier New" pitchFamily="34" charset="0"/>
+                <a:ea typeface="Courier New" pitchFamily="34" charset="-122"/>
+                <a:cs typeface="Courier New" pitchFamily="34" charset="-120"/>
+              </a:rPr>
+              <a:t>projet-final/consignes.md</a:t>
+            </a:r>
+            <a:endParaRPr lang="en-US" sz="1150" dirty="0"/>
+          </a:p>
+        </p:txBody>
+      </p:sp>
+      <p:sp>
+        <p:nvSpPr>
+          <p:cNvPr id="22" name="Shape 18"/>
+          <p:cNvSpPr/>
+          <p:nvPr/>
+        </p:nvSpPr>
+        <p:spPr>
+          <a:xfrm>
+            <a:off x="7863840" y="4983480"/>
+            <a:ext cx="3749040" cy="1234440"/>
+          </a:xfrm>
+          <a:prstGeom prst="roundRect">
+            <a:avLst>
+              <a:gd name="adj" fmla="val 7407"/>
+            </a:avLst>
+          </a:prstGeom>
+          <a:solidFill>
+            <a:srgbClr val="0A2E1A"/>
+          </a:solidFill>
+          <a:ln/>
+        </p:spPr>
+      </p:sp>
+      <p:sp>
+        <p:nvSpPr>
+          <p:cNvPr id="23" name="Shape 19"/>
+          <p:cNvSpPr/>
+          <p:nvPr/>
+        </p:nvSpPr>
+        <p:spPr>
+          <a:xfrm>
+            <a:off x="8138160" y="5212080"/>
+            <a:ext cx="457200" cy="457200"/>
+          </a:xfrm>
+          <a:prstGeom prst="ellipse">
+            <a:avLst/>
+          </a:prstGeom>
+          <a:solidFill>
+            <a:srgbClr val="C79100"/>
+          </a:solidFill>
+          <a:ln/>
+        </p:spPr>
+      </p:sp>
+      <p:pic>
+        <p:nvPicPr>
+          <p:cNvPr id="24" name="Image 2" descr="icons/bulb.png">    </p:cNvPr>
+          <p:cNvPicPr>
+            <a:picLocks noChangeAspect="1"/>
+          </p:cNvPicPr>
+          <p:nvPr/>
+        </p:nvPicPr>
+        <p:blipFill>
+          <a:blip r:embed="rId3"/>
+          <a:stretch>
+            <a:fillRect/>
+          </a:stretch>
+        </p:blipFill>
+        <p:spPr>
+          <a:xfrm>
             <a:off x="8257032" y="5330952"/>
             <a:ext cx="219456" cy="219456"/>
           </a:xfrm>
@@ -11085,7 +11345,7 @@
       </p:pic>
       <p:sp>
         <p:nvSpPr>
-          <p:cNvPr id="24" name="Text 20"/>
+          <p:cNvPr id="25" name="Text 20"/>
           <p:cNvSpPr/>
           <p:nvPr/>
         </p:nvSpPr>

--- a/slides/sources/J4-objets-pandas.pptx
+++ b/slides/sources/J4-objets-pandas.pptx
@@ -1658,7 +1658,7 @@
     <p:bg>
       <p:bgPr>
         <a:solidFill>
-          <a:srgbClr val="0A2E1A"/>
+          <a:srgbClr val="FFFFFF"/>
         </a:solidFill>
       </p:bgPr>
     </p:bg>
@@ -1684,14 +1684,14 @@
         </p:nvSpPr>
         <p:spPr>
           <a:xfrm>
-            <a:off x="9692640" y="-1463040"/>
-            <a:ext cx="4206240" cy="4206240"/>
+            <a:off x="10149840" y="4846320"/>
+            <a:ext cx="3291840" cy="3291840"/>
           </a:xfrm>
           <a:prstGeom prst="ellipse">
             <a:avLst/>
           </a:prstGeom>
           <a:solidFill>
-            <a:srgbClr val="0E7A3D"/>
+            <a:srgbClr val="EEF5EF"/>
           </a:solidFill>
           <a:ln/>
         </p:spPr>
@@ -1704,67 +1704,21 @@
         </p:nvSpPr>
         <p:spPr>
           <a:xfrm>
-            <a:off x="10698480" y="4480560"/>
-            <a:ext cx="3108960" cy="3108960"/>
+            <a:off x="-1188720" y="-1371600"/>
+            <a:ext cx="2743200" cy="2743200"/>
           </a:xfrm>
           <a:prstGeom prst="ellipse">
             <a:avLst/>
           </a:prstGeom>
           <a:solidFill>
-            <a:srgbClr val="FCD116">
-              <a:alpha val="55000"/>
-            </a:srgbClr>
-          </a:solidFill>
-          <a:ln/>
-        </p:spPr>
-      </p:sp>
-      <p:sp>
-        <p:nvSpPr>
-          <p:cNvPr id="4" name="Shape 2"/>
-          <p:cNvSpPr/>
-          <p:nvPr/>
-        </p:nvSpPr>
-        <p:spPr>
-          <a:xfrm>
-            <a:off x="-1097280" y="5120640"/>
-            <a:ext cx="2743200" cy="2743200"/>
-          </a:xfrm>
-          <a:prstGeom prst="ellipse">
-            <a:avLst/>
-          </a:prstGeom>
-          <a:solidFill>
-            <a:srgbClr val="CE1126">
-              <a:alpha val="65000"/>
-            </a:srgbClr>
-          </a:solidFill>
-          <a:ln/>
-        </p:spPr>
-      </p:sp>
-      <p:sp>
-        <p:nvSpPr>
-          <p:cNvPr id="5" name="Shape 3"/>
-          <p:cNvSpPr/>
-          <p:nvPr/>
-        </p:nvSpPr>
-        <p:spPr>
-          <a:xfrm>
-            <a:off x="9464040" y="502920"/>
-            <a:ext cx="2148840" cy="1828800"/>
-          </a:xfrm>
-          <a:prstGeom prst="roundRect">
-            <a:avLst>
-              <a:gd name="adj" fmla="val 6000"/>
-            </a:avLst>
-          </a:prstGeom>
-          <a:solidFill>
-            <a:srgbClr val="FFFFFF"/>
+            <a:srgbClr val="EEF5EF"/>
           </a:solidFill>
           <a:ln/>
         </p:spPr>
       </p:sp>
       <p:pic>
         <p:nvPicPr>
-          <p:cNvPr id="6" name="Image 0" descr="logo-dgi.png">    </p:cNvPr>
+          <p:cNvPr id="4" name="Image 0" descr="logo-ministere.png">    </p:cNvPr>
           <p:cNvPicPr>
             <a:picLocks noChangeAspect="1"/>
           </p:cNvPicPr>
@@ -1778,23 +1732,47 @@
         </p:blipFill>
         <p:spPr>
           <a:xfrm>
-            <a:off x="9646920" y="740664"/>
-            <a:ext cx="1783080" cy="1353312"/>
+            <a:off x="640080" y="457200"/>
+            <a:ext cx="4206240" cy="822960"/>
           </a:xfrm>
           <a:prstGeom prst="rect">
             <a:avLst/>
           </a:prstGeom>
         </p:spPr>
       </p:pic>
-      <p:sp>
-        <p:nvSpPr>
-          <p:cNvPr id="7" name="Text 4"/>
-          <p:cNvSpPr/>
-          <p:nvPr/>
-        </p:nvSpPr>
-        <p:spPr>
-          <a:xfrm>
-            <a:off x="640080" y="777240"/>
+      <p:pic>
+        <p:nvPicPr>
+          <p:cNvPr id="5" name="Image 1" descr="logo-dgci.png">    </p:cNvPr>
+          <p:cNvPicPr>
+            <a:picLocks noChangeAspect="1"/>
+          </p:cNvPicPr>
+          <p:nvPr/>
+        </p:nvPicPr>
+        <p:blipFill>
+          <a:blip r:embed="rId2"/>
+          <a:stretch>
+            <a:fillRect/>
+          </a:stretch>
+        </p:blipFill>
+        <p:spPr>
+          <a:xfrm>
+            <a:off x="9144000" y="475488"/>
+            <a:ext cx="2468880" cy="758952"/>
+          </a:xfrm>
+          <a:prstGeom prst="rect">
+            <a:avLst/>
+          </a:prstGeom>
+        </p:spPr>
+      </p:pic>
+      <p:sp>
+        <p:nvSpPr>
+          <p:cNvPr id="6" name="Text 2"/>
+          <p:cNvSpPr/>
+          <p:nvPr/>
+        </p:nvSpPr>
+        <p:spPr>
+          <a:xfrm>
+            <a:off x="640080" y="1874520"/>
             <a:ext cx="7315200" cy="365760"/>
           </a:xfrm>
           <a:prstGeom prst="rect">
@@ -1813,7 +1791,7 @@
             <a:r>
               <a:rPr lang="en-US" sz="1500" b="1" spc="300" kern="0" dirty="0">
                 <a:solidFill>
-                  <a:srgbClr val="FCD116"/>
+                  <a:srgbClr val="C79100"/>
                 </a:solidFill>
                 <a:latin typeface="Calibri" pitchFamily="34" charset="0"/>
                 <a:ea typeface="Calibri" pitchFamily="34" charset="-122"/>
@@ -1827,13 +1805,13 @@
       </p:sp>
       <p:sp>
         <p:nvSpPr>
-          <p:cNvPr id="8" name="Text 5"/>
-          <p:cNvSpPr/>
-          <p:nvPr/>
-        </p:nvSpPr>
-        <p:spPr>
-          <a:xfrm>
-            <a:off x="640080" y="1417320"/>
+          <p:cNvPr id="7" name="Text 3"/>
+          <p:cNvSpPr/>
+          <p:nvPr/>
+        </p:nvSpPr>
+        <p:spPr>
+          <a:xfrm>
+            <a:off x="640080" y="2286000"/>
             <a:ext cx="8686800" cy="1371600"/>
           </a:xfrm>
           <a:prstGeom prst="rect">
@@ -1850,9 +1828,9 @@
               <a:buNone/>
             </a:pPr>
             <a:r>
-              <a:rPr lang="en-US" sz="8400" b="1" dirty="0">
-                <a:solidFill>
-                  <a:srgbClr val="FFFFFF"/>
+              <a:rPr lang="en-US" sz="8000" b="1" dirty="0">
+                <a:solidFill>
+                  <a:srgbClr val="0E7A3D"/>
                 </a:solidFill>
                 <a:latin typeface="Cambria" pitchFamily="34" charset="0"/>
                 <a:ea typeface="Cambria" pitchFamily="34" charset="-122"/>
@@ -1860,20 +1838,20 @@
               </a:rPr>
               <a:t>J4</a:t>
             </a:r>
-            <a:endParaRPr lang="en-US" sz="8400" dirty="0"/>
-          </a:p>
-        </p:txBody>
-      </p:sp>
-      <p:sp>
-        <p:nvSpPr>
-          <p:cNvPr id="9" name="Text 6"/>
-          <p:cNvSpPr/>
-          <p:nvPr/>
-        </p:nvSpPr>
-        <p:spPr>
-          <a:xfrm>
-            <a:off x="640080" y="2880360"/>
-            <a:ext cx="9418320" cy="914400"/>
+            <a:endParaRPr lang="en-US" sz="8000" dirty="0"/>
+          </a:p>
+        </p:txBody>
+      </p:sp>
+      <p:sp>
+        <p:nvSpPr>
+          <p:cNvPr id="8" name="Text 4"/>
+          <p:cNvSpPr/>
+          <p:nvPr/>
+        </p:nvSpPr>
+        <p:spPr>
+          <a:xfrm>
+            <a:off x="640080" y="3657600"/>
+            <a:ext cx="10058400" cy="914400"/>
           </a:xfrm>
           <a:prstGeom prst="rect">
             <a:avLst/>
@@ -1889,9 +1867,9 @@
               <a:buNone/>
             </a:pPr>
             <a:r>
-              <a:rPr lang="en-US" sz="3500" b="1" dirty="0">
-                <a:solidFill>
-                  <a:srgbClr val="FCD116"/>
+              <a:rPr lang="en-US" sz="3400" b="1" dirty="0">
+                <a:solidFill>
+                  <a:srgbClr val="1C2A24"/>
                 </a:solidFill>
                 <a:latin typeface="Cambria" pitchFamily="34" charset="0"/>
                 <a:ea typeface="Cambria" pitchFamily="34" charset="-122"/>
@@ -1899,20 +1877,20 @@
               </a:rPr>
               <a:t>Objets et analyse de données</a:t>
             </a:r>
-            <a:endParaRPr lang="en-US" sz="3500" dirty="0"/>
-          </a:p>
-        </p:txBody>
-      </p:sp>
-      <p:sp>
-        <p:nvSpPr>
-          <p:cNvPr id="10" name="Text 7"/>
-          <p:cNvSpPr/>
-          <p:nvPr/>
-        </p:nvSpPr>
-        <p:spPr>
-          <a:xfrm>
-            <a:off x="640080" y="3794760"/>
-            <a:ext cx="8778240" cy="822960"/>
+            <a:endParaRPr lang="en-US" sz="3400" dirty="0"/>
+          </a:p>
+        </p:txBody>
+      </p:sp>
+      <p:sp>
+        <p:nvSpPr>
+          <p:cNvPr id="9" name="Text 5"/>
+          <p:cNvSpPr/>
+          <p:nvPr/>
+        </p:nvSpPr>
+        <p:spPr>
+          <a:xfrm>
+            <a:off x="640080" y="4526280"/>
+            <a:ext cx="9326880" cy="822960"/>
           </a:xfrm>
           <a:prstGeom prst="rect">
             <a:avLst/>
@@ -1931,9 +1909,9 @@
               <a:buNone/>
             </a:pPr>
             <a:r>
-              <a:rPr lang="en-US" sz="1600" dirty="0">
-                <a:solidFill>
-                  <a:srgbClr val="CADFD2"/>
+              <a:rPr lang="en-US" sz="1550" dirty="0">
+                <a:solidFill>
+                  <a:srgbClr val="5C6B63"/>
                 </a:solidFill>
                 <a:latin typeface="Calibri" pitchFamily="34" charset="0"/>
                 <a:ea typeface="Calibri" pitchFamily="34" charset="-122"/>
@@ -1941,7 +1919,7 @@
               </a:rPr>
               <a:t>Modéliser le métier avec des dataclasses, puis nettoyer, agréger</a:t>
             </a:r>
-            <a:endParaRPr lang="en-US" sz="1600" dirty="0"/>
+            <a:endParaRPr lang="en-US" sz="1550" dirty="0"/>
           </a:p>
           <a:p>
             <a:pPr indent="0" marL="0">
@@ -1951,9 +1929,9 @@
               <a:buNone/>
             </a:pPr>
             <a:r>
-              <a:rPr lang="en-US" sz="1600" dirty="0">
-                <a:solidFill>
-                  <a:srgbClr val="CADFD2"/>
+              <a:rPr lang="en-US" sz="1550" dirty="0">
+                <a:solidFill>
+                  <a:srgbClr val="5C6B63"/>
                 </a:solidFill>
                 <a:latin typeface="Calibri" pitchFamily="34" charset="0"/>
                 <a:ea typeface="Calibri" pitchFamily="34" charset="-122"/>
@@ -1961,19 +1939,19 @@
               </a:rPr>
               <a:t>et joindre les fichiers avec pandas. Lancement du projet final.</a:t>
             </a:r>
-            <a:endParaRPr lang="en-US" sz="1600" dirty="0"/>
-          </a:p>
-        </p:txBody>
-      </p:sp>
-      <p:sp>
-        <p:nvSpPr>
-          <p:cNvPr id="11" name="Shape 8"/>
-          <p:cNvSpPr/>
-          <p:nvPr/>
-        </p:nvSpPr>
-        <p:spPr>
-          <a:xfrm>
-            <a:off x="640080" y="5120640"/>
+            <a:endParaRPr lang="en-US" sz="1550" dirty="0"/>
+          </a:p>
+        </p:txBody>
+      </p:sp>
+      <p:sp>
+        <p:nvSpPr>
+          <p:cNvPr id="10" name="Shape 6"/>
+          <p:cNvSpPr/>
+          <p:nvPr/>
+        </p:nvSpPr>
+        <p:spPr>
+          <a:xfrm>
+            <a:off x="640080" y="5440680"/>
             <a:ext cx="960120" cy="475488"/>
           </a:xfrm>
           <a:prstGeom prst="roundRect">
@@ -1989,13 +1967,13 @@
       </p:sp>
       <p:sp>
         <p:nvSpPr>
-          <p:cNvPr id="12" name="Text 9"/>
-          <p:cNvSpPr/>
-          <p:nvPr/>
-        </p:nvSpPr>
-        <p:spPr>
-          <a:xfrm>
-            <a:off x="640080" y="5120640"/>
+          <p:cNvPr id="11" name="Text 7"/>
+          <p:cNvSpPr/>
+          <p:nvPr/>
+        </p:nvSpPr>
+        <p:spPr>
+          <a:xfrm>
+            <a:off x="640080" y="5440680"/>
             <a:ext cx="960120" cy="475488"/>
           </a:xfrm>
           <a:prstGeom prst="rect">
@@ -2028,13 +2006,13 @@
       </p:sp>
       <p:sp>
         <p:nvSpPr>
-          <p:cNvPr id="13" name="Shape 10"/>
-          <p:cNvSpPr/>
-          <p:nvPr/>
-        </p:nvSpPr>
-        <p:spPr>
-          <a:xfrm>
-            <a:off x="1828800" y="5120640"/>
+          <p:cNvPr id="12" name="Shape 8"/>
+          <p:cNvSpPr/>
+          <p:nvPr/>
+        </p:nvSpPr>
+        <p:spPr>
+          <a:xfrm>
+            <a:off x="1828800" y="5440680"/>
             <a:ext cx="2016252" cy="475488"/>
           </a:xfrm>
           <a:prstGeom prst="roundRect">
@@ -2050,13 +2028,13 @@
       </p:sp>
       <p:sp>
         <p:nvSpPr>
-          <p:cNvPr id="14" name="Text 11"/>
-          <p:cNvSpPr/>
-          <p:nvPr/>
-        </p:nvSpPr>
-        <p:spPr>
-          <a:xfrm>
-            <a:off x="1828800" y="5120640"/>
+          <p:cNvPr id="13" name="Text 9"/>
+          <p:cNvSpPr/>
+          <p:nvPr/>
+        </p:nvSpPr>
+        <p:spPr>
+          <a:xfrm>
+            <a:off x="1828800" y="5440680"/>
             <a:ext cx="2016252" cy="475488"/>
           </a:xfrm>
           <a:prstGeom prst="rect">
@@ -2089,13 +2067,13 @@
       </p:sp>
       <p:sp>
         <p:nvSpPr>
-          <p:cNvPr id="15" name="Shape 12"/>
-          <p:cNvSpPr/>
-          <p:nvPr/>
-        </p:nvSpPr>
-        <p:spPr>
-          <a:xfrm>
-            <a:off x="4073652" y="5120640"/>
+          <p:cNvPr id="14" name="Shape 10"/>
+          <p:cNvSpPr/>
+          <p:nvPr/>
+        </p:nvSpPr>
+        <p:spPr>
+          <a:xfrm>
+            <a:off x="4073652" y="5440680"/>
             <a:ext cx="1536192" cy="475488"/>
           </a:xfrm>
           <a:prstGeom prst="roundRect">
@@ -2111,13 +2089,13 @@
       </p:sp>
       <p:sp>
         <p:nvSpPr>
-          <p:cNvPr id="16" name="Text 13"/>
-          <p:cNvSpPr/>
-          <p:nvPr/>
-        </p:nvSpPr>
-        <p:spPr>
-          <a:xfrm>
-            <a:off x="4073652" y="5120640"/>
+          <p:cNvPr id="15" name="Text 11"/>
+          <p:cNvSpPr/>
+          <p:nvPr/>
+        </p:nvSpPr>
+        <p:spPr>
+          <a:xfrm>
+            <a:off x="4073652" y="5440680"/>
             <a:ext cx="1536192" cy="475488"/>
           </a:xfrm>
           <a:prstGeom prst="rect">
@@ -2150,14 +2128,14 @@
       </p:sp>
       <p:sp>
         <p:nvSpPr>
-          <p:cNvPr id="17" name="Text 14"/>
-          <p:cNvSpPr/>
-          <p:nvPr/>
-        </p:nvSpPr>
-        <p:spPr>
-          <a:xfrm>
-            <a:off x="640080" y="6172200"/>
-            <a:ext cx="10058400" cy="320040"/>
+          <p:cNvPr id="16" name="Text 12"/>
+          <p:cNvSpPr/>
+          <p:nvPr/>
+        </p:nvSpPr>
+        <p:spPr>
+          <a:xfrm>
+            <a:off x="640080" y="6263640"/>
+            <a:ext cx="10972800" cy="320040"/>
           </a:xfrm>
           <a:prstGeom prst="rect">
             <a:avLst/>
@@ -2173,17 +2151,17 @@
               <a:buNone/>
             </a:pPr>
             <a:r>
-              <a:rPr lang="en-US" sz="1200" dirty="0">
-                <a:solidFill>
-                  <a:srgbClr val="8FAF9F"/>
+              <a:rPr lang="en-US" sz="1150" dirty="0">
+                <a:solidFill>
+                  <a:srgbClr val="5C6B63"/>
                 </a:solidFill>
                 <a:latin typeface="Calibri" pitchFamily="34" charset="0"/>
                 <a:ea typeface="Calibri" pitchFamily="34" charset="-122"/>
                 <a:cs typeface="Calibri" pitchFamily="34" charset="-120"/>
               </a:rPr>
-              <a:t>DGI — Direction Générale des Impôts · Guinée-Bissau · données pédagogiques fictives</a:t>
-            </a:r>
-            <a:endParaRPr lang="en-US" sz="1200" dirty="0"/>
+              <a:t>DGCI — Direção Geral das Contribuições e Impostos · Guinée-Bissau · données pédagogiques fictives</a:t>
+            </a:r>
+            <a:endParaRPr lang="en-US" sz="1150" dirty="0"/>
           </a:p>
         </p:txBody>
       </p:sp>
@@ -3080,7 +3058,7 @@
       </p:sp>
       <p:pic>
         <p:nvPicPr>
-          <p:cNvPr id="4" name="Image 0" descr="logo-dgi.png">    </p:cNvPr>
+          <p:cNvPr id="4" name="Image 0" descr="logo-dgci.png">    </p:cNvPr>
           <p:cNvPicPr>
             <a:picLocks noChangeAspect="1"/>
           </p:cNvPicPr>
@@ -3094,8 +3072,8 @@
         </p:blipFill>
         <p:spPr>
           <a:xfrm>
-            <a:off x="10744200" y="384048"/>
-            <a:ext cx="1051560" cy="795528"/>
+            <a:off x="10287000" y="475488"/>
+            <a:ext cx="1481328" cy="457200"/>
           </a:xfrm>
           <a:prstGeom prst="rect">
             <a:avLst/>
@@ -4292,7 +4270,7 @@
       </p:sp>
       <p:pic>
         <p:nvPicPr>
-          <p:cNvPr id="4" name="Image 0" descr="logo-dgi.png">    </p:cNvPr>
+          <p:cNvPr id="4" name="Image 0" descr="logo-dgci.png">    </p:cNvPr>
           <p:cNvPicPr>
             <a:picLocks noChangeAspect="1"/>
           </p:cNvPicPr>
@@ -4306,8 +4284,8 @@
         </p:blipFill>
         <p:spPr>
           <a:xfrm>
-            <a:off x="10744200" y="384048"/>
-            <a:ext cx="1051560" cy="795528"/>
+            <a:off x="10287000" y="475488"/>
+            <a:ext cx="1481328" cy="457200"/>
           </a:xfrm>
           <a:prstGeom prst="rect">
             <a:avLst/>
@@ -5468,7 +5446,7 @@
       </p:sp>
       <p:pic>
         <p:nvPicPr>
-          <p:cNvPr id="4" name="Image 0" descr="logo-dgi.png">    </p:cNvPr>
+          <p:cNvPr id="4" name="Image 0" descr="logo-dgci.png">    </p:cNvPr>
           <p:cNvPicPr>
             <a:picLocks noChangeAspect="1"/>
           </p:cNvPicPr>
@@ -5482,8 +5460,8 @@
         </p:blipFill>
         <p:spPr>
           <a:xfrm>
-            <a:off x="10744200" y="384048"/>
-            <a:ext cx="1051560" cy="795528"/>
+            <a:off x="10287000" y="475488"/>
+            <a:ext cx="1481328" cy="457200"/>
           </a:xfrm>
           <a:prstGeom prst="rect">
             <a:avLst/>
@@ -6712,7 +6690,7 @@
       </p:sp>
       <p:pic>
         <p:nvPicPr>
-          <p:cNvPr id="4" name="Image 0" descr="logo-dgi.png">    </p:cNvPr>
+          <p:cNvPr id="4" name="Image 0" descr="logo-dgci.png">    </p:cNvPr>
           <p:cNvPicPr>
             <a:picLocks noChangeAspect="1"/>
           </p:cNvPicPr>
@@ -6726,8 +6704,8 @@
         </p:blipFill>
         <p:spPr>
           <a:xfrm>
-            <a:off x="10744200" y="384048"/>
-            <a:ext cx="1051560" cy="795528"/>
+            <a:off x="10287000" y="475488"/>
+            <a:ext cx="1481328" cy="457200"/>
           </a:xfrm>
           <a:prstGeom prst="rect">
             <a:avLst/>
@@ -7973,7 +7951,7 @@
       </p:sp>
       <p:pic>
         <p:nvPicPr>
-          <p:cNvPr id="4" name="Image 0" descr="logo-dgi.png">    </p:cNvPr>
+          <p:cNvPr id="4" name="Image 0" descr="logo-dgci.png">    </p:cNvPr>
           <p:cNvPicPr>
             <a:picLocks noChangeAspect="1"/>
           </p:cNvPicPr>
@@ -7987,8 +7965,8 @@
         </p:blipFill>
         <p:spPr>
           <a:xfrm>
-            <a:off x="10744200" y="384048"/>
-            <a:ext cx="1051560" cy="795528"/>
+            <a:off x="10287000" y="475488"/>
+            <a:ext cx="1481328" cy="457200"/>
           </a:xfrm>
           <a:prstGeom prst="rect">
             <a:avLst/>
@@ -9132,7 +9110,7 @@
       </p:sp>
       <p:pic>
         <p:nvPicPr>
-          <p:cNvPr id="4" name="Image 0" descr="logo-dgi.png">    </p:cNvPr>
+          <p:cNvPr id="4" name="Image 0" descr="logo-dgci.png">    </p:cNvPr>
           <p:cNvPicPr>
             <a:picLocks noChangeAspect="1"/>
           </p:cNvPicPr>
@@ -9146,8 +9124,8 @@
         </p:blipFill>
         <p:spPr>
           <a:xfrm>
-            <a:off x="10744200" y="384048"/>
-            <a:ext cx="1051560" cy="795528"/>
+            <a:off x="10287000" y="475488"/>
+            <a:ext cx="1481328" cy="457200"/>
           </a:xfrm>
           <a:prstGeom prst="rect">
             <a:avLst/>
@@ -9805,7 +9783,7 @@
       </p:sp>
       <p:pic>
         <p:nvPicPr>
-          <p:cNvPr id="4" name="Image 0" descr="logo-dgi.png">    </p:cNvPr>
+          <p:cNvPr id="4" name="Image 0" descr="logo-dgci.png">    </p:cNvPr>
           <p:cNvPicPr>
             <a:picLocks noChangeAspect="1"/>
           </p:cNvPicPr>
@@ -9819,8 +9797,8 @@
         </p:blipFill>
         <p:spPr>
           <a:xfrm>
-            <a:off x="10744200" y="384048"/>
-            <a:ext cx="1051560" cy="795528"/>
+            <a:off x="10287000" y="475488"/>
+            <a:ext cx="1481328" cy="457200"/>
           </a:xfrm>
           <a:prstGeom prst="rect">
             <a:avLst/>
@@ -10580,7 +10558,7 @@
       </p:sp>
       <p:pic>
         <p:nvPicPr>
-          <p:cNvPr id="4" name="Image 0" descr="logo-dgi.png">    </p:cNvPr>
+          <p:cNvPr id="4" name="Image 0" descr="logo-dgci.png">    </p:cNvPr>
           <p:cNvPicPr>
             <a:picLocks noChangeAspect="1"/>
           </p:cNvPicPr>
@@ -10594,8 +10572,8 @@
         </p:blipFill>
         <p:spPr>
           <a:xfrm>
-            <a:off x="10744200" y="384048"/>
-            <a:ext cx="1051560" cy="795528"/>
+            <a:off x="10287000" y="475488"/>
+            <a:ext cx="1481328" cy="457200"/>
           </a:xfrm>
           <a:prstGeom prst="rect">
             <a:avLst/>
